--- a/output/wordlabs-thermo-3day.pptx
+++ b/output/wordlabs-thermo-3day.pptx
@@ -4240,7 +4240,7 @@
                 <a:ea typeface="Calibri" pitchFamily="34" charset="-122"/>
                 <a:cs typeface="Calibri" pitchFamily="34" charset="-120"/>
               </a:rPr>
-              <a:t>"heat or temperature"</a:t>
+              <a:t>"heat, temperature"</a:t>
             </a:r>
             <a:endParaRPr lang="en-US" sz="2200" dirty="0"/>
           </a:p>
@@ -5288,7 +5288,7 @@
                 <a:ea typeface="Calibri" pitchFamily="34" charset="-122"/>
                 <a:cs typeface="Calibri" pitchFamily="34" charset="-120"/>
               </a:rPr>
-              <a:t>Word Labs  •  wordlabs.app  •  Root: 'thermo' = heat or temperature</a:t>
+              <a:t>Word Labs  •  wordlabs.app  •  Root: 'thermo' = heat, temperature</a:t>
             </a:r>
             <a:endParaRPr lang="en-US" sz="800" dirty="0"/>
           </a:p>
@@ -5928,7 +5928,7 @@
                 <a:ea typeface="Calibri" pitchFamily="34" charset="-122"/>
                 <a:cs typeface="Calibri" pitchFamily="34" charset="-120"/>
               </a:rPr>
-              <a:t>Word Labs  •  wordlabs.app  •  Root: 'thermo' = heat or temperature</a:t>
+              <a:t>Word Labs  •  wordlabs.app  •  Root: 'thermo' = heat, temperature</a:t>
             </a:r>
             <a:endParaRPr lang="en-US" sz="800" dirty="0"/>
           </a:p>
@@ -6071,7 +6071,7 @@
                 <a:ea typeface="Calibri" pitchFamily="34" charset="-122"/>
                 <a:cs typeface="Calibri" pitchFamily="34" charset="-120"/>
               </a:rPr>
-              <a:t> showed a high temperature, so we adjusted the </a:t>
+              <a:t> showed a very low temperature, so Mum adjusted the </a:t>
             </a:r>
             <a:pPr algn="l" indent="0" marL="0">
               <a:buNone/>
@@ -6102,7 +6102,7 @@
                 <a:ea typeface="Calibri" pitchFamily="34" charset="-122"/>
                 <a:cs typeface="Calibri" pitchFamily="34" charset="-120"/>
               </a:rPr>
-              <a:t> to cool the room down.</a:t>
+              <a:t> to warm the house.</a:t>
             </a:r>
             <a:endParaRPr lang="en-US" sz="1800" dirty="0"/>
           </a:p>
@@ -6716,7 +6716,7 @@
                 <a:ea typeface="Calibri" pitchFamily="34" charset="-122"/>
                 <a:cs typeface="Calibri" pitchFamily="34" charset="-120"/>
               </a:rPr>
-              <a:t>Word Labs  •  wordlabs.app  •  Root: 'thermo' = heat or temperature</a:t>
+              <a:t>Word Labs  •  wordlabs.app  •  Root: 'thermo' = heat, temperature</a:t>
             </a:r>
             <a:endParaRPr lang="en-US" sz="800" dirty="0"/>
           </a:p>
@@ -7543,7 +7543,7 @@
                 <a:ea typeface="Calibri" pitchFamily="34" charset="-122"/>
                 <a:cs typeface="Calibri" pitchFamily="34" charset="-120"/>
               </a:rPr>
-              <a:t>Word Labs  •  wordlabs.app  •  Root: 'thermo' = heat or temperature</a:t>
+              <a:t>Word Labs  •  wordlabs.app  •  Root: 'thermo' = heat, temperature</a:t>
             </a:r>
             <a:endParaRPr lang="en-US" sz="800" dirty="0"/>
           </a:p>
@@ -8528,7 +8528,7 @@
                 <a:ea typeface="Calibri" pitchFamily="34" charset="-122"/>
                 <a:cs typeface="Calibri" pitchFamily="34" charset="-120"/>
               </a:rPr>
-              <a:t>Word Labs  •  wordlabs.app  •  Root: 'thermo' = heat or temperature</a:t>
+              <a:t>Word Labs  •  wordlabs.app  •  Root: 'thermo' = heat, temperature</a:t>
             </a:r>
             <a:endParaRPr lang="en-US" sz="800" dirty="0"/>
           </a:p>
@@ -9855,7 +9855,7 @@
                 <a:ea typeface="Calibri" pitchFamily="34" charset="-122"/>
                 <a:cs typeface="Calibri" pitchFamily="34" charset="-120"/>
               </a:rPr>
-              <a:t>Word Labs  •  wordlabs.app  •  Root: 'thermo' = heat or temperature</a:t>
+              <a:t>Word Labs  •  wordlabs.app  •  Root: 'thermo' = heat, temperature</a:t>
             </a:r>
             <a:endParaRPr lang="en-US" sz="800" dirty="0"/>
           </a:p>
@@ -11671,7 +11671,7 @@
                 <a:ea typeface="Calibri" pitchFamily="34" charset="-122"/>
                 <a:cs typeface="Calibri" pitchFamily="34" charset="-120"/>
               </a:rPr>
-              <a:t>Word Labs  •  wordlabs.app  •  Root: 'thermo' = heat or temperature</a:t>
+              <a:t>Word Labs  •  wordlabs.app  •  Root: 'thermo' = heat, temperature</a:t>
             </a:r>
             <a:endParaRPr lang="en-US" sz="800" dirty="0"/>
           </a:p>
@@ -12498,7 +12498,7 @@
                 <a:ea typeface="Calibri" pitchFamily="34" charset="-122"/>
                 <a:cs typeface="Calibri" pitchFamily="34" charset="-120"/>
               </a:rPr>
-              <a:t>Word Labs  •  wordlabs.app  •  Root: 'thermo' = heat or temperature</a:t>
+              <a:t>Word Labs  •  wordlabs.app  •  Root: 'thermo' = heat, temperature</a:t>
             </a:r>
             <a:endParaRPr lang="en-US" sz="800" dirty="0"/>
           </a:p>
@@ -13483,7 +13483,7 @@
                 <a:ea typeface="Calibri" pitchFamily="34" charset="-122"/>
                 <a:cs typeface="Calibri" pitchFamily="34" charset="-120"/>
               </a:rPr>
-              <a:t>Word Labs  •  wordlabs.app  •  Root: 'thermo' = heat or temperature</a:t>
+              <a:t>Word Labs  •  wordlabs.app  •  Root: 'thermo' = heat, temperature</a:t>
             </a:r>
             <a:endParaRPr lang="en-US" sz="800" dirty="0"/>
           </a:p>
@@ -14614,7 +14614,7 @@
                 <a:ea typeface="Calibri" pitchFamily="34" charset="-122"/>
                 <a:cs typeface="Calibri" pitchFamily="34" charset="-120"/>
               </a:rPr>
-              <a:t>Root 'thermo' — heat or temperature</a:t>
+              <a:t>Root 'thermo' — heat, temperature</a:t>
             </a:r>
             <a:endParaRPr lang="en-US" sz="1600" dirty="0"/>
           </a:p>
@@ -14970,7 +14970,7 @@
                 <a:ea typeface="Calibri" pitchFamily="34" charset="-122"/>
                 <a:cs typeface="Calibri" pitchFamily="34" charset="-120"/>
               </a:rPr>
-              <a:t>Word Labs  •  wordlabs.app  •  Root: 'thermo' = heat or temperature</a:t>
+              <a:t>Word Labs  •  wordlabs.app  •  Root: 'thermo' = heat, temperature</a:t>
             </a:r>
             <a:endParaRPr lang="en-US" sz="800" dirty="0"/>
           </a:p>
@@ -16963,7 +16963,7 @@
                 <a:ea typeface="Calibri" pitchFamily="34" charset="-122"/>
                 <a:cs typeface="Calibri" pitchFamily="34" charset="-120"/>
               </a:rPr>
-              <a:t>Word Labs  •  wordlabs.app  •  Root: 'thermo' = heat or temperature</a:t>
+              <a:t>Word Labs  •  wordlabs.app  •  Root: 'thermo' = heat, temperature</a:t>
             </a:r>
             <a:endParaRPr lang="en-US" sz="800" dirty="0"/>
           </a:p>
@@ -17603,7 +17603,7 @@
                 <a:ea typeface="Calibri" pitchFamily="34" charset="-122"/>
                 <a:cs typeface="Calibri" pitchFamily="34" charset="-120"/>
               </a:rPr>
-              <a:t>Word Labs  •  wordlabs.app  •  Root: 'thermo' = heat or temperature</a:t>
+              <a:t>Word Labs  •  wordlabs.app  •  Root: 'thermo' = heat, temperature</a:t>
             </a:r>
             <a:endParaRPr lang="en-US" sz="800" dirty="0"/>
           </a:p>
@@ -17715,7 +17715,7 @@
                 <a:ea typeface="Calibri" pitchFamily="34" charset="-122"/>
                 <a:cs typeface="Calibri" pitchFamily="34" charset="-120"/>
               </a:rPr>
-              <a:t>The </a:t>
+              <a:t>During our science lesson, we learned that </a:t>
             </a:r>
             <a:pPr algn="l" indent="0" marL="0">
               <a:buNone/>
@@ -17732,7 +17732,7 @@
                 <a:ea typeface="Calibri" pitchFamily="34" charset="-122"/>
                 <a:cs typeface="Calibri" pitchFamily="34" charset="-120"/>
               </a:rPr>
-              <a:t>thermodynamics</a:t>
+              <a:t>geothermal</a:t>
             </a:r>
             <a:pPr algn="l" indent="0" marL="0">
               <a:buNone/>
@@ -17746,7 +17746,7 @@
                 <a:ea typeface="Calibri" pitchFamily="34" charset="-122"/>
                 <a:cs typeface="Calibri" pitchFamily="34" charset="-120"/>
               </a:rPr>
-              <a:t> lesson explained how a </a:t>
+              <a:t> energy uses Earth's heat, which is studied in </a:t>
             </a:r>
             <a:pPr algn="l" indent="0" marL="0">
               <a:buNone/>
@@ -17763,7 +17763,7 @@
                 <a:ea typeface="Calibri" pitchFamily="34" charset="-122"/>
                 <a:cs typeface="Calibri" pitchFamily="34" charset="-120"/>
               </a:rPr>
-              <a:t>thermostat</a:t>
+              <a:t>thermodynamics</a:t>
             </a:r>
             <a:pPr algn="l" indent="0" marL="0">
               <a:buNone/>
@@ -17777,7 +17777,7 @@
                 <a:ea typeface="Calibri" pitchFamily="34" charset="-122"/>
                 <a:cs typeface="Calibri" pitchFamily="34" charset="-120"/>
               </a:rPr>
-              <a:t> works, and why </a:t>
+              <a:t>, and that </a:t>
             </a:r>
             <a:pPr algn="l" indent="0" marL="0">
               <a:buNone/>
@@ -17794,7 +17794,7 @@
                 <a:ea typeface="Calibri" pitchFamily="34" charset="-122"/>
                 <a:cs typeface="Calibri" pitchFamily="34" charset="-120"/>
               </a:rPr>
-              <a:t>geothermal</a:t>
+              <a:t>hypothermia</a:t>
             </a:r>
             <a:pPr algn="l" indent="0" marL="0">
               <a:buNone/>
@@ -17808,7 +17808,7 @@
                 <a:ea typeface="Calibri" pitchFamily="34" charset="-122"/>
                 <a:cs typeface="Calibri" pitchFamily="34" charset="-120"/>
               </a:rPr>
-              <a:t> energy is an important renewable resource.</a:t>
+              <a:t> can be life-threatening.</a:t>
             </a:r>
             <a:endParaRPr lang="en-US" sz="1800" dirty="0"/>
           </a:p>
@@ -17963,7 +17963,7 @@
                 <a:ea typeface="Trebuchet MS" pitchFamily="34" charset="-122"/>
                 <a:cs typeface="Trebuchet MS" pitchFamily="34" charset="-120"/>
               </a:rPr>
-              <a:t>thermodynamics</a:t>
+              <a:t>geothermal</a:t>
             </a:r>
             <a:endParaRPr lang="en-US" sz="1400" dirty="0"/>
           </a:p>
@@ -18091,7 +18091,7 @@
                 <a:ea typeface="Trebuchet MS" pitchFamily="34" charset="-122"/>
                 <a:cs typeface="Trebuchet MS" pitchFamily="34" charset="-120"/>
               </a:rPr>
-              <a:t>thermostat</a:t>
+              <a:t>thermodynamics</a:t>
             </a:r>
             <a:endParaRPr lang="en-US" sz="1400" dirty="0"/>
           </a:p>
@@ -18219,7 +18219,7 @@
                 <a:ea typeface="Trebuchet MS" pitchFamily="34" charset="-122"/>
                 <a:cs typeface="Trebuchet MS" pitchFamily="34" charset="-120"/>
               </a:rPr>
-              <a:t>geothermal</a:t>
+              <a:t>hypothermia</a:t>
             </a:r>
             <a:endParaRPr lang="en-US" sz="1400" dirty="0"/>
           </a:p>
@@ -18550,7 +18550,7 @@
                 <a:ea typeface="Calibri" pitchFamily="34" charset="-122"/>
                 <a:cs typeface="Calibri" pitchFamily="34" charset="-120"/>
               </a:rPr>
-              <a:t>Word Labs  •  wordlabs.app  •  Root: 'thermo' = heat or temperature</a:t>
+              <a:t>Word Labs  •  wordlabs.app  •  Root: 'thermo' = heat, temperature</a:t>
             </a:r>
             <a:endParaRPr lang="en-US" sz="800" dirty="0"/>
           </a:p>
@@ -18689,7 +18689,7 @@
                 <a:ea typeface="Trebuchet MS" pitchFamily="34" charset="-122"/>
                 <a:cs typeface="Trebuchet MS" pitchFamily="34" charset="-120"/>
               </a:rPr>
-              <a:t>thermodynamics</a:t>
+              <a:t>geothermal</a:t>
             </a:r>
             <a:endParaRPr lang="en-US" sz="2800" dirty="0"/>
           </a:p>
@@ -19377,7 +19377,7 @@
                 <a:ea typeface="Calibri" pitchFamily="34" charset="-122"/>
                 <a:cs typeface="Calibri" pitchFamily="34" charset="-120"/>
               </a:rPr>
-              <a:t>Word Labs  •  wordlabs.app  •  Root: 'thermo' = heat or temperature</a:t>
+              <a:t>Word Labs  •  wordlabs.app  •  Root: 'thermo' = heat, temperature</a:t>
             </a:r>
             <a:endParaRPr lang="en-US" sz="800" dirty="0"/>
           </a:p>
@@ -19516,7 +19516,7 @@
                 <a:ea typeface="Trebuchet MS" pitchFamily="34" charset="-122"/>
                 <a:cs typeface="Trebuchet MS" pitchFamily="34" charset="-120"/>
               </a:rPr>
-              <a:t>thermodynamics</a:t>
+              <a:t>geothermal</a:t>
             </a:r>
             <a:endParaRPr lang="en-US" sz="2800" dirty="0"/>
           </a:p>
@@ -19596,7 +19596,7 @@
         </p:nvSpPr>
         <p:spPr>
           <a:xfrm>
-            <a:off x="2938272" y="2258568"/>
+            <a:off x="2221992" y="2258568"/>
             <a:ext cx="1828800" cy="292608"/>
           </a:xfrm>
           <a:prstGeom prst="rect">
@@ -19605,11 +19605,11 @@
             </a:avLst>
           </a:prstGeom>
           <a:solidFill>
-            <a:srgbClr val="CCFBF1"/>
+            <a:srgbClr val="DDD6FE"/>
           </a:solidFill>
           <a:ln w="19050">
             <a:solidFill>
-              <a:srgbClr val="0D9488"/>
+              <a:srgbClr val="7C3AED"/>
             </a:solidFill>
             <a:prstDash val="solid"/>
           </a:ln>
@@ -19630,7 +19630,7 @@
         </p:nvSpPr>
         <p:spPr>
           <a:xfrm>
-            <a:off x="2938272" y="2258568"/>
+            <a:off x="2221992" y="2258568"/>
             <a:ext cx="1828800" cy="292608"/>
           </a:xfrm>
           <a:prstGeom prst="rect">
@@ -19649,13 +19649,13 @@
             <a:r>
               <a:rPr lang="en-US" sz="1300" b="1" dirty="0">
                 <a:solidFill>
-                  <a:srgbClr val="0F766E"/>
+                  <a:srgbClr val="4C1D95"/>
                 </a:solidFill>
                 <a:latin typeface="Trebuchet MS" pitchFamily="34" charset="0"/>
                 <a:ea typeface="Trebuchet MS" pitchFamily="34" charset="-122"/>
                 <a:cs typeface="Trebuchet MS" pitchFamily="34" charset="-120"/>
               </a:rPr>
-              <a:t>thermo</a:t>
+              <a:t>geo</a:t>
             </a:r>
             <a:endParaRPr lang="en-US" sz="1300" dirty="0"/>
           </a:p>
@@ -19669,7 +19669,7 @@
         </p:nvSpPr>
         <p:spPr>
           <a:xfrm>
-            <a:off x="2938272" y="2569464"/>
+            <a:off x="2221992" y="2569464"/>
             <a:ext cx="1828800" cy="201168"/>
           </a:xfrm>
           <a:prstGeom prst="rect">
@@ -19694,7 +19694,7 @@
                 <a:ea typeface="Calibri" pitchFamily="34" charset="-122"/>
                 <a:cs typeface="Calibri" pitchFamily="34" charset="-120"/>
               </a:rPr>
-              <a:t>heat</a:t>
+              <a:t>earth</a:t>
             </a:r>
             <a:endParaRPr lang="en-US" sz="850" dirty="0"/>
           </a:p>
@@ -19708,7 +19708,7 @@
         </p:nvSpPr>
         <p:spPr>
           <a:xfrm>
-            <a:off x="5803392" y="2258568"/>
+            <a:off x="4370832" y="2258568"/>
             <a:ext cx="1828800" cy="292608"/>
           </a:xfrm>
           <a:prstGeom prst="rect">
@@ -19717,11 +19717,11 @@
             </a:avLst>
           </a:prstGeom>
           <a:solidFill>
-            <a:srgbClr val="FCE7F3"/>
+            <a:srgbClr val="CCFBF1"/>
           </a:solidFill>
           <a:ln w="19050">
             <a:solidFill>
-              <a:srgbClr val="DB2777"/>
+              <a:srgbClr val="0D9488"/>
             </a:solidFill>
             <a:prstDash val="solid"/>
           </a:ln>
@@ -19742,7 +19742,7 @@
         </p:nvSpPr>
         <p:spPr>
           <a:xfrm>
-            <a:off x="5803392" y="2258568"/>
+            <a:off x="4370832" y="2258568"/>
             <a:ext cx="1828800" cy="292608"/>
           </a:xfrm>
           <a:prstGeom prst="rect">
@@ -19761,13 +19761,13 @@
             <a:r>
               <a:rPr lang="en-US" sz="1300" b="1" dirty="0">
                 <a:solidFill>
-                  <a:srgbClr val="9D174D"/>
+                  <a:srgbClr val="0F766E"/>
                 </a:solidFill>
                 <a:latin typeface="Trebuchet MS" pitchFamily="34" charset="0"/>
                 <a:ea typeface="Trebuchet MS" pitchFamily="34" charset="-122"/>
                 <a:cs typeface="Trebuchet MS" pitchFamily="34" charset="-120"/>
               </a:rPr>
-              <a:t>dynamics</a:t>
+              <a:t>thermo</a:t>
             </a:r>
             <a:endParaRPr lang="en-US" sz="1300" dirty="0"/>
           </a:p>
@@ -19781,7 +19781,7 @@
         </p:nvSpPr>
         <p:spPr>
           <a:xfrm>
-            <a:off x="5803392" y="2569464"/>
+            <a:off x="4370832" y="2569464"/>
             <a:ext cx="1828800" cy="201168"/>
           </a:xfrm>
           <a:prstGeom prst="rect">
@@ -19806,7 +19806,7 @@
                 <a:ea typeface="Calibri" pitchFamily="34" charset="-122"/>
                 <a:cs typeface="Calibri" pitchFamily="34" charset="-120"/>
               </a:rPr>
-              <a:t>power or forces in motion</a:t>
+              <a:t>heat</a:t>
             </a:r>
             <a:endParaRPr lang="en-US" sz="850" dirty="0"/>
           </a:p>
@@ -19815,6 +19815,118 @@
       <p:sp>
         <p:nvSpPr>
           <p:cNvPr id="22" name="Shape 20"/>
+          <p:cNvSpPr/>
+          <p:nvPr/>
+        </p:nvSpPr>
+        <p:spPr>
+          <a:xfrm>
+            <a:off x="6519672" y="2258568"/>
+            <a:ext cx="1828800" cy="292608"/>
+          </a:xfrm>
+          <a:prstGeom prst="rect">
+            <a:avLst>
+              <a:gd name="adj" fmla="val 25000"/>
+            </a:avLst>
+          </a:prstGeom>
+          <a:solidFill>
+            <a:srgbClr val="FCE7F3"/>
+          </a:solidFill>
+          <a:ln w="19050">
+            <a:solidFill>
+              <a:srgbClr val="DB2777"/>
+            </a:solidFill>
+            <a:prstDash val="solid"/>
+          </a:ln>
+          <a:effectLst>
+            <a:outerShdw sx="100000" sy="100000" kx="0" ky="0" algn="bl" rotWithShape="0" blurRad="101600" dist="38100" dir="8100000">
+              <a:srgbClr val="000000">
+                <a:alpha val="12000"/>
+              </a:srgbClr>
+            </a:outerShdw>
+          </a:effectLst>
+        </p:spPr>
+      </p:sp>
+      <p:sp>
+        <p:nvSpPr>
+          <p:cNvPr id="23" name="Text 21"/>
+          <p:cNvSpPr/>
+          <p:nvPr/>
+        </p:nvSpPr>
+        <p:spPr>
+          <a:xfrm>
+            <a:off x="6519672" y="2258568"/>
+            <a:ext cx="1828800" cy="292608"/>
+          </a:xfrm>
+          <a:prstGeom prst="rect">
+            <a:avLst/>
+          </a:prstGeom>
+          <a:noFill/>
+          <a:ln/>
+        </p:spPr>
+        <p:txBody>
+          <a:bodyPr wrap="square" lIns="0" tIns="0" rIns="0" bIns="0" rtlCol="0" anchor="ctr"/>
+          <a:lstStyle/>
+          <a:p>
+            <a:pPr algn="ctr" indent="0" marL="0">
+              <a:buNone/>
+            </a:pPr>
+            <a:r>
+              <a:rPr lang="en-US" sz="1300" b="1" dirty="0">
+                <a:solidFill>
+                  <a:srgbClr val="9D174D"/>
+                </a:solidFill>
+                <a:latin typeface="Trebuchet MS" pitchFamily="34" charset="0"/>
+                <a:ea typeface="Trebuchet MS" pitchFamily="34" charset="-122"/>
+                <a:cs typeface="Trebuchet MS" pitchFamily="34" charset="-120"/>
+              </a:rPr>
+              <a:t>al</a:t>
+            </a:r>
+            <a:endParaRPr lang="en-US" sz="1300" dirty="0"/>
+          </a:p>
+        </p:txBody>
+      </p:sp>
+      <p:sp>
+        <p:nvSpPr>
+          <p:cNvPr id="24" name="Text 22"/>
+          <p:cNvSpPr/>
+          <p:nvPr/>
+        </p:nvSpPr>
+        <p:spPr>
+          <a:xfrm>
+            <a:off x="6519672" y="2569464"/>
+            <a:ext cx="1828800" cy="201168"/>
+          </a:xfrm>
+          <a:prstGeom prst="rect">
+            <a:avLst/>
+          </a:prstGeom>
+          <a:noFill/>
+          <a:ln/>
+        </p:spPr>
+        <p:txBody>
+          <a:bodyPr wrap="square" lIns="0" tIns="0" rIns="0" bIns="0" rtlCol="0" anchor="t"/>
+          <a:lstStyle/>
+          <a:p>
+            <a:pPr algn="ctr" indent="0" marL="0">
+              <a:buNone/>
+            </a:pPr>
+            <a:r>
+              <a:rPr lang="en-US" sz="850" dirty="0">
+                <a:solidFill>
+                  <a:srgbClr val="475569"/>
+                </a:solidFill>
+                <a:latin typeface="Calibri" pitchFamily="34" charset="0"/>
+                <a:ea typeface="Calibri" pitchFamily="34" charset="-122"/>
+                <a:cs typeface="Calibri" pitchFamily="34" charset="-120"/>
+              </a:rPr>
+              <a:t>relating to</a:t>
+            </a:r>
+            <a:endParaRPr lang="en-US" sz="850" dirty="0"/>
+          </a:p>
+        </p:txBody>
+      </p:sp>
+      <p:sp>
+        <p:nvSpPr>
+          <p:cNvPr id="25" name="Shape 23"/>
           <p:cNvSpPr/>
           <p:nvPr/>
         </p:nvSpPr>
@@ -19841,7 +19953,7 @@
       </p:sp>
       <p:sp>
         <p:nvSpPr>
-          <p:cNvPr id="23" name="Text 21"/>
+          <p:cNvPr id="26" name="Text 24"/>
           <p:cNvSpPr/>
           <p:nvPr/>
         </p:nvSpPr>
@@ -19880,7 +19992,7 @@
       </p:sp>
       <p:sp>
         <p:nvSpPr>
-          <p:cNvPr id="24" name="Shape 22"/>
+          <p:cNvPr id="27" name="Shape 25"/>
           <p:cNvSpPr/>
           <p:nvPr/>
         </p:nvSpPr>
@@ -19907,7 +20019,7 @@
       </p:sp>
       <p:sp>
         <p:nvSpPr>
-          <p:cNvPr id="25" name="Text 23"/>
+          <p:cNvPr id="28" name="Text 26"/>
           <p:cNvSpPr/>
           <p:nvPr/>
         </p:nvSpPr>
@@ -19946,7 +20058,7 @@
       </p:sp>
       <p:sp>
         <p:nvSpPr>
-          <p:cNvPr id="26" name="Shape 24"/>
+          <p:cNvPr id="29" name="Shape 27"/>
           <p:cNvSpPr/>
           <p:nvPr/>
         </p:nvSpPr>
@@ -19973,7 +20085,7 @@
       </p:sp>
       <p:sp>
         <p:nvSpPr>
-          <p:cNvPr id="27" name="Text 25"/>
+          <p:cNvPr id="30" name="Text 28"/>
           <p:cNvSpPr/>
           <p:nvPr/>
         </p:nvSpPr>
@@ -20012,7 +20124,7 @@
       </p:sp>
       <p:sp>
         <p:nvSpPr>
-          <p:cNvPr id="28" name="Shape 26"/>
+          <p:cNvPr id="31" name="Shape 29"/>
           <p:cNvSpPr/>
           <p:nvPr/>
         </p:nvSpPr>
@@ -20039,7 +20151,7 @@
       </p:sp>
       <p:sp>
         <p:nvSpPr>
-          <p:cNvPr id="29" name="Text 27"/>
+          <p:cNvPr id="32" name="Text 30"/>
           <p:cNvSpPr/>
           <p:nvPr/>
         </p:nvSpPr>
@@ -20362,7 +20474,7 @@
                 <a:ea typeface="Calibri" pitchFamily="34" charset="-122"/>
                 <a:cs typeface="Calibri" pitchFamily="34" charset="-120"/>
               </a:rPr>
-              <a:t>Word Labs  •  wordlabs.app  •  Root: 'thermo' = heat or temperature</a:t>
+              <a:t>Word Labs  •  wordlabs.app  •  Root: 'thermo' = heat, temperature</a:t>
             </a:r>
             <a:endParaRPr lang="en-US" sz="800" dirty="0"/>
           </a:p>
@@ -20501,7 +20613,7 @@
                 <a:ea typeface="Trebuchet MS" pitchFamily="34" charset="-122"/>
                 <a:cs typeface="Trebuchet MS" pitchFamily="34" charset="-120"/>
               </a:rPr>
-              <a:t>thermodynamics</a:t>
+              <a:t>geothermal</a:t>
             </a:r>
             <a:endParaRPr lang="en-US" sz="2800" dirty="0"/>
           </a:p>
@@ -20581,7 +20693,7 @@
         </p:nvSpPr>
         <p:spPr>
           <a:xfrm>
-            <a:off x="2938272" y="2258568"/>
+            <a:off x="2221992" y="2258568"/>
             <a:ext cx="1828800" cy="292608"/>
           </a:xfrm>
           <a:prstGeom prst="rect">
@@ -20590,11 +20702,11 @@
             </a:avLst>
           </a:prstGeom>
           <a:solidFill>
-            <a:srgbClr val="CCFBF1"/>
+            <a:srgbClr val="DDD6FE"/>
           </a:solidFill>
           <a:ln w="19050">
             <a:solidFill>
-              <a:srgbClr val="0D9488"/>
+              <a:srgbClr val="7C3AED"/>
             </a:solidFill>
             <a:prstDash val="solid"/>
           </a:ln>
@@ -20615,7 +20727,7 @@
         </p:nvSpPr>
         <p:spPr>
           <a:xfrm>
-            <a:off x="2938272" y="2258568"/>
+            <a:off x="2221992" y="2258568"/>
             <a:ext cx="1828800" cy="292608"/>
           </a:xfrm>
           <a:prstGeom prst="rect">
@@ -20634,13 +20746,13 @@
             <a:r>
               <a:rPr lang="en-US" sz="1300" b="1" dirty="0">
                 <a:solidFill>
-                  <a:srgbClr val="0F766E"/>
+                  <a:srgbClr val="4C1D95"/>
                 </a:solidFill>
                 <a:latin typeface="Trebuchet MS" pitchFamily="34" charset="0"/>
                 <a:ea typeface="Trebuchet MS" pitchFamily="34" charset="-122"/>
                 <a:cs typeface="Trebuchet MS" pitchFamily="34" charset="-120"/>
               </a:rPr>
-              <a:t>thermo</a:t>
+              <a:t>geo</a:t>
             </a:r>
             <a:endParaRPr lang="en-US" sz="1300" dirty="0"/>
           </a:p>
@@ -20654,7 +20766,7 @@
         </p:nvSpPr>
         <p:spPr>
           <a:xfrm>
-            <a:off x="2938272" y="2569464"/>
+            <a:off x="2221992" y="2569464"/>
             <a:ext cx="1828800" cy="201168"/>
           </a:xfrm>
           <a:prstGeom prst="rect">
@@ -20679,7 +20791,7 @@
                 <a:ea typeface="Calibri" pitchFamily="34" charset="-122"/>
                 <a:cs typeface="Calibri" pitchFamily="34" charset="-120"/>
               </a:rPr>
-              <a:t>heat</a:t>
+              <a:t>earth</a:t>
             </a:r>
             <a:endParaRPr lang="en-US" sz="850" dirty="0"/>
           </a:p>
@@ -20693,7 +20805,7 @@
         </p:nvSpPr>
         <p:spPr>
           <a:xfrm>
-            <a:off x="5803392" y="2258568"/>
+            <a:off x="4370832" y="2258568"/>
             <a:ext cx="1828800" cy="292608"/>
           </a:xfrm>
           <a:prstGeom prst="rect">
@@ -20702,11 +20814,11 @@
             </a:avLst>
           </a:prstGeom>
           <a:solidFill>
-            <a:srgbClr val="FCE7F3"/>
+            <a:srgbClr val="CCFBF1"/>
           </a:solidFill>
           <a:ln w="19050">
             <a:solidFill>
-              <a:srgbClr val="DB2777"/>
+              <a:srgbClr val="0D9488"/>
             </a:solidFill>
             <a:prstDash val="solid"/>
           </a:ln>
@@ -20727,7 +20839,7 @@
         </p:nvSpPr>
         <p:spPr>
           <a:xfrm>
-            <a:off x="5803392" y="2258568"/>
+            <a:off x="4370832" y="2258568"/>
             <a:ext cx="1828800" cy="292608"/>
           </a:xfrm>
           <a:prstGeom prst="rect">
@@ -20746,13 +20858,13 @@
             <a:r>
               <a:rPr lang="en-US" sz="1300" b="1" dirty="0">
                 <a:solidFill>
-                  <a:srgbClr val="9D174D"/>
+                  <a:srgbClr val="0F766E"/>
                 </a:solidFill>
                 <a:latin typeface="Trebuchet MS" pitchFamily="34" charset="0"/>
                 <a:ea typeface="Trebuchet MS" pitchFamily="34" charset="-122"/>
                 <a:cs typeface="Trebuchet MS" pitchFamily="34" charset="-120"/>
               </a:rPr>
-              <a:t>dynamics</a:t>
+              <a:t>thermo</a:t>
             </a:r>
             <a:endParaRPr lang="en-US" sz="1300" dirty="0"/>
           </a:p>
@@ -20766,7 +20878,7 @@
         </p:nvSpPr>
         <p:spPr>
           <a:xfrm>
-            <a:off x="5803392" y="2569464"/>
+            <a:off x="4370832" y="2569464"/>
             <a:ext cx="1828800" cy="201168"/>
           </a:xfrm>
           <a:prstGeom prst="rect">
@@ -20791,7 +20903,7 @@
                 <a:ea typeface="Calibri" pitchFamily="34" charset="-122"/>
                 <a:cs typeface="Calibri" pitchFamily="34" charset="-120"/>
               </a:rPr>
-              <a:t>power or forces in motion</a:t>
+              <a:t>heat</a:t>
             </a:r>
             <a:endParaRPr lang="en-US" sz="850" dirty="0"/>
           </a:p>
@@ -20800,6 +20912,118 @@
       <p:sp>
         <p:nvSpPr>
           <p:cNvPr id="22" name="Shape 20"/>
+          <p:cNvSpPr/>
+          <p:nvPr/>
+        </p:nvSpPr>
+        <p:spPr>
+          <a:xfrm>
+            <a:off x="6519672" y="2258568"/>
+            <a:ext cx="1828800" cy="292608"/>
+          </a:xfrm>
+          <a:prstGeom prst="rect">
+            <a:avLst>
+              <a:gd name="adj" fmla="val 25000"/>
+            </a:avLst>
+          </a:prstGeom>
+          <a:solidFill>
+            <a:srgbClr val="FCE7F3"/>
+          </a:solidFill>
+          <a:ln w="19050">
+            <a:solidFill>
+              <a:srgbClr val="DB2777"/>
+            </a:solidFill>
+            <a:prstDash val="solid"/>
+          </a:ln>
+          <a:effectLst>
+            <a:outerShdw sx="100000" sy="100000" kx="0" ky="0" algn="bl" rotWithShape="0" blurRad="101600" dist="38100" dir="8100000">
+              <a:srgbClr val="000000">
+                <a:alpha val="12000"/>
+              </a:srgbClr>
+            </a:outerShdw>
+          </a:effectLst>
+        </p:spPr>
+      </p:sp>
+      <p:sp>
+        <p:nvSpPr>
+          <p:cNvPr id="23" name="Text 21"/>
+          <p:cNvSpPr/>
+          <p:nvPr/>
+        </p:nvSpPr>
+        <p:spPr>
+          <a:xfrm>
+            <a:off x="6519672" y="2258568"/>
+            <a:ext cx="1828800" cy="292608"/>
+          </a:xfrm>
+          <a:prstGeom prst="rect">
+            <a:avLst/>
+          </a:prstGeom>
+          <a:noFill/>
+          <a:ln/>
+        </p:spPr>
+        <p:txBody>
+          <a:bodyPr wrap="square" lIns="0" tIns="0" rIns="0" bIns="0" rtlCol="0" anchor="ctr"/>
+          <a:lstStyle/>
+          <a:p>
+            <a:pPr algn="ctr" indent="0" marL="0">
+              <a:buNone/>
+            </a:pPr>
+            <a:r>
+              <a:rPr lang="en-US" sz="1300" b="1" dirty="0">
+                <a:solidFill>
+                  <a:srgbClr val="9D174D"/>
+                </a:solidFill>
+                <a:latin typeface="Trebuchet MS" pitchFamily="34" charset="0"/>
+                <a:ea typeface="Trebuchet MS" pitchFamily="34" charset="-122"/>
+                <a:cs typeface="Trebuchet MS" pitchFamily="34" charset="-120"/>
+              </a:rPr>
+              <a:t>al</a:t>
+            </a:r>
+            <a:endParaRPr lang="en-US" sz="1300" dirty="0"/>
+          </a:p>
+        </p:txBody>
+      </p:sp>
+      <p:sp>
+        <p:nvSpPr>
+          <p:cNvPr id="24" name="Text 22"/>
+          <p:cNvSpPr/>
+          <p:nvPr/>
+        </p:nvSpPr>
+        <p:spPr>
+          <a:xfrm>
+            <a:off x="6519672" y="2569464"/>
+            <a:ext cx="1828800" cy="201168"/>
+          </a:xfrm>
+          <a:prstGeom prst="rect">
+            <a:avLst/>
+          </a:prstGeom>
+          <a:noFill/>
+          <a:ln/>
+        </p:spPr>
+        <p:txBody>
+          <a:bodyPr wrap="square" lIns="0" tIns="0" rIns="0" bIns="0" rtlCol="0" anchor="t"/>
+          <a:lstStyle/>
+          <a:p>
+            <a:pPr algn="ctr" indent="0" marL="0">
+              <a:buNone/>
+            </a:pPr>
+            <a:r>
+              <a:rPr lang="en-US" sz="850" dirty="0">
+                <a:solidFill>
+                  <a:srgbClr val="475569"/>
+                </a:solidFill>
+                <a:latin typeface="Calibri" pitchFamily="34" charset="0"/>
+                <a:ea typeface="Calibri" pitchFamily="34" charset="-122"/>
+                <a:cs typeface="Calibri" pitchFamily="34" charset="-120"/>
+              </a:rPr>
+              <a:t>relating to</a:t>
+            </a:r>
+            <a:endParaRPr lang="en-US" sz="850" dirty="0"/>
+          </a:p>
+        </p:txBody>
+      </p:sp>
+      <p:sp>
+        <p:nvSpPr>
+          <p:cNvPr id="25" name="Shape 23"/>
           <p:cNvSpPr/>
           <p:nvPr/>
         </p:nvSpPr>
@@ -20826,7 +21050,7 @@
       </p:sp>
       <p:sp>
         <p:nvSpPr>
-          <p:cNvPr id="23" name="Text 21"/>
+          <p:cNvPr id="26" name="Text 24"/>
           <p:cNvSpPr/>
           <p:nvPr/>
         </p:nvSpPr>
@@ -20865,7 +21089,7 @@
       </p:sp>
       <p:sp>
         <p:nvSpPr>
-          <p:cNvPr id="24" name="Shape 22"/>
+          <p:cNvPr id="27" name="Shape 25"/>
           <p:cNvSpPr/>
           <p:nvPr/>
         </p:nvSpPr>
@@ -20892,14 +21116,14 @@
       </p:sp>
       <p:sp>
         <p:nvSpPr>
-          <p:cNvPr id="25" name="Shape 23"/>
-          <p:cNvSpPr/>
-          <p:nvPr/>
-        </p:nvSpPr>
-        <p:spPr>
-          <a:xfrm>
-            <a:off x="1978152" y="3364992"/>
-            <a:ext cx="1225296" cy="475488"/>
+          <p:cNvPr id="28" name="Shape 26"/>
+          <p:cNvSpPr/>
+          <p:nvPr/>
+        </p:nvSpPr>
+        <p:spPr>
+          <a:xfrm>
+            <a:off x="1975104" y="3364992"/>
+            <a:ext cx="1554480" cy="475488"/>
           </a:xfrm>
           <a:prstGeom prst="rect">
             <a:avLst>
@@ -20919,14 +21143,14 @@
       </p:sp>
       <p:sp>
         <p:nvSpPr>
-          <p:cNvPr id="26" name="Text 24"/>
-          <p:cNvSpPr/>
-          <p:nvPr/>
-        </p:nvSpPr>
-        <p:spPr>
-          <a:xfrm>
-            <a:off x="1978152" y="3364992"/>
-            <a:ext cx="1225296" cy="475488"/>
+          <p:cNvPr id="29" name="Text 27"/>
+          <p:cNvSpPr/>
+          <p:nvPr/>
+        </p:nvSpPr>
+        <p:spPr>
+          <a:xfrm>
+            <a:off x="1975104" y="3364992"/>
+            <a:ext cx="1554480" cy="475488"/>
           </a:xfrm>
           <a:prstGeom prst="rect">
             <a:avLst/>
@@ -20950,7 +21174,7 @@
                 <a:ea typeface="Trebuchet MS" pitchFamily="34" charset="-122"/>
                 <a:cs typeface="Trebuchet MS" pitchFamily="34" charset="-120"/>
               </a:rPr>
-              <a:t>ther</a:t>
+              <a:t>ge</a:t>
             </a:r>
             <a:endParaRPr lang="en-US" sz="1400" dirty="0"/>
           </a:p>
@@ -20958,14 +21182,14 @@
       </p:sp>
       <p:sp>
         <p:nvSpPr>
-          <p:cNvPr id="27" name="Text 25"/>
-          <p:cNvSpPr/>
-          <p:nvPr/>
-        </p:nvSpPr>
-        <p:spPr>
-          <a:xfrm>
-            <a:off x="3203448" y="3364992"/>
-            <a:ext cx="76200" cy="475488"/>
+          <p:cNvPr id="30" name="Text 28"/>
+          <p:cNvSpPr/>
+          <p:nvPr/>
+        </p:nvSpPr>
+        <p:spPr>
+          <a:xfrm>
+            <a:off x="3529584" y="3364992"/>
+            <a:ext cx="73152" cy="475488"/>
           </a:xfrm>
           <a:prstGeom prst="rect">
             <a:avLst/>
@@ -20997,14 +21221,14 @@
       </p:sp>
       <p:sp>
         <p:nvSpPr>
-          <p:cNvPr id="28" name="Shape 26"/>
-          <p:cNvSpPr/>
-          <p:nvPr/>
-        </p:nvSpPr>
-        <p:spPr>
-          <a:xfrm>
-            <a:off x="3279648" y="3364992"/>
-            <a:ext cx="1225296" cy="475488"/>
+          <p:cNvPr id="31" name="Shape 29"/>
+          <p:cNvSpPr/>
+          <p:nvPr/>
+        </p:nvSpPr>
+        <p:spPr>
+          <a:xfrm>
+            <a:off x="3602736" y="3364992"/>
+            <a:ext cx="1554480" cy="475488"/>
           </a:xfrm>
           <a:prstGeom prst="rect">
             <a:avLst>
@@ -21024,14 +21248,14 @@
       </p:sp>
       <p:sp>
         <p:nvSpPr>
-          <p:cNvPr id="29" name="Text 27"/>
-          <p:cNvSpPr/>
-          <p:nvPr/>
-        </p:nvSpPr>
-        <p:spPr>
-          <a:xfrm>
-            <a:off x="3279648" y="3364992"/>
-            <a:ext cx="1225296" cy="475488"/>
+          <p:cNvPr id="32" name="Text 30"/>
+          <p:cNvSpPr/>
+          <p:nvPr/>
+        </p:nvSpPr>
+        <p:spPr>
+          <a:xfrm>
+            <a:off x="3602736" y="3364992"/>
+            <a:ext cx="1554480" cy="475488"/>
           </a:xfrm>
           <a:prstGeom prst="rect">
             <a:avLst/>
@@ -21055,7 +21279,7 @@
                 <a:ea typeface="Trebuchet MS" pitchFamily="34" charset="-122"/>
                 <a:cs typeface="Trebuchet MS" pitchFamily="34" charset="-120"/>
               </a:rPr>
-              <a:t>mo</a:t>
+              <a:t>o</a:t>
             </a:r>
             <a:endParaRPr lang="en-US" sz="1400" dirty="0"/>
           </a:p>
@@ -21063,14 +21287,14 @@
       </p:sp>
       <p:sp>
         <p:nvSpPr>
-          <p:cNvPr id="30" name="Text 28"/>
-          <p:cNvSpPr/>
-          <p:nvPr/>
-        </p:nvSpPr>
-        <p:spPr>
-          <a:xfrm>
-            <a:off x="4504944" y="3364992"/>
-            <a:ext cx="76200" cy="475488"/>
+          <p:cNvPr id="33" name="Text 31"/>
+          <p:cNvSpPr/>
+          <p:nvPr/>
+        </p:nvSpPr>
+        <p:spPr>
+          <a:xfrm>
+            <a:off x="5157216" y="3364992"/>
+            <a:ext cx="73152" cy="475488"/>
           </a:xfrm>
           <a:prstGeom prst="rect">
             <a:avLst/>
@@ -21102,14 +21326,14 @@
       </p:sp>
       <p:sp>
         <p:nvSpPr>
-          <p:cNvPr id="31" name="Shape 29"/>
-          <p:cNvSpPr/>
-          <p:nvPr/>
-        </p:nvSpPr>
-        <p:spPr>
-          <a:xfrm>
-            <a:off x="4581144" y="3364992"/>
-            <a:ext cx="1225296" cy="475488"/>
+          <p:cNvPr id="34" name="Shape 32"/>
+          <p:cNvSpPr/>
+          <p:nvPr/>
+        </p:nvSpPr>
+        <p:spPr>
+          <a:xfrm>
+            <a:off x="5230368" y="3364992"/>
+            <a:ext cx="1554480" cy="475488"/>
           </a:xfrm>
           <a:prstGeom prst="rect">
             <a:avLst>
@@ -21129,14 +21353,14 @@
       </p:sp>
       <p:sp>
         <p:nvSpPr>
-          <p:cNvPr id="32" name="Text 30"/>
-          <p:cNvSpPr/>
-          <p:nvPr/>
-        </p:nvSpPr>
-        <p:spPr>
-          <a:xfrm>
-            <a:off x="4581144" y="3364992"/>
-            <a:ext cx="1225296" cy="475488"/>
+          <p:cNvPr id="35" name="Text 33"/>
+          <p:cNvSpPr/>
+          <p:nvPr/>
+        </p:nvSpPr>
+        <p:spPr>
+          <a:xfrm>
+            <a:off x="5230368" y="3364992"/>
+            <a:ext cx="1554480" cy="475488"/>
           </a:xfrm>
           <a:prstGeom prst="rect">
             <a:avLst/>
@@ -21160,7 +21384,7 @@
                 <a:ea typeface="Trebuchet MS" pitchFamily="34" charset="-122"/>
                 <a:cs typeface="Trebuchet MS" pitchFamily="34" charset="-120"/>
               </a:rPr>
-              <a:t>dy</a:t>
+              <a:t>ther</a:t>
             </a:r>
             <a:endParaRPr lang="en-US" sz="1400" dirty="0"/>
           </a:p>
@@ -21168,14 +21392,14 @@
       </p:sp>
       <p:sp>
         <p:nvSpPr>
-          <p:cNvPr id="33" name="Text 31"/>
-          <p:cNvSpPr/>
-          <p:nvPr/>
-        </p:nvSpPr>
-        <p:spPr>
-          <a:xfrm>
-            <a:off x="5806440" y="3364992"/>
-            <a:ext cx="76200" cy="475488"/>
+          <p:cNvPr id="36" name="Text 34"/>
+          <p:cNvSpPr/>
+          <p:nvPr/>
+        </p:nvSpPr>
+        <p:spPr>
+          <a:xfrm>
+            <a:off x="6784848" y="3364992"/>
+            <a:ext cx="73152" cy="475488"/>
           </a:xfrm>
           <a:prstGeom prst="rect">
             <a:avLst/>
@@ -21207,14 +21431,14 @@
       </p:sp>
       <p:sp>
         <p:nvSpPr>
-          <p:cNvPr id="34" name="Shape 32"/>
-          <p:cNvSpPr/>
-          <p:nvPr/>
-        </p:nvSpPr>
-        <p:spPr>
-          <a:xfrm>
-            <a:off x="5882640" y="3364992"/>
-            <a:ext cx="1225296" cy="475488"/>
+          <p:cNvPr id="37" name="Shape 35"/>
+          <p:cNvSpPr/>
+          <p:nvPr/>
+        </p:nvSpPr>
+        <p:spPr>
+          <a:xfrm>
+            <a:off x="6858000" y="3364992"/>
+            <a:ext cx="1554480" cy="475488"/>
           </a:xfrm>
           <a:prstGeom prst="rect">
             <a:avLst>
@@ -21234,14 +21458,14 @@
       </p:sp>
       <p:sp>
         <p:nvSpPr>
-          <p:cNvPr id="35" name="Text 33"/>
-          <p:cNvSpPr/>
-          <p:nvPr/>
-        </p:nvSpPr>
-        <p:spPr>
-          <a:xfrm>
-            <a:off x="5882640" y="3364992"/>
-            <a:ext cx="1225296" cy="475488"/>
+          <p:cNvPr id="38" name="Text 36"/>
+          <p:cNvSpPr/>
+          <p:nvPr/>
+        </p:nvSpPr>
+        <p:spPr>
+          <a:xfrm>
+            <a:off x="6858000" y="3364992"/>
+            <a:ext cx="1554480" cy="475488"/>
           </a:xfrm>
           <a:prstGeom prst="rect">
             <a:avLst/>
@@ -21265,112 +21489,7 @@
                 <a:ea typeface="Trebuchet MS" pitchFamily="34" charset="-122"/>
                 <a:cs typeface="Trebuchet MS" pitchFamily="34" charset="-120"/>
               </a:rPr>
-              <a:t>nam</a:t>
-            </a:r>
-            <a:endParaRPr lang="en-US" sz="1400" dirty="0"/>
-          </a:p>
-        </p:txBody>
-      </p:sp>
-      <p:sp>
-        <p:nvSpPr>
-          <p:cNvPr id="36" name="Text 34"/>
-          <p:cNvSpPr/>
-          <p:nvPr/>
-        </p:nvSpPr>
-        <p:spPr>
-          <a:xfrm>
-            <a:off x="7107936" y="3364992"/>
-            <a:ext cx="76200" cy="475488"/>
-          </a:xfrm>
-          <a:prstGeom prst="rect">
-            <a:avLst/>
-          </a:prstGeom>
-          <a:noFill/>
-          <a:ln/>
-        </p:spPr>
-        <p:txBody>
-          <a:bodyPr wrap="square" lIns="0" tIns="0" rIns="0" bIns="0" rtlCol="0" anchor="ctr"/>
-          <a:lstStyle/>
-          <a:p>
-            <a:pPr algn="ctr" indent="0" marL="0">
-              <a:buNone/>
-            </a:pPr>
-            <a:r>
-              <a:rPr lang="en-US" sz="1600" b="1" dirty="0">
-                <a:solidFill>
-                  <a:srgbClr val="0D9488"/>
-                </a:solidFill>
-                <a:latin typeface="Trebuchet MS" pitchFamily="34" charset="0"/>
-                <a:ea typeface="Trebuchet MS" pitchFamily="34" charset="-122"/>
-                <a:cs typeface="Trebuchet MS" pitchFamily="34" charset="-120"/>
-              </a:rPr>
-              <a:t>·</a:t>
-            </a:r>
-            <a:endParaRPr lang="en-US" sz="1600" dirty="0"/>
-          </a:p>
-        </p:txBody>
-      </p:sp>
-      <p:sp>
-        <p:nvSpPr>
-          <p:cNvPr id="37" name="Shape 35"/>
-          <p:cNvSpPr/>
-          <p:nvPr/>
-        </p:nvSpPr>
-        <p:spPr>
-          <a:xfrm>
-            <a:off x="7184136" y="3364992"/>
-            <a:ext cx="1225296" cy="475488"/>
-          </a:xfrm>
-          <a:prstGeom prst="rect">
-            <a:avLst>
-              <a:gd name="adj" fmla="val 9615"/>
-            </a:avLst>
-          </a:prstGeom>
-          <a:solidFill>
-            <a:srgbClr val="FFFFFF"/>
-          </a:solidFill>
-          <a:ln w="12700">
-            <a:solidFill>
-              <a:srgbClr val="0D9488"/>
-            </a:solidFill>
-            <a:prstDash val="solid"/>
-          </a:ln>
-        </p:spPr>
-      </p:sp>
-      <p:sp>
-        <p:nvSpPr>
-          <p:cNvPr id="38" name="Text 36"/>
-          <p:cNvSpPr/>
-          <p:nvPr/>
-        </p:nvSpPr>
-        <p:spPr>
-          <a:xfrm>
-            <a:off x="7184136" y="3364992"/>
-            <a:ext cx="1225296" cy="475488"/>
-          </a:xfrm>
-          <a:prstGeom prst="rect">
-            <a:avLst/>
-          </a:prstGeom>
-          <a:noFill/>
-          <a:ln/>
-        </p:spPr>
-        <p:txBody>
-          <a:bodyPr wrap="square" lIns="0" tIns="0" rIns="0" bIns="0" rtlCol="0" anchor="ctr"/>
-          <a:lstStyle/>
-          <a:p>
-            <a:pPr algn="ctr" indent="0" marL="0">
-              <a:buNone/>
-            </a:pPr>
-            <a:r>
-              <a:rPr lang="en-US" sz="1400" b="1" dirty="0">
-                <a:solidFill>
-                  <a:srgbClr val="0D9488"/>
-                </a:solidFill>
-                <a:latin typeface="Trebuchet MS" pitchFamily="34" charset="0"/>
-                <a:ea typeface="Trebuchet MS" pitchFamily="34" charset="-122"/>
-                <a:cs typeface="Trebuchet MS" pitchFamily="34" charset="-120"/>
-              </a:rPr>
-              <a:t>ics</a:t>
+              <a:t>mal</a:t>
             </a:r>
             <a:endParaRPr lang="en-US" sz="1400" dirty="0"/>
           </a:p>
@@ -21794,7 +21913,7 @@
                 <a:ea typeface="Calibri" pitchFamily="34" charset="-122"/>
                 <a:cs typeface="Calibri" pitchFamily="34" charset="-120"/>
               </a:rPr>
-              <a:t>Word Labs  •  wordlabs.app  •  Root: 'thermo' = heat or temperature</a:t>
+              <a:t>Word Labs  •  wordlabs.app  •  Root: 'thermo' = heat, temperature</a:t>
             </a:r>
             <a:endParaRPr lang="en-US" sz="800" dirty="0"/>
           </a:p>
@@ -21933,7 +22052,7 @@
                 <a:ea typeface="Trebuchet MS" pitchFamily="34" charset="-122"/>
                 <a:cs typeface="Trebuchet MS" pitchFamily="34" charset="-120"/>
               </a:rPr>
-              <a:t>thermodynamics</a:t>
+              <a:t>geothermal</a:t>
             </a:r>
             <a:endParaRPr lang="en-US" sz="2800" dirty="0"/>
           </a:p>
@@ -22013,7 +22132,7 @@
         </p:nvSpPr>
         <p:spPr>
           <a:xfrm>
-            <a:off x="2938272" y="2258568"/>
+            <a:off x="2221992" y="2258568"/>
             <a:ext cx="1828800" cy="292608"/>
           </a:xfrm>
           <a:prstGeom prst="rect">
@@ -22022,11 +22141,11 @@
             </a:avLst>
           </a:prstGeom>
           <a:solidFill>
-            <a:srgbClr val="CCFBF1"/>
+            <a:srgbClr val="DDD6FE"/>
           </a:solidFill>
           <a:ln w="19050">
             <a:solidFill>
-              <a:srgbClr val="0D9488"/>
+              <a:srgbClr val="7C3AED"/>
             </a:solidFill>
             <a:prstDash val="solid"/>
           </a:ln>
@@ -22047,7 +22166,7 @@
         </p:nvSpPr>
         <p:spPr>
           <a:xfrm>
-            <a:off x="2938272" y="2258568"/>
+            <a:off x="2221992" y="2258568"/>
             <a:ext cx="1828800" cy="292608"/>
           </a:xfrm>
           <a:prstGeom prst="rect">
@@ -22066,13 +22185,13 @@
             <a:r>
               <a:rPr lang="en-US" sz="1300" b="1" dirty="0">
                 <a:solidFill>
-                  <a:srgbClr val="0F766E"/>
+                  <a:srgbClr val="4C1D95"/>
                 </a:solidFill>
                 <a:latin typeface="Trebuchet MS" pitchFamily="34" charset="0"/>
                 <a:ea typeface="Trebuchet MS" pitchFamily="34" charset="-122"/>
                 <a:cs typeface="Trebuchet MS" pitchFamily="34" charset="-120"/>
               </a:rPr>
-              <a:t>thermo</a:t>
+              <a:t>geo</a:t>
             </a:r>
             <a:endParaRPr lang="en-US" sz="1300" dirty="0"/>
           </a:p>
@@ -22086,7 +22205,7 @@
         </p:nvSpPr>
         <p:spPr>
           <a:xfrm>
-            <a:off x="2938272" y="2569464"/>
+            <a:off x="2221992" y="2569464"/>
             <a:ext cx="1828800" cy="201168"/>
           </a:xfrm>
           <a:prstGeom prst="rect">
@@ -22111,7 +22230,7 @@
                 <a:ea typeface="Calibri" pitchFamily="34" charset="-122"/>
                 <a:cs typeface="Calibri" pitchFamily="34" charset="-120"/>
               </a:rPr>
-              <a:t>heat</a:t>
+              <a:t>earth</a:t>
             </a:r>
             <a:endParaRPr lang="en-US" sz="850" dirty="0"/>
           </a:p>
@@ -22125,7 +22244,7 @@
         </p:nvSpPr>
         <p:spPr>
           <a:xfrm>
-            <a:off x="5803392" y="2258568"/>
+            <a:off x="4370832" y="2258568"/>
             <a:ext cx="1828800" cy="292608"/>
           </a:xfrm>
           <a:prstGeom prst="rect">
@@ -22134,11 +22253,11 @@
             </a:avLst>
           </a:prstGeom>
           <a:solidFill>
-            <a:srgbClr val="FCE7F3"/>
+            <a:srgbClr val="CCFBF1"/>
           </a:solidFill>
           <a:ln w="19050">
             <a:solidFill>
-              <a:srgbClr val="DB2777"/>
+              <a:srgbClr val="0D9488"/>
             </a:solidFill>
             <a:prstDash val="solid"/>
           </a:ln>
@@ -22159,7 +22278,7 @@
         </p:nvSpPr>
         <p:spPr>
           <a:xfrm>
-            <a:off x="5803392" y="2258568"/>
+            <a:off x="4370832" y="2258568"/>
             <a:ext cx="1828800" cy="292608"/>
           </a:xfrm>
           <a:prstGeom prst="rect">
@@ -22178,13 +22297,13 @@
             <a:r>
               <a:rPr lang="en-US" sz="1300" b="1" dirty="0">
                 <a:solidFill>
-                  <a:srgbClr val="9D174D"/>
+                  <a:srgbClr val="0F766E"/>
                 </a:solidFill>
                 <a:latin typeface="Trebuchet MS" pitchFamily="34" charset="0"/>
                 <a:ea typeface="Trebuchet MS" pitchFamily="34" charset="-122"/>
                 <a:cs typeface="Trebuchet MS" pitchFamily="34" charset="-120"/>
               </a:rPr>
-              <a:t>dynamics</a:t>
+              <a:t>thermo</a:t>
             </a:r>
             <a:endParaRPr lang="en-US" sz="1300" dirty="0"/>
           </a:p>
@@ -22198,7 +22317,7 @@
         </p:nvSpPr>
         <p:spPr>
           <a:xfrm>
-            <a:off x="5803392" y="2569464"/>
+            <a:off x="4370832" y="2569464"/>
             <a:ext cx="1828800" cy="201168"/>
           </a:xfrm>
           <a:prstGeom prst="rect">
@@ -22223,7 +22342,7 @@
                 <a:ea typeface="Calibri" pitchFamily="34" charset="-122"/>
                 <a:cs typeface="Calibri" pitchFamily="34" charset="-120"/>
               </a:rPr>
-              <a:t>power or forces in motion</a:t>
+              <a:t>heat</a:t>
             </a:r>
             <a:endParaRPr lang="en-US" sz="850" dirty="0"/>
           </a:p>
@@ -22232,6 +22351,118 @@
       <p:sp>
         <p:nvSpPr>
           <p:cNvPr id="22" name="Shape 20"/>
+          <p:cNvSpPr/>
+          <p:nvPr/>
+        </p:nvSpPr>
+        <p:spPr>
+          <a:xfrm>
+            <a:off x="6519672" y="2258568"/>
+            <a:ext cx="1828800" cy="292608"/>
+          </a:xfrm>
+          <a:prstGeom prst="rect">
+            <a:avLst>
+              <a:gd name="adj" fmla="val 25000"/>
+            </a:avLst>
+          </a:prstGeom>
+          <a:solidFill>
+            <a:srgbClr val="FCE7F3"/>
+          </a:solidFill>
+          <a:ln w="19050">
+            <a:solidFill>
+              <a:srgbClr val="DB2777"/>
+            </a:solidFill>
+            <a:prstDash val="solid"/>
+          </a:ln>
+          <a:effectLst>
+            <a:outerShdw sx="100000" sy="100000" kx="0" ky="0" algn="bl" rotWithShape="0" blurRad="101600" dist="38100" dir="8100000">
+              <a:srgbClr val="000000">
+                <a:alpha val="12000"/>
+              </a:srgbClr>
+            </a:outerShdw>
+          </a:effectLst>
+        </p:spPr>
+      </p:sp>
+      <p:sp>
+        <p:nvSpPr>
+          <p:cNvPr id="23" name="Text 21"/>
+          <p:cNvSpPr/>
+          <p:nvPr/>
+        </p:nvSpPr>
+        <p:spPr>
+          <a:xfrm>
+            <a:off x="6519672" y="2258568"/>
+            <a:ext cx="1828800" cy="292608"/>
+          </a:xfrm>
+          <a:prstGeom prst="rect">
+            <a:avLst/>
+          </a:prstGeom>
+          <a:noFill/>
+          <a:ln/>
+        </p:spPr>
+        <p:txBody>
+          <a:bodyPr wrap="square" lIns="0" tIns="0" rIns="0" bIns="0" rtlCol="0" anchor="ctr"/>
+          <a:lstStyle/>
+          <a:p>
+            <a:pPr algn="ctr" indent="0" marL="0">
+              <a:buNone/>
+            </a:pPr>
+            <a:r>
+              <a:rPr lang="en-US" sz="1300" b="1" dirty="0">
+                <a:solidFill>
+                  <a:srgbClr val="9D174D"/>
+                </a:solidFill>
+                <a:latin typeface="Trebuchet MS" pitchFamily="34" charset="0"/>
+                <a:ea typeface="Trebuchet MS" pitchFamily="34" charset="-122"/>
+                <a:cs typeface="Trebuchet MS" pitchFamily="34" charset="-120"/>
+              </a:rPr>
+              <a:t>al</a:t>
+            </a:r>
+            <a:endParaRPr lang="en-US" sz="1300" dirty="0"/>
+          </a:p>
+        </p:txBody>
+      </p:sp>
+      <p:sp>
+        <p:nvSpPr>
+          <p:cNvPr id="24" name="Text 22"/>
+          <p:cNvSpPr/>
+          <p:nvPr/>
+        </p:nvSpPr>
+        <p:spPr>
+          <a:xfrm>
+            <a:off x="6519672" y="2569464"/>
+            <a:ext cx="1828800" cy="201168"/>
+          </a:xfrm>
+          <a:prstGeom prst="rect">
+            <a:avLst/>
+          </a:prstGeom>
+          <a:noFill/>
+          <a:ln/>
+        </p:spPr>
+        <p:txBody>
+          <a:bodyPr wrap="square" lIns="0" tIns="0" rIns="0" bIns="0" rtlCol="0" anchor="t"/>
+          <a:lstStyle/>
+          <a:p>
+            <a:pPr algn="ctr" indent="0" marL="0">
+              <a:buNone/>
+            </a:pPr>
+            <a:r>
+              <a:rPr lang="en-US" sz="850" dirty="0">
+                <a:solidFill>
+                  <a:srgbClr val="475569"/>
+                </a:solidFill>
+                <a:latin typeface="Calibri" pitchFamily="34" charset="0"/>
+                <a:ea typeface="Calibri" pitchFamily="34" charset="-122"/>
+                <a:cs typeface="Calibri" pitchFamily="34" charset="-120"/>
+              </a:rPr>
+              <a:t>relating to</a:t>
+            </a:r>
+            <a:endParaRPr lang="en-US" sz="850" dirty="0"/>
+          </a:p>
+        </p:txBody>
+      </p:sp>
+      <p:sp>
+        <p:nvSpPr>
+          <p:cNvPr id="25" name="Shape 23"/>
           <p:cNvSpPr/>
           <p:nvPr/>
         </p:nvSpPr>
@@ -22258,7 +22489,7 @@
       </p:sp>
       <p:sp>
         <p:nvSpPr>
-          <p:cNvPr id="23" name="Text 21"/>
+          <p:cNvPr id="26" name="Text 24"/>
           <p:cNvSpPr/>
           <p:nvPr/>
         </p:nvSpPr>
@@ -22297,7 +22528,7 @@
       </p:sp>
       <p:sp>
         <p:nvSpPr>
-          <p:cNvPr id="24" name="Shape 22"/>
+          <p:cNvPr id="27" name="Shape 25"/>
           <p:cNvSpPr/>
           <p:nvPr/>
         </p:nvSpPr>
@@ -22324,14 +22555,14 @@
       </p:sp>
       <p:sp>
         <p:nvSpPr>
-          <p:cNvPr id="25" name="Shape 23"/>
-          <p:cNvSpPr/>
-          <p:nvPr/>
-        </p:nvSpPr>
-        <p:spPr>
-          <a:xfrm>
-            <a:off x="1978152" y="3364992"/>
-            <a:ext cx="1225296" cy="475488"/>
+          <p:cNvPr id="28" name="Shape 26"/>
+          <p:cNvSpPr/>
+          <p:nvPr/>
+        </p:nvSpPr>
+        <p:spPr>
+          <a:xfrm>
+            <a:off x="1975104" y="3364992"/>
+            <a:ext cx="1554480" cy="475488"/>
           </a:xfrm>
           <a:prstGeom prst="rect">
             <a:avLst>
@@ -22351,14 +22582,14 @@
       </p:sp>
       <p:sp>
         <p:nvSpPr>
-          <p:cNvPr id="26" name="Text 24"/>
-          <p:cNvSpPr/>
-          <p:nvPr/>
-        </p:nvSpPr>
-        <p:spPr>
-          <a:xfrm>
-            <a:off x="1978152" y="3364992"/>
-            <a:ext cx="1225296" cy="475488"/>
+          <p:cNvPr id="29" name="Text 27"/>
+          <p:cNvSpPr/>
+          <p:nvPr/>
+        </p:nvSpPr>
+        <p:spPr>
+          <a:xfrm>
+            <a:off x="1975104" y="3364992"/>
+            <a:ext cx="1554480" cy="475488"/>
           </a:xfrm>
           <a:prstGeom prst="rect">
             <a:avLst/>
@@ -22382,7 +22613,7 @@
                 <a:ea typeface="Trebuchet MS" pitchFamily="34" charset="-122"/>
                 <a:cs typeface="Trebuchet MS" pitchFamily="34" charset="-120"/>
               </a:rPr>
-              <a:t>ther</a:t>
+              <a:t>ge</a:t>
             </a:r>
             <a:endParaRPr lang="en-US" sz="1400" dirty="0"/>
           </a:p>
@@ -22390,14 +22621,14 @@
       </p:sp>
       <p:sp>
         <p:nvSpPr>
-          <p:cNvPr id="27" name="Text 25"/>
-          <p:cNvSpPr/>
-          <p:nvPr/>
-        </p:nvSpPr>
-        <p:spPr>
-          <a:xfrm>
-            <a:off x="3203448" y="3364992"/>
-            <a:ext cx="76200" cy="475488"/>
+          <p:cNvPr id="30" name="Text 28"/>
+          <p:cNvSpPr/>
+          <p:nvPr/>
+        </p:nvSpPr>
+        <p:spPr>
+          <a:xfrm>
+            <a:off x="3529584" y="3364992"/>
+            <a:ext cx="73152" cy="475488"/>
           </a:xfrm>
           <a:prstGeom prst="rect">
             <a:avLst/>
@@ -22429,14 +22660,14 @@
       </p:sp>
       <p:sp>
         <p:nvSpPr>
-          <p:cNvPr id="28" name="Shape 26"/>
-          <p:cNvSpPr/>
-          <p:nvPr/>
-        </p:nvSpPr>
-        <p:spPr>
-          <a:xfrm>
-            <a:off x="3279648" y="3364992"/>
-            <a:ext cx="1225296" cy="475488"/>
+          <p:cNvPr id="31" name="Shape 29"/>
+          <p:cNvSpPr/>
+          <p:nvPr/>
+        </p:nvSpPr>
+        <p:spPr>
+          <a:xfrm>
+            <a:off x="3602736" y="3364992"/>
+            <a:ext cx="1554480" cy="475488"/>
           </a:xfrm>
           <a:prstGeom prst="rect">
             <a:avLst>
@@ -22456,14 +22687,14 @@
       </p:sp>
       <p:sp>
         <p:nvSpPr>
-          <p:cNvPr id="29" name="Text 27"/>
-          <p:cNvSpPr/>
-          <p:nvPr/>
-        </p:nvSpPr>
-        <p:spPr>
-          <a:xfrm>
-            <a:off x="3279648" y="3364992"/>
-            <a:ext cx="1225296" cy="475488"/>
+          <p:cNvPr id="32" name="Text 30"/>
+          <p:cNvSpPr/>
+          <p:nvPr/>
+        </p:nvSpPr>
+        <p:spPr>
+          <a:xfrm>
+            <a:off x="3602736" y="3364992"/>
+            <a:ext cx="1554480" cy="475488"/>
           </a:xfrm>
           <a:prstGeom prst="rect">
             <a:avLst/>
@@ -22487,7 +22718,7 @@
                 <a:ea typeface="Trebuchet MS" pitchFamily="34" charset="-122"/>
                 <a:cs typeface="Trebuchet MS" pitchFamily="34" charset="-120"/>
               </a:rPr>
-              <a:t>mo</a:t>
+              <a:t>o</a:t>
             </a:r>
             <a:endParaRPr lang="en-US" sz="1400" dirty="0"/>
           </a:p>
@@ -22495,14 +22726,14 @@
       </p:sp>
       <p:sp>
         <p:nvSpPr>
-          <p:cNvPr id="30" name="Text 28"/>
-          <p:cNvSpPr/>
-          <p:nvPr/>
-        </p:nvSpPr>
-        <p:spPr>
-          <a:xfrm>
-            <a:off x="4504944" y="3364992"/>
-            <a:ext cx="76200" cy="475488"/>
+          <p:cNvPr id="33" name="Text 31"/>
+          <p:cNvSpPr/>
+          <p:nvPr/>
+        </p:nvSpPr>
+        <p:spPr>
+          <a:xfrm>
+            <a:off x="5157216" y="3364992"/>
+            <a:ext cx="73152" cy="475488"/>
           </a:xfrm>
           <a:prstGeom prst="rect">
             <a:avLst/>
@@ -22534,14 +22765,14 @@
       </p:sp>
       <p:sp>
         <p:nvSpPr>
-          <p:cNvPr id="31" name="Shape 29"/>
-          <p:cNvSpPr/>
-          <p:nvPr/>
-        </p:nvSpPr>
-        <p:spPr>
-          <a:xfrm>
-            <a:off x="4581144" y="3364992"/>
-            <a:ext cx="1225296" cy="475488"/>
+          <p:cNvPr id="34" name="Shape 32"/>
+          <p:cNvSpPr/>
+          <p:nvPr/>
+        </p:nvSpPr>
+        <p:spPr>
+          <a:xfrm>
+            <a:off x="5230368" y="3364992"/>
+            <a:ext cx="1554480" cy="475488"/>
           </a:xfrm>
           <a:prstGeom prst="rect">
             <a:avLst>
@@ -22561,14 +22792,14 @@
       </p:sp>
       <p:sp>
         <p:nvSpPr>
-          <p:cNvPr id="32" name="Text 30"/>
-          <p:cNvSpPr/>
-          <p:nvPr/>
-        </p:nvSpPr>
-        <p:spPr>
-          <a:xfrm>
-            <a:off x="4581144" y="3364992"/>
-            <a:ext cx="1225296" cy="475488"/>
+          <p:cNvPr id="35" name="Text 33"/>
+          <p:cNvSpPr/>
+          <p:nvPr/>
+        </p:nvSpPr>
+        <p:spPr>
+          <a:xfrm>
+            <a:off x="5230368" y="3364992"/>
+            <a:ext cx="1554480" cy="475488"/>
           </a:xfrm>
           <a:prstGeom prst="rect">
             <a:avLst/>
@@ -22592,7 +22823,7 @@
                 <a:ea typeface="Trebuchet MS" pitchFamily="34" charset="-122"/>
                 <a:cs typeface="Trebuchet MS" pitchFamily="34" charset="-120"/>
               </a:rPr>
-              <a:t>dy</a:t>
+              <a:t>ther</a:t>
             </a:r>
             <a:endParaRPr lang="en-US" sz="1400" dirty="0"/>
           </a:p>
@@ -22600,14 +22831,14 @@
       </p:sp>
       <p:sp>
         <p:nvSpPr>
-          <p:cNvPr id="33" name="Text 31"/>
-          <p:cNvSpPr/>
-          <p:nvPr/>
-        </p:nvSpPr>
-        <p:spPr>
-          <a:xfrm>
-            <a:off x="5806440" y="3364992"/>
-            <a:ext cx="76200" cy="475488"/>
+          <p:cNvPr id="36" name="Text 34"/>
+          <p:cNvSpPr/>
+          <p:nvPr/>
+        </p:nvSpPr>
+        <p:spPr>
+          <a:xfrm>
+            <a:off x="6784848" y="3364992"/>
+            <a:ext cx="73152" cy="475488"/>
           </a:xfrm>
           <a:prstGeom prst="rect">
             <a:avLst/>
@@ -22639,14 +22870,14 @@
       </p:sp>
       <p:sp>
         <p:nvSpPr>
-          <p:cNvPr id="34" name="Shape 32"/>
-          <p:cNvSpPr/>
-          <p:nvPr/>
-        </p:nvSpPr>
-        <p:spPr>
-          <a:xfrm>
-            <a:off x="5882640" y="3364992"/>
-            <a:ext cx="1225296" cy="475488"/>
+          <p:cNvPr id="37" name="Shape 35"/>
+          <p:cNvSpPr/>
+          <p:nvPr/>
+        </p:nvSpPr>
+        <p:spPr>
+          <a:xfrm>
+            <a:off x="6858000" y="3364992"/>
+            <a:ext cx="1554480" cy="475488"/>
           </a:xfrm>
           <a:prstGeom prst="rect">
             <a:avLst>
@@ -22666,14 +22897,14 @@
       </p:sp>
       <p:sp>
         <p:nvSpPr>
-          <p:cNvPr id="35" name="Text 33"/>
-          <p:cNvSpPr/>
-          <p:nvPr/>
-        </p:nvSpPr>
-        <p:spPr>
-          <a:xfrm>
-            <a:off x="5882640" y="3364992"/>
-            <a:ext cx="1225296" cy="475488"/>
+          <p:cNvPr id="38" name="Text 36"/>
+          <p:cNvSpPr/>
+          <p:nvPr/>
+        </p:nvSpPr>
+        <p:spPr>
+          <a:xfrm>
+            <a:off x="6858000" y="3364992"/>
+            <a:ext cx="1554480" cy="475488"/>
           </a:xfrm>
           <a:prstGeom prst="rect">
             <a:avLst/>
@@ -22697,7 +22928,7 @@
                 <a:ea typeface="Trebuchet MS" pitchFamily="34" charset="-122"/>
                 <a:cs typeface="Trebuchet MS" pitchFamily="34" charset="-120"/>
               </a:rPr>
-              <a:t>nam</a:t>
+              <a:t>mal</a:t>
             </a:r>
             <a:endParaRPr lang="en-US" sz="1400" dirty="0"/>
           </a:p>
@@ -22705,193 +22936,247 @@
       </p:sp>
       <p:sp>
         <p:nvSpPr>
-          <p:cNvPr id="36" name="Text 34"/>
-          <p:cNvSpPr/>
-          <p:nvPr/>
-        </p:nvSpPr>
-        <p:spPr>
-          <a:xfrm>
-            <a:off x="7107936" y="3364992"/>
-            <a:ext cx="76200" cy="475488"/>
-          </a:xfrm>
-          <a:prstGeom prst="rect">
-            <a:avLst/>
-          </a:prstGeom>
-          <a:noFill/>
-          <a:ln/>
-        </p:spPr>
-        <p:txBody>
-          <a:bodyPr wrap="square" lIns="0" tIns="0" rIns="0" bIns="0" rtlCol="0" anchor="ctr"/>
-          <a:lstStyle/>
-          <a:p>
-            <a:pPr algn="ctr" indent="0" marL="0">
-              <a:buNone/>
-            </a:pPr>
-            <a:r>
-              <a:rPr lang="en-US" sz="1600" b="1" dirty="0">
-                <a:solidFill>
-                  <a:srgbClr val="0D9488"/>
+          <p:cNvPr id="39" name="Shape 37"/>
+          <p:cNvSpPr/>
+          <p:nvPr/>
+        </p:nvSpPr>
+        <p:spPr>
+          <a:xfrm>
+            <a:off x="365760" y="4096512"/>
+            <a:ext cx="1371600" cy="804672"/>
+          </a:xfrm>
+          <a:prstGeom prst="rect">
+            <a:avLst>
+              <a:gd name="adj" fmla="val 6818"/>
+            </a:avLst>
+          </a:prstGeom>
+          <a:solidFill>
+            <a:srgbClr val="E2E8F0"/>
+          </a:solidFill>
+          <a:ln w="12700">
+            <a:solidFill>
+              <a:srgbClr val="E2E8F0"/>
+            </a:solidFill>
+            <a:prstDash val="solid"/>
+          </a:ln>
+        </p:spPr>
+      </p:sp>
+      <p:sp>
+        <p:nvSpPr>
+          <p:cNvPr id="40" name="Text 38"/>
+          <p:cNvSpPr/>
+          <p:nvPr/>
+        </p:nvSpPr>
+        <p:spPr>
+          <a:xfrm>
+            <a:off x="365760" y="4096512"/>
+            <a:ext cx="1371600" cy="804672"/>
+          </a:xfrm>
+          <a:prstGeom prst="rect">
+            <a:avLst/>
+          </a:prstGeom>
+          <a:noFill/>
+          <a:ln/>
+        </p:spPr>
+        <p:txBody>
+          <a:bodyPr wrap="square" lIns="0" tIns="0" rIns="0" bIns="0" rtlCol="0" anchor="ctr"/>
+          <a:lstStyle/>
+          <a:p>
+            <a:pPr algn="ctr" indent="0" marL="0">
+              <a:buNone/>
+            </a:pPr>
+            <a:r>
+              <a:rPr lang="en-US" sz="1100" b="1" dirty="0">
+                <a:solidFill>
+                  <a:srgbClr val="475569"/>
                 </a:solidFill>
                 <a:latin typeface="Trebuchet MS" pitchFamily="34" charset="0"/>
                 <a:ea typeface="Trebuchet MS" pitchFamily="34" charset="-122"/>
                 <a:cs typeface="Trebuchet MS" pitchFamily="34" charset="-120"/>
               </a:rPr>
-              <a:t>·</a:t>
-            </a:r>
-            <a:endParaRPr lang="en-US" sz="1600" dirty="0"/>
-          </a:p>
-        </p:txBody>
-      </p:sp>
-      <p:sp>
-        <p:nvSpPr>
-          <p:cNvPr id="37" name="Shape 35"/>
-          <p:cNvSpPr/>
-          <p:nvPr/>
-        </p:nvSpPr>
-        <p:spPr>
-          <a:xfrm>
-            <a:off x="7184136" y="3364992"/>
-            <a:ext cx="1225296" cy="475488"/>
+              <a:t>Phonemes</a:t>
+            </a:r>
+            <a:endParaRPr lang="en-US" sz="1100" dirty="0"/>
+          </a:p>
+        </p:txBody>
+      </p:sp>
+      <p:sp>
+        <p:nvSpPr>
+          <p:cNvPr id="41" name="Shape 39"/>
+          <p:cNvSpPr/>
+          <p:nvPr/>
+        </p:nvSpPr>
+        <p:spPr>
+          <a:xfrm>
+            <a:off x="1874520" y="4096512"/>
+            <a:ext cx="6903720" cy="658368"/>
           </a:xfrm>
           <a:prstGeom prst="rect">
             <a:avLst>
-              <a:gd name="adj" fmla="val 9615"/>
+              <a:gd name="adj" fmla="val 8333"/>
             </a:avLst>
           </a:prstGeom>
           <a:solidFill>
+            <a:srgbClr val="FCE7F3"/>
+          </a:solidFill>
+          <a:ln w="12700">
+            <a:solidFill>
+              <a:srgbClr val="DB2777"/>
+            </a:solidFill>
+            <a:prstDash val="solid"/>
+          </a:ln>
+        </p:spPr>
+      </p:sp>
+      <p:sp>
+        <p:nvSpPr>
+          <p:cNvPr id="42" name="Shape 40"/>
+          <p:cNvSpPr/>
+          <p:nvPr/>
+        </p:nvSpPr>
+        <p:spPr>
+          <a:xfrm>
+            <a:off x="2124837" y="4169664"/>
+            <a:ext cx="685800" cy="475488"/>
+          </a:xfrm>
+          <a:prstGeom prst="rect">
+            <a:avLst>
+              <a:gd name="adj" fmla="val 7692"/>
+            </a:avLst>
+          </a:prstGeom>
+          <a:solidFill>
             <a:srgbClr val="FFFFFF"/>
           </a:solidFill>
           <a:ln w="12700">
             <a:solidFill>
-              <a:srgbClr val="0D9488"/>
-            </a:solidFill>
-            <a:prstDash val="solid"/>
-          </a:ln>
-        </p:spPr>
-      </p:sp>
-      <p:sp>
-        <p:nvSpPr>
-          <p:cNvPr id="38" name="Text 36"/>
-          <p:cNvSpPr/>
-          <p:nvPr/>
-        </p:nvSpPr>
-        <p:spPr>
-          <a:xfrm>
-            <a:off x="7184136" y="3364992"/>
-            <a:ext cx="1225296" cy="475488"/>
-          </a:xfrm>
-          <a:prstGeom prst="rect">
-            <a:avLst/>
-          </a:prstGeom>
-          <a:noFill/>
-          <a:ln/>
-        </p:spPr>
-        <p:txBody>
-          <a:bodyPr wrap="square" lIns="0" tIns="0" rIns="0" bIns="0" rtlCol="0" anchor="ctr"/>
-          <a:lstStyle/>
-          <a:p>
-            <a:pPr algn="ctr" indent="0" marL="0">
-              <a:buNone/>
-            </a:pPr>
-            <a:r>
-              <a:rPr lang="en-US" sz="1400" b="1" dirty="0">
-                <a:solidFill>
-                  <a:srgbClr val="0D9488"/>
+              <a:srgbClr val="DB2777"/>
+            </a:solidFill>
+            <a:prstDash val="solid"/>
+          </a:ln>
+        </p:spPr>
+      </p:sp>
+      <p:sp>
+        <p:nvSpPr>
+          <p:cNvPr id="43" name="Text 41"/>
+          <p:cNvSpPr/>
+          <p:nvPr/>
+        </p:nvSpPr>
+        <p:spPr>
+          <a:xfrm>
+            <a:off x="2124837" y="4169664"/>
+            <a:ext cx="685800" cy="475488"/>
+          </a:xfrm>
+          <a:prstGeom prst="rect">
+            <a:avLst/>
+          </a:prstGeom>
+          <a:noFill/>
+          <a:ln/>
+        </p:spPr>
+        <p:txBody>
+          <a:bodyPr wrap="square" lIns="0" tIns="0" rIns="0" bIns="0" rtlCol="0" anchor="ctr"/>
+          <a:lstStyle/>
+          <a:p>
+            <a:pPr algn="ctr" indent="0" marL="0">
+              <a:buNone/>
+            </a:pPr>
+            <a:r>
+              <a:rPr lang="en-US" sz="900" b="1" dirty="0">
+                <a:solidFill>
+                  <a:srgbClr val="9D174D"/>
                 </a:solidFill>
                 <a:latin typeface="Trebuchet MS" pitchFamily="34" charset="0"/>
                 <a:ea typeface="Trebuchet MS" pitchFamily="34" charset="-122"/>
                 <a:cs typeface="Trebuchet MS" pitchFamily="34" charset="-120"/>
               </a:rPr>
-              <a:t>ics</a:t>
-            </a:r>
-            <a:endParaRPr lang="en-US" sz="1400" dirty="0"/>
-          </a:p>
-        </p:txBody>
-      </p:sp>
-      <p:sp>
-        <p:nvSpPr>
-          <p:cNvPr id="39" name="Shape 37"/>
-          <p:cNvSpPr/>
-          <p:nvPr/>
-        </p:nvSpPr>
-        <p:spPr>
-          <a:xfrm>
-            <a:off x="365760" y="4096512"/>
-            <a:ext cx="1371600" cy="804672"/>
+              <a:t>g</a:t>
+            </a:r>
+            <a:endParaRPr lang="en-US" sz="900" dirty="0"/>
+          </a:p>
+        </p:txBody>
+      </p:sp>
+      <p:sp>
+        <p:nvSpPr>
+          <p:cNvPr id="44" name="Shape 42"/>
+          <p:cNvSpPr/>
+          <p:nvPr/>
+        </p:nvSpPr>
+        <p:spPr>
+          <a:xfrm>
+            <a:off x="3033522" y="4169664"/>
+            <a:ext cx="685800" cy="475488"/>
           </a:xfrm>
           <a:prstGeom prst="rect">
             <a:avLst>
-              <a:gd name="adj" fmla="val 6818"/>
+              <a:gd name="adj" fmla="val 7692"/>
             </a:avLst>
           </a:prstGeom>
           <a:solidFill>
-            <a:srgbClr val="E2E8F0"/>
-          </a:solidFill>
-          <a:ln w="12700">
-            <a:solidFill>
-              <a:srgbClr val="E2E8F0"/>
-            </a:solidFill>
-            <a:prstDash val="solid"/>
-          </a:ln>
-        </p:spPr>
-      </p:sp>
-      <p:sp>
-        <p:nvSpPr>
-          <p:cNvPr id="40" name="Text 38"/>
-          <p:cNvSpPr/>
-          <p:nvPr/>
-        </p:nvSpPr>
-        <p:spPr>
-          <a:xfrm>
-            <a:off x="365760" y="4096512"/>
-            <a:ext cx="1371600" cy="804672"/>
-          </a:xfrm>
-          <a:prstGeom prst="rect">
-            <a:avLst/>
-          </a:prstGeom>
-          <a:noFill/>
-          <a:ln/>
-        </p:spPr>
-        <p:txBody>
-          <a:bodyPr wrap="square" lIns="0" tIns="0" rIns="0" bIns="0" rtlCol="0" anchor="ctr"/>
-          <a:lstStyle/>
-          <a:p>
-            <a:pPr algn="ctr" indent="0" marL="0">
-              <a:buNone/>
-            </a:pPr>
-            <a:r>
-              <a:rPr lang="en-US" sz="1100" b="1" dirty="0">
-                <a:solidFill>
-                  <a:srgbClr val="475569"/>
+            <a:srgbClr val="FFFFFF"/>
+          </a:solidFill>
+          <a:ln w="12700">
+            <a:solidFill>
+              <a:srgbClr val="DB2777"/>
+            </a:solidFill>
+            <a:prstDash val="solid"/>
+          </a:ln>
+        </p:spPr>
+      </p:sp>
+      <p:sp>
+        <p:nvSpPr>
+          <p:cNvPr id="45" name="Text 43"/>
+          <p:cNvSpPr/>
+          <p:nvPr/>
+        </p:nvSpPr>
+        <p:spPr>
+          <a:xfrm>
+            <a:off x="3033522" y="4169664"/>
+            <a:ext cx="685800" cy="475488"/>
+          </a:xfrm>
+          <a:prstGeom prst="rect">
+            <a:avLst/>
+          </a:prstGeom>
+          <a:noFill/>
+          <a:ln/>
+        </p:spPr>
+        <p:txBody>
+          <a:bodyPr wrap="square" lIns="0" tIns="0" rIns="0" bIns="0" rtlCol="0" anchor="ctr"/>
+          <a:lstStyle/>
+          <a:p>
+            <a:pPr algn="ctr" indent="0" marL="0">
+              <a:buNone/>
+            </a:pPr>
+            <a:r>
+              <a:rPr lang="en-US" sz="900" b="1" dirty="0">
+                <a:solidFill>
+                  <a:srgbClr val="9D174D"/>
                 </a:solidFill>
                 <a:latin typeface="Trebuchet MS" pitchFamily="34" charset="0"/>
                 <a:ea typeface="Trebuchet MS" pitchFamily="34" charset="-122"/>
                 <a:cs typeface="Trebuchet MS" pitchFamily="34" charset="-120"/>
               </a:rPr>
-              <a:t>Phonemes</a:t>
-            </a:r>
-            <a:endParaRPr lang="en-US" sz="1100" dirty="0"/>
-          </a:p>
-        </p:txBody>
-      </p:sp>
-      <p:sp>
-        <p:nvSpPr>
-          <p:cNvPr id="41" name="Shape 39"/>
-          <p:cNvSpPr/>
-          <p:nvPr/>
-        </p:nvSpPr>
-        <p:spPr>
-          <a:xfrm>
-            <a:off x="1874520" y="4096512"/>
-            <a:ext cx="6903720" cy="804672"/>
+              <a:t>e</a:t>
+            </a:r>
+            <a:endParaRPr lang="en-US" sz="900" dirty="0"/>
+          </a:p>
+        </p:txBody>
+      </p:sp>
+      <p:sp>
+        <p:nvSpPr>
+          <p:cNvPr id="46" name="Shape 44"/>
+          <p:cNvSpPr/>
+          <p:nvPr/>
+        </p:nvSpPr>
+        <p:spPr>
+          <a:xfrm>
+            <a:off x="3942207" y="4169664"/>
+            <a:ext cx="685800" cy="475488"/>
           </a:xfrm>
           <a:prstGeom prst="rect">
             <a:avLst>
-              <a:gd name="adj" fmla="val 6818"/>
+              <a:gd name="adj" fmla="val 7692"/>
             </a:avLst>
           </a:prstGeom>
           <a:solidFill>
-            <a:srgbClr val="FCE7F3"/>
+            <a:srgbClr val="FFFFFF"/>
           </a:solidFill>
           <a:ln w="12700">
             <a:solidFill>
@@ -22903,41 +23188,14 @@
       </p:sp>
       <p:sp>
         <p:nvSpPr>
-          <p:cNvPr id="42" name="Shape 40"/>
-          <p:cNvSpPr/>
-          <p:nvPr/>
-        </p:nvSpPr>
-        <p:spPr>
-          <a:xfrm>
-            <a:off x="1952596" y="4169664"/>
-            <a:ext cx="493776" cy="384048"/>
-          </a:xfrm>
-          <a:prstGeom prst="rect">
-            <a:avLst>
-              <a:gd name="adj" fmla="val 9524"/>
-            </a:avLst>
-          </a:prstGeom>
-          <a:solidFill>
-            <a:srgbClr val="FFFFFF"/>
-          </a:solidFill>
-          <a:ln w="12700">
-            <a:solidFill>
-              <a:srgbClr val="DB2777"/>
-            </a:solidFill>
-            <a:prstDash val="solid"/>
-          </a:ln>
-        </p:spPr>
-      </p:sp>
-      <p:sp>
-        <p:nvSpPr>
-          <p:cNvPr id="43" name="Text 41"/>
-          <p:cNvSpPr/>
-          <p:nvPr/>
-        </p:nvSpPr>
-        <p:spPr>
-          <a:xfrm>
-            <a:off x="1952596" y="4169664"/>
-            <a:ext cx="493776" cy="384048"/>
+          <p:cNvPr id="47" name="Text 45"/>
+          <p:cNvSpPr/>
+          <p:nvPr/>
+        </p:nvSpPr>
+        <p:spPr>
+          <a:xfrm>
+            <a:off x="3942207" y="4169664"/>
+            <a:ext cx="685800" cy="475488"/>
           </a:xfrm>
           <a:prstGeom prst="rect">
             <a:avLst/>
@@ -22961,7 +23219,7 @@
                 <a:ea typeface="Trebuchet MS" pitchFamily="34" charset="-122"/>
                 <a:cs typeface="Trebuchet MS" pitchFamily="34" charset="-120"/>
               </a:rPr>
-              <a:t>th</a:t>
+              <a:t>o</a:t>
             </a:r>
             <a:endParaRPr lang="en-US" sz="900" dirty="0"/>
           </a:p>
@@ -22969,18 +23227,18 @@
       </p:sp>
       <p:sp>
         <p:nvSpPr>
-          <p:cNvPr id="44" name="Shape 42"/>
-          <p:cNvSpPr/>
-          <p:nvPr/>
-        </p:nvSpPr>
-        <p:spPr>
-          <a:xfrm>
-            <a:off x="2497015" y="4169664"/>
-            <a:ext cx="493776" cy="384048"/>
+          <p:cNvPr id="48" name="Shape 46"/>
+          <p:cNvSpPr/>
+          <p:nvPr/>
+        </p:nvSpPr>
+        <p:spPr>
+          <a:xfrm>
+            <a:off x="4850892" y="4169664"/>
+            <a:ext cx="685800" cy="475488"/>
           </a:xfrm>
           <a:prstGeom prst="rect">
             <a:avLst>
-              <a:gd name="adj" fmla="val 9524"/>
+              <a:gd name="adj" fmla="val 7692"/>
             </a:avLst>
           </a:prstGeom>
           <a:solidFill>
@@ -22996,14 +23254,14 @@
       </p:sp>
       <p:sp>
         <p:nvSpPr>
-          <p:cNvPr id="45" name="Text 43"/>
-          <p:cNvSpPr/>
-          <p:nvPr/>
-        </p:nvSpPr>
-        <p:spPr>
-          <a:xfrm>
-            <a:off x="2497015" y="4169664"/>
-            <a:ext cx="493776" cy="384048"/>
+          <p:cNvPr id="49" name="Text 47"/>
+          <p:cNvSpPr/>
+          <p:nvPr/>
+        </p:nvSpPr>
+        <p:spPr>
+          <a:xfrm>
+            <a:off x="4850892" y="4169664"/>
+            <a:ext cx="685800" cy="475488"/>
           </a:xfrm>
           <a:prstGeom prst="rect">
             <a:avLst/>
@@ -23027,7 +23285,7 @@
                 <a:ea typeface="Trebuchet MS" pitchFamily="34" charset="-122"/>
                 <a:cs typeface="Trebuchet MS" pitchFamily="34" charset="-120"/>
               </a:rPr>
-              <a:t>er</a:t>
+              <a:t>th</a:t>
             </a:r>
             <a:endParaRPr lang="en-US" sz="900" dirty="0"/>
           </a:p>
@@ -23035,18 +23293,18 @@
       </p:sp>
       <p:sp>
         <p:nvSpPr>
-          <p:cNvPr id="46" name="Shape 44"/>
-          <p:cNvSpPr/>
-          <p:nvPr/>
-        </p:nvSpPr>
-        <p:spPr>
-          <a:xfrm>
-            <a:off x="3041435" y="4169664"/>
-            <a:ext cx="493776" cy="384048"/>
+          <p:cNvPr id="50" name="Shape 48"/>
+          <p:cNvSpPr/>
+          <p:nvPr/>
+        </p:nvSpPr>
+        <p:spPr>
+          <a:xfrm>
+            <a:off x="5759577" y="4169664"/>
+            <a:ext cx="685800" cy="475488"/>
           </a:xfrm>
           <a:prstGeom prst="rect">
             <a:avLst>
-              <a:gd name="adj" fmla="val 9524"/>
+              <a:gd name="adj" fmla="val 7692"/>
             </a:avLst>
           </a:prstGeom>
           <a:solidFill>
@@ -23062,14 +23320,14 @@
       </p:sp>
       <p:sp>
         <p:nvSpPr>
-          <p:cNvPr id="47" name="Text 45"/>
-          <p:cNvSpPr/>
-          <p:nvPr/>
-        </p:nvSpPr>
-        <p:spPr>
-          <a:xfrm>
-            <a:off x="3041435" y="4169664"/>
-            <a:ext cx="493776" cy="384048"/>
+          <p:cNvPr id="51" name="Text 49"/>
+          <p:cNvSpPr/>
+          <p:nvPr/>
+        </p:nvSpPr>
+        <p:spPr>
+          <a:xfrm>
+            <a:off x="5759577" y="4169664"/>
+            <a:ext cx="685800" cy="475488"/>
           </a:xfrm>
           <a:prstGeom prst="rect">
             <a:avLst/>
@@ -23093,7 +23351,7 @@
                 <a:ea typeface="Trebuchet MS" pitchFamily="34" charset="-122"/>
                 <a:cs typeface="Trebuchet MS" pitchFamily="34" charset="-120"/>
               </a:rPr>
-              <a:t>m</a:t>
+              <a:t>er</a:t>
             </a:r>
             <a:endParaRPr lang="en-US" sz="900" dirty="0"/>
           </a:p>
@@ -23101,18 +23359,18 @@
       </p:sp>
       <p:sp>
         <p:nvSpPr>
-          <p:cNvPr id="48" name="Shape 46"/>
-          <p:cNvSpPr/>
-          <p:nvPr/>
-        </p:nvSpPr>
-        <p:spPr>
-          <a:xfrm>
-            <a:off x="3585855" y="4169664"/>
-            <a:ext cx="493776" cy="384048"/>
+          <p:cNvPr id="52" name="Shape 50"/>
+          <p:cNvSpPr/>
+          <p:nvPr/>
+        </p:nvSpPr>
+        <p:spPr>
+          <a:xfrm>
+            <a:off x="6668262" y="4169664"/>
+            <a:ext cx="685800" cy="475488"/>
           </a:xfrm>
           <a:prstGeom prst="rect">
             <a:avLst>
-              <a:gd name="adj" fmla="val 9524"/>
+              <a:gd name="adj" fmla="val 7692"/>
             </a:avLst>
           </a:prstGeom>
           <a:solidFill>
@@ -23128,14 +23386,14 @@
       </p:sp>
       <p:sp>
         <p:nvSpPr>
-          <p:cNvPr id="49" name="Text 47"/>
-          <p:cNvSpPr/>
-          <p:nvPr/>
-        </p:nvSpPr>
-        <p:spPr>
-          <a:xfrm>
-            <a:off x="3585855" y="4169664"/>
-            <a:ext cx="493776" cy="384048"/>
+          <p:cNvPr id="53" name="Text 51"/>
+          <p:cNvSpPr/>
+          <p:nvPr/>
+        </p:nvSpPr>
+        <p:spPr>
+          <a:xfrm>
+            <a:off x="6668262" y="4169664"/>
+            <a:ext cx="685800" cy="475488"/>
           </a:xfrm>
           <a:prstGeom prst="rect">
             <a:avLst/>
@@ -23159,7 +23417,7 @@
                 <a:ea typeface="Trebuchet MS" pitchFamily="34" charset="-122"/>
                 <a:cs typeface="Trebuchet MS" pitchFamily="34" charset="-120"/>
               </a:rPr>
-              <a:t>o</a:t>
+              <a:t>m</a:t>
             </a:r>
             <a:endParaRPr lang="en-US" sz="900" dirty="0"/>
           </a:p>
@@ -23167,18 +23425,18 @@
       </p:sp>
       <p:sp>
         <p:nvSpPr>
-          <p:cNvPr id="50" name="Shape 48"/>
-          <p:cNvSpPr/>
-          <p:nvPr/>
-        </p:nvSpPr>
-        <p:spPr>
-          <a:xfrm>
-            <a:off x="4130274" y="4169664"/>
-            <a:ext cx="493776" cy="384048"/>
+          <p:cNvPr id="54" name="Shape 52"/>
+          <p:cNvSpPr/>
+          <p:nvPr/>
+        </p:nvSpPr>
+        <p:spPr>
+          <a:xfrm>
+            <a:off x="7576947" y="4169664"/>
+            <a:ext cx="685800" cy="475488"/>
           </a:xfrm>
           <a:prstGeom prst="rect">
             <a:avLst>
-              <a:gd name="adj" fmla="val 9524"/>
+              <a:gd name="adj" fmla="val 7692"/>
             </a:avLst>
           </a:prstGeom>
           <a:solidFill>
@@ -23194,14 +23452,14 @@
       </p:sp>
       <p:sp>
         <p:nvSpPr>
-          <p:cNvPr id="51" name="Text 49"/>
-          <p:cNvSpPr/>
-          <p:nvPr/>
-        </p:nvSpPr>
-        <p:spPr>
-          <a:xfrm>
-            <a:off x="4130274" y="4169664"/>
-            <a:ext cx="493776" cy="384048"/>
+          <p:cNvPr id="55" name="Text 53"/>
+          <p:cNvSpPr/>
+          <p:nvPr/>
+        </p:nvSpPr>
+        <p:spPr>
+          <a:xfrm>
+            <a:off x="7576947" y="4169664"/>
+            <a:ext cx="685800" cy="475488"/>
           </a:xfrm>
           <a:prstGeom prst="rect">
             <a:avLst/>
@@ -23225,508 +23483,7 @@
                 <a:ea typeface="Trebuchet MS" pitchFamily="34" charset="-122"/>
                 <a:cs typeface="Trebuchet MS" pitchFamily="34" charset="-120"/>
               </a:rPr>
-              <a:t>d</a:t>
-            </a:r>
-            <a:endParaRPr lang="en-US" sz="900" dirty="0"/>
-          </a:p>
-        </p:txBody>
-      </p:sp>
-      <p:sp>
-        <p:nvSpPr>
-          <p:cNvPr id="52" name="Shape 50"/>
-          <p:cNvSpPr/>
-          <p:nvPr/>
-        </p:nvSpPr>
-        <p:spPr>
-          <a:xfrm>
-            <a:off x="4674694" y="4169664"/>
-            <a:ext cx="493776" cy="384048"/>
-          </a:xfrm>
-          <a:prstGeom prst="rect">
-            <a:avLst>
-              <a:gd name="adj" fmla="val 9524"/>
-            </a:avLst>
-          </a:prstGeom>
-          <a:solidFill>
-            <a:srgbClr val="FFFFFF"/>
-          </a:solidFill>
-          <a:ln w="12700">
-            <a:solidFill>
-              <a:srgbClr val="DB2777"/>
-            </a:solidFill>
-            <a:prstDash val="solid"/>
-          </a:ln>
-        </p:spPr>
-      </p:sp>
-      <p:sp>
-        <p:nvSpPr>
-          <p:cNvPr id="53" name="Text 51"/>
-          <p:cNvSpPr/>
-          <p:nvPr/>
-        </p:nvSpPr>
-        <p:spPr>
-          <a:xfrm>
-            <a:off x="4674694" y="4169664"/>
-            <a:ext cx="493776" cy="384048"/>
-          </a:xfrm>
-          <a:prstGeom prst="rect">
-            <a:avLst/>
-          </a:prstGeom>
-          <a:noFill/>
-          <a:ln/>
-        </p:spPr>
-        <p:txBody>
-          <a:bodyPr wrap="square" lIns="0" tIns="0" rIns="0" bIns="0" rtlCol="0" anchor="ctr"/>
-          <a:lstStyle/>
-          <a:p>
-            <a:pPr algn="ctr" indent="0" marL="0">
-              <a:buNone/>
-            </a:pPr>
-            <a:r>
-              <a:rPr lang="en-US" sz="900" b="1" dirty="0">
-                <a:solidFill>
-                  <a:srgbClr val="9D174D"/>
-                </a:solidFill>
-                <a:latin typeface="Trebuchet MS" pitchFamily="34" charset="0"/>
-                <a:ea typeface="Trebuchet MS" pitchFamily="34" charset="-122"/>
-                <a:cs typeface="Trebuchet MS" pitchFamily="34" charset="-120"/>
-              </a:rPr>
-              <a:t>y</a:t>
-            </a:r>
-            <a:endParaRPr lang="en-US" sz="900" dirty="0"/>
-          </a:p>
-        </p:txBody>
-      </p:sp>
-      <p:sp>
-        <p:nvSpPr>
-          <p:cNvPr id="54" name="Shape 52"/>
-          <p:cNvSpPr/>
-          <p:nvPr/>
-        </p:nvSpPr>
-        <p:spPr>
-          <a:xfrm>
-            <a:off x="5219114" y="4169664"/>
-            <a:ext cx="493776" cy="384048"/>
-          </a:xfrm>
-          <a:prstGeom prst="rect">
-            <a:avLst>
-              <a:gd name="adj" fmla="val 9524"/>
-            </a:avLst>
-          </a:prstGeom>
-          <a:solidFill>
-            <a:srgbClr val="FFFFFF"/>
-          </a:solidFill>
-          <a:ln w="12700">
-            <a:solidFill>
-              <a:srgbClr val="DB2777"/>
-            </a:solidFill>
-            <a:prstDash val="solid"/>
-          </a:ln>
-        </p:spPr>
-      </p:sp>
-      <p:sp>
-        <p:nvSpPr>
-          <p:cNvPr id="55" name="Text 53"/>
-          <p:cNvSpPr/>
-          <p:nvPr/>
-        </p:nvSpPr>
-        <p:spPr>
-          <a:xfrm>
-            <a:off x="5219114" y="4169664"/>
-            <a:ext cx="493776" cy="384048"/>
-          </a:xfrm>
-          <a:prstGeom prst="rect">
-            <a:avLst/>
-          </a:prstGeom>
-          <a:noFill/>
-          <a:ln/>
-        </p:spPr>
-        <p:txBody>
-          <a:bodyPr wrap="square" lIns="0" tIns="0" rIns="0" bIns="0" rtlCol="0" anchor="ctr"/>
-          <a:lstStyle/>
-          <a:p>
-            <a:pPr algn="ctr" indent="0" marL="0">
-              <a:buNone/>
-            </a:pPr>
-            <a:r>
-              <a:rPr lang="en-US" sz="900" b="1" dirty="0">
-                <a:solidFill>
-                  <a:srgbClr val="9D174D"/>
-                </a:solidFill>
-                <a:latin typeface="Trebuchet MS" pitchFamily="34" charset="0"/>
-                <a:ea typeface="Trebuchet MS" pitchFamily="34" charset="-122"/>
-                <a:cs typeface="Trebuchet MS" pitchFamily="34" charset="-120"/>
-              </a:rPr>
-              <a:t>n</a:t>
-            </a:r>
-            <a:endParaRPr lang="en-US" sz="900" dirty="0"/>
-          </a:p>
-        </p:txBody>
-      </p:sp>
-      <p:sp>
-        <p:nvSpPr>
-          <p:cNvPr id="56" name="Shape 54"/>
-          <p:cNvSpPr/>
-          <p:nvPr/>
-        </p:nvSpPr>
-        <p:spPr>
-          <a:xfrm>
-            <a:off x="5763534" y="4169664"/>
-            <a:ext cx="493776" cy="384048"/>
-          </a:xfrm>
-          <a:prstGeom prst="rect">
-            <a:avLst>
-              <a:gd name="adj" fmla="val 9524"/>
-            </a:avLst>
-          </a:prstGeom>
-          <a:solidFill>
-            <a:srgbClr val="FFFFFF"/>
-          </a:solidFill>
-          <a:ln w="12700">
-            <a:solidFill>
-              <a:srgbClr val="DB2777"/>
-            </a:solidFill>
-            <a:prstDash val="solid"/>
-          </a:ln>
-        </p:spPr>
-      </p:sp>
-      <p:sp>
-        <p:nvSpPr>
-          <p:cNvPr id="57" name="Text 55"/>
-          <p:cNvSpPr/>
-          <p:nvPr/>
-        </p:nvSpPr>
-        <p:spPr>
-          <a:xfrm>
-            <a:off x="5763534" y="4169664"/>
-            <a:ext cx="493776" cy="384048"/>
-          </a:xfrm>
-          <a:prstGeom prst="rect">
-            <a:avLst/>
-          </a:prstGeom>
-          <a:noFill/>
-          <a:ln/>
-        </p:spPr>
-        <p:txBody>
-          <a:bodyPr wrap="square" lIns="0" tIns="0" rIns="0" bIns="0" rtlCol="0" anchor="ctr"/>
-          <a:lstStyle/>
-          <a:p>
-            <a:pPr algn="ctr" indent="0" marL="0">
-              <a:buNone/>
-            </a:pPr>
-            <a:r>
-              <a:rPr lang="en-US" sz="900" b="1" dirty="0">
-                <a:solidFill>
-                  <a:srgbClr val="9D174D"/>
-                </a:solidFill>
-                <a:latin typeface="Trebuchet MS" pitchFamily="34" charset="0"/>
-                <a:ea typeface="Trebuchet MS" pitchFamily="34" charset="-122"/>
-                <a:cs typeface="Trebuchet MS" pitchFamily="34" charset="-120"/>
-              </a:rPr>
-              <a:t>a</a:t>
-            </a:r>
-            <a:endParaRPr lang="en-US" sz="900" dirty="0"/>
-          </a:p>
-        </p:txBody>
-      </p:sp>
-      <p:sp>
-        <p:nvSpPr>
-          <p:cNvPr id="58" name="Shape 56"/>
-          <p:cNvSpPr/>
-          <p:nvPr/>
-        </p:nvSpPr>
-        <p:spPr>
-          <a:xfrm>
-            <a:off x="6307953" y="4169664"/>
-            <a:ext cx="493776" cy="384048"/>
-          </a:xfrm>
-          <a:prstGeom prst="rect">
-            <a:avLst>
-              <a:gd name="adj" fmla="val 9524"/>
-            </a:avLst>
-          </a:prstGeom>
-          <a:solidFill>
-            <a:srgbClr val="FFFFFF"/>
-          </a:solidFill>
-          <a:ln w="12700">
-            <a:solidFill>
-              <a:srgbClr val="DB2777"/>
-            </a:solidFill>
-            <a:prstDash val="solid"/>
-          </a:ln>
-        </p:spPr>
-      </p:sp>
-      <p:sp>
-        <p:nvSpPr>
-          <p:cNvPr id="59" name="Text 57"/>
-          <p:cNvSpPr/>
-          <p:nvPr/>
-        </p:nvSpPr>
-        <p:spPr>
-          <a:xfrm>
-            <a:off x="6307953" y="4169664"/>
-            <a:ext cx="493776" cy="384048"/>
-          </a:xfrm>
-          <a:prstGeom prst="rect">
-            <a:avLst/>
-          </a:prstGeom>
-          <a:noFill/>
-          <a:ln/>
-        </p:spPr>
-        <p:txBody>
-          <a:bodyPr wrap="square" lIns="0" tIns="0" rIns="0" bIns="0" rtlCol="0" anchor="ctr"/>
-          <a:lstStyle/>
-          <a:p>
-            <a:pPr algn="ctr" indent="0" marL="0">
-              <a:buNone/>
-            </a:pPr>
-            <a:r>
-              <a:rPr lang="en-US" sz="900" b="1" dirty="0">
-                <a:solidFill>
-                  <a:srgbClr val="9D174D"/>
-                </a:solidFill>
-                <a:latin typeface="Trebuchet MS" pitchFamily="34" charset="0"/>
-                <a:ea typeface="Trebuchet MS" pitchFamily="34" charset="-122"/>
-                <a:cs typeface="Trebuchet MS" pitchFamily="34" charset="-120"/>
-              </a:rPr>
-              <a:t>m</a:t>
-            </a:r>
-            <a:endParaRPr lang="en-US" sz="900" dirty="0"/>
-          </a:p>
-        </p:txBody>
-      </p:sp>
-      <p:sp>
-        <p:nvSpPr>
-          <p:cNvPr id="60" name="Shape 58"/>
-          <p:cNvSpPr/>
-          <p:nvPr/>
-        </p:nvSpPr>
-        <p:spPr>
-          <a:xfrm>
-            <a:off x="6852373" y="4169664"/>
-            <a:ext cx="493776" cy="384048"/>
-          </a:xfrm>
-          <a:prstGeom prst="rect">
-            <a:avLst>
-              <a:gd name="adj" fmla="val 9524"/>
-            </a:avLst>
-          </a:prstGeom>
-          <a:solidFill>
-            <a:srgbClr val="FFFFFF"/>
-          </a:solidFill>
-          <a:ln w="12700">
-            <a:solidFill>
-              <a:srgbClr val="DB2777"/>
-            </a:solidFill>
-            <a:prstDash val="solid"/>
-          </a:ln>
-        </p:spPr>
-      </p:sp>
-      <p:sp>
-        <p:nvSpPr>
-          <p:cNvPr id="61" name="Text 59"/>
-          <p:cNvSpPr/>
-          <p:nvPr/>
-        </p:nvSpPr>
-        <p:spPr>
-          <a:xfrm>
-            <a:off x="6852373" y="4169664"/>
-            <a:ext cx="493776" cy="384048"/>
-          </a:xfrm>
-          <a:prstGeom prst="rect">
-            <a:avLst/>
-          </a:prstGeom>
-          <a:noFill/>
-          <a:ln/>
-        </p:spPr>
-        <p:txBody>
-          <a:bodyPr wrap="square" lIns="0" tIns="0" rIns="0" bIns="0" rtlCol="0" anchor="ctr"/>
-          <a:lstStyle/>
-          <a:p>
-            <a:pPr algn="ctr" indent="0" marL="0">
-              <a:buNone/>
-            </a:pPr>
-            <a:r>
-              <a:rPr lang="en-US" sz="900" b="1" dirty="0">
-                <a:solidFill>
-                  <a:srgbClr val="9D174D"/>
-                </a:solidFill>
-                <a:latin typeface="Trebuchet MS" pitchFamily="34" charset="0"/>
-                <a:ea typeface="Trebuchet MS" pitchFamily="34" charset="-122"/>
-                <a:cs typeface="Trebuchet MS" pitchFamily="34" charset="-120"/>
-              </a:rPr>
-              <a:t>i</a:t>
-            </a:r>
-            <a:endParaRPr lang="en-US" sz="900" dirty="0"/>
-          </a:p>
-        </p:txBody>
-      </p:sp>
-      <p:sp>
-        <p:nvSpPr>
-          <p:cNvPr id="62" name="Shape 60"/>
-          <p:cNvSpPr/>
-          <p:nvPr/>
-        </p:nvSpPr>
-        <p:spPr>
-          <a:xfrm>
-            <a:off x="7396793" y="4169664"/>
-            <a:ext cx="493776" cy="384048"/>
-          </a:xfrm>
-          <a:prstGeom prst="rect">
-            <a:avLst>
-              <a:gd name="adj" fmla="val 9524"/>
-            </a:avLst>
-          </a:prstGeom>
-          <a:solidFill>
-            <a:srgbClr val="FFFFFF"/>
-          </a:solidFill>
-          <a:ln w="12700">
-            <a:solidFill>
-              <a:srgbClr val="DB2777"/>
-            </a:solidFill>
-            <a:prstDash val="solid"/>
-          </a:ln>
-        </p:spPr>
-      </p:sp>
-      <p:sp>
-        <p:nvSpPr>
-          <p:cNvPr id="63" name="Text 61"/>
-          <p:cNvSpPr/>
-          <p:nvPr/>
-        </p:nvSpPr>
-        <p:spPr>
-          <a:xfrm>
-            <a:off x="7396793" y="4169664"/>
-            <a:ext cx="493776" cy="384048"/>
-          </a:xfrm>
-          <a:prstGeom prst="rect">
-            <a:avLst/>
-          </a:prstGeom>
-          <a:noFill/>
-          <a:ln/>
-        </p:spPr>
-        <p:txBody>
-          <a:bodyPr wrap="square" lIns="0" tIns="0" rIns="0" bIns="0" rtlCol="0" anchor="ctr"/>
-          <a:lstStyle/>
-          <a:p>
-            <a:pPr algn="ctr" indent="0" marL="0">
-              <a:buNone/>
-            </a:pPr>
-            <a:r>
-              <a:rPr lang="en-US" sz="900" b="1" dirty="0">
-                <a:solidFill>
-                  <a:srgbClr val="9D174D"/>
-                </a:solidFill>
-                <a:latin typeface="Trebuchet MS" pitchFamily="34" charset="0"/>
-                <a:ea typeface="Trebuchet MS" pitchFamily="34" charset="-122"/>
-                <a:cs typeface="Trebuchet MS" pitchFamily="34" charset="-120"/>
-              </a:rPr>
-              <a:t>c</a:t>
-            </a:r>
-            <a:endParaRPr lang="en-US" sz="900" dirty="0"/>
-          </a:p>
-        </p:txBody>
-      </p:sp>
-      <p:sp>
-        <p:nvSpPr>
-          <p:cNvPr id="64" name="Text 62"/>
-          <p:cNvSpPr/>
-          <p:nvPr/>
-        </p:nvSpPr>
-        <p:spPr>
-          <a:xfrm>
-            <a:off x="7396793" y="4572000"/>
-            <a:ext cx="493776" cy="219456"/>
-          </a:xfrm>
-          <a:prstGeom prst="rect">
-            <a:avLst/>
-          </a:prstGeom>
-          <a:noFill/>
-          <a:ln/>
-        </p:spPr>
-        <p:txBody>
-          <a:bodyPr wrap="square" lIns="0" tIns="0" rIns="0" bIns="0" rtlCol="0" anchor="t"/>
-          <a:lstStyle/>
-          <a:p>
-            <a:pPr algn="ctr" indent="0" marL="0">
-              <a:buNone/>
-            </a:pPr>
-            <a:r>
-              <a:rPr lang="en-US" sz="750" i="1" dirty="0">
-                <a:solidFill>
-                  <a:srgbClr val="94A3B8"/>
-                </a:solidFill>
-                <a:latin typeface="Calibri" pitchFamily="34" charset="0"/>
-                <a:ea typeface="Calibri" pitchFamily="34" charset="-122"/>
-                <a:cs typeface="Calibri" pitchFamily="34" charset="-120"/>
-              </a:rPr>
-              <a:t>/k/</a:t>
-            </a:r>
-            <a:endParaRPr lang="en-US" sz="750" dirty="0"/>
-          </a:p>
-        </p:txBody>
-      </p:sp>
-      <p:sp>
-        <p:nvSpPr>
-          <p:cNvPr id="65" name="Shape 63"/>
-          <p:cNvSpPr/>
-          <p:nvPr/>
-        </p:nvSpPr>
-        <p:spPr>
-          <a:xfrm>
-            <a:off x="7941212" y="4169664"/>
-            <a:ext cx="493776" cy="384048"/>
-          </a:xfrm>
-          <a:prstGeom prst="rect">
-            <a:avLst>
-              <a:gd name="adj" fmla="val 9524"/>
-            </a:avLst>
-          </a:prstGeom>
-          <a:solidFill>
-            <a:srgbClr val="FFFFFF"/>
-          </a:solidFill>
-          <a:ln w="12700">
-            <a:solidFill>
-              <a:srgbClr val="DB2777"/>
-            </a:solidFill>
-            <a:prstDash val="solid"/>
-          </a:ln>
-        </p:spPr>
-      </p:sp>
-      <p:sp>
-        <p:nvSpPr>
-          <p:cNvPr id="66" name="Text 64"/>
-          <p:cNvSpPr/>
-          <p:nvPr/>
-        </p:nvSpPr>
-        <p:spPr>
-          <a:xfrm>
-            <a:off x="7941212" y="4169664"/>
-            <a:ext cx="493776" cy="384048"/>
-          </a:xfrm>
-          <a:prstGeom prst="rect">
-            <a:avLst/>
-          </a:prstGeom>
-          <a:noFill/>
-          <a:ln/>
-        </p:spPr>
-        <p:txBody>
-          <a:bodyPr wrap="square" lIns="0" tIns="0" rIns="0" bIns="0" rtlCol="0" anchor="ctr"/>
-          <a:lstStyle/>
-          <a:p>
-            <a:pPr algn="ctr" indent="0" marL="0">
-              <a:buNone/>
-            </a:pPr>
-            <a:r>
-              <a:rPr lang="en-US" sz="900" b="1" dirty="0">
-                <a:solidFill>
-                  <a:srgbClr val="9D174D"/>
-                </a:solidFill>
-                <a:latin typeface="Trebuchet MS" pitchFamily="34" charset="0"/>
-                <a:ea typeface="Trebuchet MS" pitchFamily="34" charset="-122"/>
-                <a:cs typeface="Trebuchet MS" pitchFamily="34" charset="-120"/>
-              </a:rPr>
-              <a:t>s</a:t>
+              <a:t>al</a:t>
             </a:r>
             <a:endParaRPr lang="en-US" sz="900" dirty="0"/>
           </a:p>
@@ -24018,7 +23775,7 @@
                 <a:ea typeface="Calibri" pitchFamily="34" charset="-122"/>
                 <a:cs typeface="Calibri" pitchFamily="34" charset="-120"/>
               </a:rPr>
-              <a:t>Word Labs  •  wordlabs.app  •  Root: 'thermo' = heat or temperature</a:t>
+              <a:t>Word Labs  •  wordlabs.app  •  Root: 'thermo' = heat, temperature</a:t>
             </a:r>
             <a:endParaRPr lang="en-US" sz="800" dirty="0"/>
           </a:p>
@@ -24157,7 +23914,7 @@
                 <a:ea typeface="Trebuchet MS" pitchFamily="34" charset="-122"/>
                 <a:cs typeface="Trebuchet MS" pitchFamily="34" charset="-120"/>
               </a:rPr>
-              <a:t>thermostat</a:t>
+              <a:t>thermodynamics</a:t>
             </a:r>
             <a:endParaRPr lang="en-US" sz="2800" dirty="0"/>
           </a:p>
@@ -24845,7 +24602,7 @@
                 <a:ea typeface="Calibri" pitchFamily="34" charset="-122"/>
                 <a:cs typeface="Calibri" pitchFamily="34" charset="-120"/>
               </a:rPr>
-              <a:t>Word Labs  •  wordlabs.app  •  Root: 'thermo' = heat or temperature</a:t>
+              <a:t>Word Labs  •  wordlabs.app  •  Root: 'thermo' = heat, temperature</a:t>
             </a:r>
             <a:endParaRPr lang="en-US" sz="800" dirty="0"/>
           </a:p>
@@ -24984,7 +24741,7 @@
                 <a:ea typeface="Trebuchet MS" pitchFamily="34" charset="-122"/>
                 <a:cs typeface="Trebuchet MS" pitchFamily="34" charset="-120"/>
               </a:rPr>
-              <a:t>thermostat</a:t>
+              <a:t>thermodynamics</a:t>
             </a:r>
             <a:endParaRPr lang="en-US" sz="2800" dirty="0"/>
           </a:p>
@@ -25064,7 +24821,7 @@
         </p:nvSpPr>
         <p:spPr>
           <a:xfrm>
-            <a:off x="2938272" y="2258568"/>
+            <a:off x="2221992" y="2258568"/>
             <a:ext cx="1828800" cy="292608"/>
           </a:xfrm>
           <a:prstGeom prst="rect">
@@ -25098,7 +24855,7 @@
         </p:nvSpPr>
         <p:spPr>
           <a:xfrm>
-            <a:off x="2938272" y="2258568"/>
+            <a:off x="2221992" y="2258568"/>
             <a:ext cx="1828800" cy="292608"/>
           </a:xfrm>
           <a:prstGeom prst="rect">
@@ -25137,7 +24894,7 @@
         </p:nvSpPr>
         <p:spPr>
           <a:xfrm>
-            <a:off x="2938272" y="2569464"/>
+            <a:off x="2221992" y="2569464"/>
             <a:ext cx="1828800" cy="201168"/>
           </a:xfrm>
           <a:prstGeom prst="rect">
@@ -25176,7 +24933,7 @@
         </p:nvSpPr>
         <p:spPr>
           <a:xfrm>
-            <a:off x="5803392" y="2258568"/>
+            <a:off x="4370832" y="2258568"/>
             <a:ext cx="1828800" cy="292608"/>
           </a:xfrm>
           <a:prstGeom prst="rect">
@@ -25210,7 +24967,7 @@
         </p:nvSpPr>
         <p:spPr>
           <a:xfrm>
-            <a:off x="5803392" y="2258568"/>
+            <a:off x="4370832" y="2258568"/>
             <a:ext cx="1828800" cy="292608"/>
           </a:xfrm>
           <a:prstGeom prst="rect">
@@ -25235,7 +24992,7 @@
                 <a:ea typeface="Trebuchet MS" pitchFamily="34" charset="-122"/>
                 <a:cs typeface="Trebuchet MS" pitchFamily="34" charset="-120"/>
               </a:rPr>
-              <a:t>stat</a:t>
+              <a:t>dynamic</a:t>
             </a:r>
             <a:endParaRPr lang="en-US" sz="1300" dirty="0"/>
           </a:p>
@@ -25249,7 +25006,7 @@
         </p:nvSpPr>
         <p:spPr>
           <a:xfrm>
-            <a:off x="5803392" y="2569464"/>
+            <a:off x="4370832" y="2569464"/>
             <a:ext cx="1828800" cy="201168"/>
           </a:xfrm>
           <a:prstGeom prst="rect">
@@ -25274,7 +25031,7 @@
                 <a:ea typeface="Calibri" pitchFamily="34" charset="-122"/>
                 <a:cs typeface="Calibri" pitchFamily="34" charset="-120"/>
               </a:rPr>
-              <a:t>keeping steady or still</a:t>
+              <a:t>relating to force and motion</a:t>
             </a:r>
             <a:endParaRPr lang="en-US" sz="850" dirty="0"/>
           </a:p>
@@ -25283,6 +25040,118 @@
       <p:sp>
         <p:nvSpPr>
           <p:cNvPr id="22" name="Shape 20"/>
+          <p:cNvSpPr/>
+          <p:nvPr/>
+        </p:nvSpPr>
+        <p:spPr>
+          <a:xfrm>
+            <a:off x="6519672" y="2258568"/>
+            <a:ext cx="1828800" cy="292608"/>
+          </a:xfrm>
+          <a:prstGeom prst="rect">
+            <a:avLst>
+              <a:gd name="adj" fmla="val 25000"/>
+            </a:avLst>
+          </a:prstGeom>
+          <a:solidFill>
+            <a:srgbClr val="FCE7F3"/>
+          </a:solidFill>
+          <a:ln w="19050">
+            <a:solidFill>
+              <a:srgbClr val="DB2777"/>
+            </a:solidFill>
+            <a:prstDash val="solid"/>
+          </a:ln>
+          <a:effectLst>
+            <a:outerShdw sx="100000" sy="100000" kx="0" ky="0" algn="bl" rotWithShape="0" blurRad="101600" dist="38100" dir="8100000">
+              <a:srgbClr val="000000">
+                <a:alpha val="12000"/>
+              </a:srgbClr>
+            </a:outerShdw>
+          </a:effectLst>
+        </p:spPr>
+      </p:sp>
+      <p:sp>
+        <p:nvSpPr>
+          <p:cNvPr id="23" name="Text 21"/>
+          <p:cNvSpPr/>
+          <p:nvPr/>
+        </p:nvSpPr>
+        <p:spPr>
+          <a:xfrm>
+            <a:off x="6519672" y="2258568"/>
+            <a:ext cx="1828800" cy="292608"/>
+          </a:xfrm>
+          <a:prstGeom prst="rect">
+            <a:avLst/>
+          </a:prstGeom>
+          <a:noFill/>
+          <a:ln/>
+        </p:spPr>
+        <p:txBody>
+          <a:bodyPr wrap="square" lIns="0" tIns="0" rIns="0" bIns="0" rtlCol="0" anchor="ctr"/>
+          <a:lstStyle/>
+          <a:p>
+            <a:pPr algn="ctr" indent="0" marL="0">
+              <a:buNone/>
+            </a:pPr>
+            <a:r>
+              <a:rPr lang="en-US" sz="1300" b="1" dirty="0">
+                <a:solidFill>
+                  <a:srgbClr val="9D174D"/>
+                </a:solidFill>
+                <a:latin typeface="Trebuchet MS" pitchFamily="34" charset="0"/>
+                <a:ea typeface="Trebuchet MS" pitchFamily="34" charset="-122"/>
+                <a:cs typeface="Trebuchet MS" pitchFamily="34" charset="-120"/>
+              </a:rPr>
+              <a:t>s</a:t>
+            </a:r>
+            <a:endParaRPr lang="en-US" sz="1300" dirty="0"/>
+          </a:p>
+        </p:txBody>
+      </p:sp>
+      <p:sp>
+        <p:nvSpPr>
+          <p:cNvPr id="24" name="Text 22"/>
+          <p:cNvSpPr/>
+          <p:nvPr/>
+        </p:nvSpPr>
+        <p:spPr>
+          <a:xfrm>
+            <a:off x="6519672" y="2569464"/>
+            <a:ext cx="1828800" cy="201168"/>
+          </a:xfrm>
+          <a:prstGeom prst="rect">
+            <a:avLst/>
+          </a:prstGeom>
+          <a:noFill/>
+          <a:ln/>
+        </p:spPr>
+        <p:txBody>
+          <a:bodyPr wrap="square" lIns="0" tIns="0" rIns="0" bIns="0" rtlCol="0" anchor="t"/>
+          <a:lstStyle/>
+          <a:p>
+            <a:pPr algn="ctr" indent="0" marL="0">
+              <a:buNone/>
+            </a:pPr>
+            <a:r>
+              <a:rPr lang="en-US" sz="850" dirty="0">
+                <a:solidFill>
+                  <a:srgbClr val="475569"/>
+                </a:solidFill>
+                <a:latin typeface="Calibri" pitchFamily="34" charset="0"/>
+                <a:ea typeface="Calibri" pitchFamily="34" charset="-122"/>
+                <a:cs typeface="Calibri" pitchFamily="34" charset="-120"/>
+              </a:rPr>
+              <a:t>forming a field of study</a:t>
+            </a:r>
+            <a:endParaRPr lang="en-US" sz="850" dirty="0"/>
+          </a:p>
+        </p:txBody>
+      </p:sp>
+      <p:sp>
+        <p:nvSpPr>
+          <p:cNvPr id="25" name="Shape 23"/>
           <p:cNvSpPr/>
           <p:nvPr/>
         </p:nvSpPr>
@@ -25309,7 +25178,7 @@
       </p:sp>
       <p:sp>
         <p:nvSpPr>
-          <p:cNvPr id="23" name="Text 21"/>
+          <p:cNvPr id="26" name="Text 24"/>
           <p:cNvSpPr/>
           <p:nvPr/>
         </p:nvSpPr>
@@ -25348,7 +25217,7 @@
       </p:sp>
       <p:sp>
         <p:nvSpPr>
-          <p:cNvPr id="24" name="Shape 22"/>
+          <p:cNvPr id="27" name="Shape 25"/>
           <p:cNvSpPr/>
           <p:nvPr/>
         </p:nvSpPr>
@@ -25375,7 +25244,7 @@
       </p:sp>
       <p:sp>
         <p:nvSpPr>
-          <p:cNvPr id="25" name="Text 23"/>
+          <p:cNvPr id="28" name="Text 26"/>
           <p:cNvSpPr/>
           <p:nvPr/>
         </p:nvSpPr>
@@ -25414,7 +25283,7 @@
       </p:sp>
       <p:sp>
         <p:nvSpPr>
-          <p:cNvPr id="26" name="Shape 24"/>
+          <p:cNvPr id="29" name="Shape 27"/>
           <p:cNvSpPr/>
           <p:nvPr/>
         </p:nvSpPr>
@@ -25441,7 +25310,7 @@
       </p:sp>
       <p:sp>
         <p:nvSpPr>
-          <p:cNvPr id="27" name="Text 25"/>
+          <p:cNvPr id="30" name="Text 28"/>
           <p:cNvSpPr/>
           <p:nvPr/>
         </p:nvSpPr>
@@ -25480,7 +25349,7 @@
       </p:sp>
       <p:sp>
         <p:nvSpPr>
-          <p:cNvPr id="28" name="Shape 26"/>
+          <p:cNvPr id="31" name="Shape 29"/>
           <p:cNvSpPr/>
           <p:nvPr/>
         </p:nvSpPr>
@@ -25507,7 +25376,7 @@
       </p:sp>
       <p:sp>
         <p:nvSpPr>
-          <p:cNvPr id="29" name="Text 27"/>
+          <p:cNvPr id="32" name="Text 30"/>
           <p:cNvSpPr/>
           <p:nvPr/>
         </p:nvSpPr>
@@ -25830,7 +25699,7 @@
                 <a:ea typeface="Calibri" pitchFamily="34" charset="-122"/>
                 <a:cs typeface="Calibri" pitchFamily="34" charset="-120"/>
               </a:rPr>
-              <a:t>Word Labs  •  wordlabs.app  •  Root: 'thermo' = heat or temperature</a:t>
+              <a:t>Word Labs  •  wordlabs.app  •  Root: 'thermo' = heat, temperature</a:t>
             </a:r>
             <a:endParaRPr lang="en-US" sz="800" dirty="0"/>
           </a:p>
@@ -25903,7 +25772,7 @@
                 <a:ea typeface="Trebuchet MS" pitchFamily="34" charset="-122"/>
                 <a:cs typeface="Trebuchet MS" pitchFamily="34" charset="-120"/>
               </a:rPr>
-              <a:t>We are learning that the root 'thermo' means 'heat or temperature'.</a:t>
+              <a:t>We are learning that the root 'thermo' means 'heat, temperature'.</a:t>
             </a:r>
             <a:endParaRPr lang="en-US" sz="2000" dirty="0"/>
           </a:p>
@@ -26549,7 +26418,7 @@
                 <a:ea typeface="Calibri" pitchFamily="34" charset="-122"/>
                 <a:cs typeface="Calibri" pitchFamily="34" charset="-120"/>
               </a:rPr>
-              <a:t>Word Labs  •  wordlabs.app  •  Root: 'thermo' = heat or temperature</a:t>
+              <a:t>Word Labs  •  wordlabs.app  •  Root: 'thermo' = heat, temperature</a:t>
             </a:r>
             <a:endParaRPr lang="en-US" sz="800" dirty="0"/>
           </a:p>
@@ -26688,7 +26557,7 @@
                 <a:ea typeface="Trebuchet MS" pitchFamily="34" charset="-122"/>
                 <a:cs typeface="Trebuchet MS" pitchFamily="34" charset="-120"/>
               </a:rPr>
-              <a:t>thermostat</a:t>
+              <a:t>thermodynamics</a:t>
             </a:r>
             <a:endParaRPr lang="en-US" sz="2800" dirty="0"/>
           </a:p>
@@ -26768,7 +26637,7 @@
         </p:nvSpPr>
         <p:spPr>
           <a:xfrm>
-            <a:off x="2938272" y="2258568"/>
+            <a:off x="2221992" y="2258568"/>
             <a:ext cx="1828800" cy="292608"/>
           </a:xfrm>
           <a:prstGeom prst="rect">
@@ -26802,7 +26671,7 @@
         </p:nvSpPr>
         <p:spPr>
           <a:xfrm>
-            <a:off x="2938272" y="2258568"/>
+            <a:off x="2221992" y="2258568"/>
             <a:ext cx="1828800" cy="292608"/>
           </a:xfrm>
           <a:prstGeom prst="rect">
@@ -26841,7 +26710,7 @@
         </p:nvSpPr>
         <p:spPr>
           <a:xfrm>
-            <a:off x="2938272" y="2569464"/>
+            <a:off x="2221992" y="2569464"/>
             <a:ext cx="1828800" cy="201168"/>
           </a:xfrm>
           <a:prstGeom prst="rect">
@@ -26880,7 +26749,7 @@
         </p:nvSpPr>
         <p:spPr>
           <a:xfrm>
-            <a:off x="5803392" y="2258568"/>
+            <a:off x="4370832" y="2258568"/>
             <a:ext cx="1828800" cy="292608"/>
           </a:xfrm>
           <a:prstGeom prst="rect">
@@ -26914,7 +26783,7 @@
         </p:nvSpPr>
         <p:spPr>
           <a:xfrm>
-            <a:off x="5803392" y="2258568"/>
+            <a:off x="4370832" y="2258568"/>
             <a:ext cx="1828800" cy="292608"/>
           </a:xfrm>
           <a:prstGeom prst="rect">
@@ -26939,7 +26808,7 @@
                 <a:ea typeface="Trebuchet MS" pitchFamily="34" charset="-122"/>
                 <a:cs typeface="Trebuchet MS" pitchFamily="34" charset="-120"/>
               </a:rPr>
-              <a:t>stat</a:t>
+              <a:t>dynamic</a:t>
             </a:r>
             <a:endParaRPr lang="en-US" sz="1300" dirty="0"/>
           </a:p>
@@ -26953,7 +26822,7 @@
         </p:nvSpPr>
         <p:spPr>
           <a:xfrm>
-            <a:off x="5803392" y="2569464"/>
+            <a:off x="4370832" y="2569464"/>
             <a:ext cx="1828800" cy="201168"/>
           </a:xfrm>
           <a:prstGeom prst="rect">
@@ -26978,7 +26847,7 @@
                 <a:ea typeface="Calibri" pitchFamily="34" charset="-122"/>
                 <a:cs typeface="Calibri" pitchFamily="34" charset="-120"/>
               </a:rPr>
-              <a:t>keeping steady or still</a:t>
+              <a:t>relating to force and motion</a:t>
             </a:r>
             <a:endParaRPr lang="en-US" sz="850" dirty="0"/>
           </a:p>
@@ -26987,6 +26856,118 @@
       <p:sp>
         <p:nvSpPr>
           <p:cNvPr id="22" name="Shape 20"/>
+          <p:cNvSpPr/>
+          <p:nvPr/>
+        </p:nvSpPr>
+        <p:spPr>
+          <a:xfrm>
+            <a:off x="6519672" y="2258568"/>
+            <a:ext cx="1828800" cy="292608"/>
+          </a:xfrm>
+          <a:prstGeom prst="rect">
+            <a:avLst>
+              <a:gd name="adj" fmla="val 25000"/>
+            </a:avLst>
+          </a:prstGeom>
+          <a:solidFill>
+            <a:srgbClr val="FCE7F3"/>
+          </a:solidFill>
+          <a:ln w="19050">
+            <a:solidFill>
+              <a:srgbClr val="DB2777"/>
+            </a:solidFill>
+            <a:prstDash val="solid"/>
+          </a:ln>
+          <a:effectLst>
+            <a:outerShdw sx="100000" sy="100000" kx="0" ky="0" algn="bl" rotWithShape="0" blurRad="101600" dist="38100" dir="8100000">
+              <a:srgbClr val="000000">
+                <a:alpha val="12000"/>
+              </a:srgbClr>
+            </a:outerShdw>
+          </a:effectLst>
+        </p:spPr>
+      </p:sp>
+      <p:sp>
+        <p:nvSpPr>
+          <p:cNvPr id="23" name="Text 21"/>
+          <p:cNvSpPr/>
+          <p:nvPr/>
+        </p:nvSpPr>
+        <p:spPr>
+          <a:xfrm>
+            <a:off x="6519672" y="2258568"/>
+            <a:ext cx="1828800" cy="292608"/>
+          </a:xfrm>
+          <a:prstGeom prst="rect">
+            <a:avLst/>
+          </a:prstGeom>
+          <a:noFill/>
+          <a:ln/>
+        </p:spPr>
+        <p:txBody>
+          <a:bodyPr wrap="square" lIns="0" tIns="0" rIns="0" bIns="0" rtlCol="0" anchor="ctr"/>
+          <a:lstStyle/>
+          <a:p>
+            <a:pPr algn="ctr" indent="0" marL="0">
+              <a:buNone/>
+            </a:pPr>
+            <a:r>
+              <a:rPr lang="en-US" sz="1300" b="1" dirty="0">
+                <a:solidFill>
+                  <a:srgbClr val="9D174D"/>
+                </a:solidFill>
+                <a:latin typeface="Trebuchet MS" pitchFamily="34" charset="0"/>
+                <a:ea typeface="Trebuchet MS" pitchFamily="34" charset="-122"/>
+                <a:cs typeface="Trebuchet MS" pitchFamily="34" charset="-120"/>
+              </a:rPr>
+              <a:t>s</a:t>
+            </a:r>
+            <a:endParaRPr lang="en-US" sz="1300" dirty="0"/>
+          </a:p>
+        </p:txBody>
+      </p:sp>
+      <p:sp>
+        <p:nvSpPr>
+          <p:cNvPr id="24" name="Text 22"/>
+          <p:cNvSpPr/>
+          <p:nvPr/>
+        </p:nvSpPr>
+        <p:spPr>
+          <a:xfrm>
+            <a:off x="6519672" y="2569464"/>
+            <a:ext cx="1828800" cy="201168"/>
+          </a:xfrm>
+          <a:prstGeom prst="rect">
+            <a:avLst/>
+          </a:prstGeom>
+          <a:noFill/>
+          <a:ln/>
+        </p:spPr>
+        <p:txBody>
+          <a:bodyPr wrap="square" lIns="0" tIns="0" rIns="0" bIns="0" rtlCol="0" anchor="t"/>
+          <a:lstStyle/>
+          <a:p>
+            <a:pPr algn="ctr" indent="0" marL="0">
+              <a:buNone/>
+            </a:pPr>
+            <a:r>
+              <a:rPr lang="en-US" sz="850" dirty="0">
+                <a:solidFill>
+                  <a:srgbClr val="475569"/>
+                </a:solidFill>
+                <a:latin typeface="Calibri" pitchFamily="34" charset="0"/>
+                <a:ea typeface="Calibri" pitchFamily="34" charset="-122"/>
+                <a:cs typeface="Calibri" pitchFamily="34" charset="-120"/>
+              </a:rPr>
+              <a:t>forming a field of study</a:t>
+            </a:r>
+            <a:endParaRPr lang="en-US" sz="850" dirty="0"/>
+          </a:p>
+        </p:txBody>
+      </p:sp>
+      <p:sp>
+        <p:nvSpPr>
+          <p:cNvPr id="25" name="Shape 23"/>
           <p:cNvSpPr/>
           <p:nvPr/>
         </p:nvSpPr>
@@ -27013,7 +26994,7 @@
       </p:sp>
       <p:sp>
         <p:nvSpPr>
-          <p:cNvPr id="23" name="Text 21"/>
+          <p:cNvPr id="26" name="Text 24"/>
           <p:cNvSpPr/>
           <p:nvPr/>
         </p:nvSpPr>
@@ -27052,7 +27033,7 @@
       </p:sp>
       <p:sp>
         <p:nvSpPr>
-          <p:cNvPr id="24" name="Shape 22"/>
+          <p:cNvPr id="27" name="Shape 25"/>
           <p:cNvSpPr/>
           <p:nvPr/>
         </p:nvSpPr>
@@ -27079,14 +27060,14 @@
       </p:sp>
       <p:sp>
         <p:nvSpPr>
-          <p:cNvPr id="25" name="Shape 23"/>
-          <p:cNvSpPr/>
-          <p:nvPr/>
-        </p:nvSpPr>
-        <p:spPr>
-          <a:xfrm>
-            <a:off x="2313432" y="3364992"/>
-            <a:ext cx="1645920" cy="475488"/>
+          <p:cNvPr id="28" name="Shape 26"/>
+          <p:cNvSpPr/>
+          <p:nvPr/>
+        </p:nvSpPr>
+        <p:spPr>
+          <a:xfrm>
+            <a:off x="1978152" y="3364992"/>
+            <a:ext cx="1225296" cy="475488"/>
           </a:xfrm>
           <a:prstGeom prst="rect">
             <a:avLst>
@@ -27106,14 +27087,14 @@
       </p:sp>
       <p:sp>
         <p:nvSpPr>
-          <p:cNvPr id="26" name="Text 24"/>
-          <p:cNvSpPr/>
-          <p:nvPr/>
-        </p:nvSpPr>
-        <p:spPr>
-          <a:xfrm>
-            <a:off x="2313432" y="3364992"/>
-            <a:ext cx="1645920" cy="475488"/>
+          <p:cNvPr id="29" name="Text 27"/>
+          <p:cNvSpPr/>
+          <p:nvPr/>
+        </p:nvSpPr>
+        <p:spPr>
+          <a:xfrm>
+            <a:off x="1978152" y="3364992"/>
+            <a:ext cx="1225296" cy="475488"/>
           </a:xfrm>
           <a:prstGeom prst="rect">
             <a:avLst/>
@@ -27145,14 +27126,14 @@
       </p:sp>
       <p:sp>
         <p:nvSpPr>
-          <p:cNvPr id="27" name="Text 25"/>
-          <p:cNvSpPr/>
-          <p:nvPr/>
-        </p:nvSpPr>
-        <p:spPr>
-          <a:xfrm>
-            <a:off x="3959352" y="3364992"/>
-            <a:ext cx="411480" cy="475488"/>
+          <p:cNvPr id="30" name="Text 28"/>
+          <p:cNvSpPr/>
+          <p:nvPr/>
+        </p:nvSpPr>
+        <p:spPr>
+          <a:xfrm>
+            <a:off x="3203448" y="3364992"/>
+            <a:ext cx="76200" cy="475488"/>
           </a:xfrm>
           <a:prstGeom prst="rect">
             <a:avLst/>
@@ -27184,14 +27165,14 @@
       </p:sp>
       <p:sp>
         <p:nvSpPr>
-          <p:cNvPr id="28" name="Shape 26"/>
-          <p:cNvSpPr/>
-          <p:nvPr/>
-        </p:nvSpPr>
-        <p:spPr>
-          <a:xfrm>
-            <a:off x="4370832" y="3364992"/>
-            <a:ext cx="1645920" cy="475488"/>
+          <p:cNvPr id="31" name="Shape 29"/>
+          <p:cNvSpPr/>
+          <p:nvPr/>
+        </p:nvSpPr>
+        <p:spPr>
+          <a:xfrm>
+            <a:off x="3279648" y="3364992"/>
+            <a:ext cx="1225296" cy="475488"/>
           </a:xfrm>
           <a:prstGeom prst="rect">
             <a:avLst>
@@ -27211,14 +27192,14 @@
       </p:sp>
       <p:sp>
         <p:nvSpPr>
-          <p:cNvPr id="29" name="Text 27"/>
-          <p:cNvSpPr/>
-          <p:nvPr/>
-        </p:nvSpPr>
-        <p:spPr>
-          <a:xfrm>
-            <a:off x="4370832" y="3364992"/>
-            <a:ext cx="1645920" cy="475488"/>
+          <p:cNvPr id="32" name="Text 30"/>
+          <p:cNvSpPr/>
+          <p:nvPr/>
+        </p:nvSpPr>
+        <p:spPr>
+          <a:xfrm>
+            <a:off x="3279648" y="3364992"/>
+            <a:ext cx="1225296" cy="475488"/>
           </a:xfrm>
           <a:prstGeom prst="rect">
             <a:avLst/>
@@ -27250,14 +27231,14 @@
       </p:sp>
       <p:sp>
         <p:nvSpPr>
-          <p:cNvPr id="30" name="Text 28"/>
-          <p:cNvSpPr/>
-          <p:nvPr/>
-        </p:nvSpPr>
-        <p:spPr>
-          <a:xfrm>
-            <a:off x="6016752" y="3364992"/>
-            <a:ext cx="411480" cy="475488"/>
+          <p:cNvPr id="33" name="Text 31"/>
+          <p:cNvSpPr/>
+          <p:nvPr/>
+        </p:nvSpPr>
+        <p:spPr>
+          <a:xfrm>
+            <a:off x="4504944" y="3364992"/>
+            <a:ext cx="76200" cy="475488"/>
           </a:xfrm>
           <a:prstGeom prst="rect">
             <a:avLst/>
@@ -27289,14 +27270,14 @@
       </p:sp>
       <p:sp>
         <p:nvSpPr>
-          <p:cNvPr id="31" name="Shape 29"/>
-          <p:cNvSpPr/>
-          <p:nvPr/>
-        </p:nvSpPr>
-        <p:spPr>
-          <a:xfrm>
-            <a:off x="6428232" y="3364992"/>
-            <a:ext cx="1645920" cy="475488"/>
+          <p:cNvPr id="34" name="Shape 32"/>
+          <p:cNvSpPr/>
+          <p:nvPr/>
+        </p:nvSpPr>
+        <p:spPr>
+          <a:xfrm>
+            <a:off x="4581144" y="3364992"/>
+            <a:ext cx="1225296" cy="475488"/>
           </a:xfrm>
           <a:prstGeom prst="rect">
             <a:avLst>
@@ -27316,14 +27297,14 @@
       </p:sp>
       <p:sp>
         <p:nvSpPr>
-          <p:cNvPr id="32" name="Text 30"/>
-          <p:cNvSpPr/>
-          <p:nvPr/>
-        </p:nvSpPr>
-        <p:spPr>
-          <a:xfrm>
-            <a:off x="6428232" y="3364992"/>
-            <a:ext cx="1645920" cy="475488"/>
+          <p:cNvPr id="35" name="Text 33"/>
+          <p:cNvSpPr/>
+          <p:nvPr/>
+        </p:nvSpPr>
+        <p:spPr>
+          <a:xfrm>
+            <a:off x="4581144" y="3364992"/>
+            <a:ext cx="1225296" cy="475488"/>
           </a:xfrm>
           <a:prstGeom prst="rect">
             <a:avLst/>
@@ -27347,7 +27328,7 @@
                 <a:ea typeface="Trebuchet MS" pitchFamily="34" charset="-122"/>
                 <a:cs typeface="Trebuchet MS" pitchFamily="34" charset="-120"/>
               </a:rPr>
-              <a:t>stat</a:t>
+              <a:t>dy</a:t>
             </a:r>
             <a:endParaRPr lang="en-US" sz="1400" dirty="0"/>
           </a:p>
@@ -27355,7 +27336,217 @@
       </p:sp>
       <p:sp>
         <p:nvSpPr>
-          <p:cNvPr id="33" name="Shape 31"/>
+          <p:cNvPr id="36" name="Text 34"/>
+          <p:cNvSpPr/>
+          <p:nvPr/>
+        </p:nvSpPr>
+        <p:spPr>
+          <a:xfrm>
+            <a:off x="5806440" y="3364992"/>
+            <a:ext cx="76200" cy="475488"/>
+          </a:xfrm>
+          <a:prstGeom prst="rect">
+            <a:avLst/>
+          </a:prstGeom>
+          <a:noFill/>
+          <a:ln/>
+        </p:spPr>
+        <p:txBody>
+          <a:bodyPr wrap="square" lIns="0" tIns="0" rIns="0" bIns="0" rtlCol="0" anchor="ctr"/>
+          <a:lstStyle/>
+          <a:p>
+            <a:pPr algn="ctr" indent="0" marL="0">
+              <a:buNone/>
+            </a:pPr>
+            <a:r>
+              <a:rPr lang="en-US" sz="1600" b="1" dirty="0">
+                <a:solidFill>
+                  <a:srgbClr val="0D9488"/>
+                </a:solidFill>
+                <a:latin typeface="Trebuchet MS" pitchFamily="34" charset="0"/>
+                <a:ea typeface="Trebuchet MS" pitchFamily="34" charset="-122"/>
+                <a:cs typeface="Trebuchet MS" pitchFamily="34" charset="-120"/>
+              </a:rPr>
+              <a:t>·</a:t>
+            </a:r>
+            <a:endParaRPr lang="en-US" sz="1600" dirty="0"/>
+          </a:p>
+        </p:txBody>
+      </p:sp>
+      <p:sp>
+        <p:nvSpPr>
+          <p:cNvPr id="37" name="Shape 35"/>
+          <p:cNvSpPr/>
+          <p:nvPr/>
+        </p:nvSpPr>
+        <p:spPr>
+          <a:xfrm>
+            <a:off x="5882640" y="3364992"/>
+            <a:ext cx="1225296" cy="475488"/>
+          </a:xfrm>
+          <a:prstGeom prst="rect">
+            <a:avLst>
+              <a:gd name="adj" fmla="val 9615"/>
+            </a:avLst>
+          </a:prstGeom>
+          <a:solidFill>
+            <a:srgbClr val="FFFFFF"/>
+          </a:solidFill>
+          <a:ln w="12700">
+            <a:solidFill>
+              <a:srgbClr val="0D9488"/>
+            </a:solidFill>
+            <a:prstDash val="solid"/>
+          </a:ln>
+        </p:spPr>
+      </p:sp>
+      <p:sp>
+        <p:nvSpPr>
+          <p:cNvPr id="38" name="Text 36"/>
+          <p:cNvSpPr/>
+          <p:nvPr/>
+        </p:nvSpPr>
+        <p:spPr>
+          <a:xfrm>
+            <a:off x="5882640" y="3364992"/>
+            <a:ext cx="1225296" cy="475488"/>
+          </a:xfrm>
+          <a:prstGeom prst="rect">
+            <a:avLst/>
+          </a:prstGeom>
+          <a:noFill/>
+          <a:ln/>
+        </p:spPr>
+        <p:txBody>
+          <a:bodyPr wrap="square" lIns="0" tIns="0" rIns="0" bIns="0" rtlCol="0" anchor="ctr"/>
+          <a:lstStyle/>
+          <a:p>
+            <a:pPr algn="ctr" indent="0" marL="0">
+              <a:buNone/>
+            </a:pPr>
+            <a:r>
+              <a:rPr lang="en-US" sz="1400" b="1" dirty="0">
+                <a:solidFill>
+                  <a:srgbClr val="0D9488"/>
+                </a:solidFill>
+                <a:latin typeface="Trebuchet MS" pitchFamily="34" charset="0"/>
+                <a:ea typeface="Trebuchet MS" pitchFamily="34" charset="-122"/>
+                <a:cs typeface="Trebuchet MS" pitchFamily="34" charset="-120"/>
+              </a:rPr>
+              <a:t>na</a:t>
+            </a:r>
+            <a:endParaRPr lang="en-US" sz="1400" dirty="0"/>
+          </a:p>
+        </p:txBody>
+      </p:sp>
+      <p:sp>
+        <p:nvSpPr>
+          <p:cNvPr id="39" name="Text 37"/>
+          <p:cNvSpPr/>
+          <p:nvPr/>
+        </p:nvSpPr>
+        <p:spPr>
+          <a:xfrm>
+            <a:off x="7107936" y="3364992"/>
+            <a:ext cx="76200" cy="475488"/>
+          </a:xfrm>
+          <a:prstGeom prst="rect">
+            <a:avLst/>
+          </a:prstGeom>
+          <a:noFill/>
+          <a:ln/>
+        </p:spPr>
+        <p:txBody>
+          <a:bodyPr wrap="square" lIns="0" tIns="0" rIns="0" bIns="0" rtlCol="0" anchor="ctr"/>
+          <a:lstStyle/>
+          <a:p>
+            <a:pPr algn="ctr" indent="0" marL="0">
+              <a:buNone/>
+            </a:pPr>
+            <a:r>
+              <a:rPr lang="en-US" sz="1600" b="1" dirty="0">
+                <a:solidFill>
+                  <a:srgbClr val="0D9488"/>
+                </a:solidFill>
+                <a:latin typeface="Trebuchet MS" pitchFamily="34" charset="0"/>
+                <a:ea typeface="Trebuchet MS" pitchFamily="34" charset="-122"/>
+                <a:cs typeface="Trebuchet MS" pitchFamily="34" charset="-120"/>
+              </a:rPr>
+              <a:t>·</a:t>
+            </a:r>
+            <a:endParaRPr lang="en-US" sz="1600" dirty="0"/>
+          </a:p>
+        </p:txBody>
+      </p:sp>
+      <p:sp>
+        <p:nvSpPr>
+          <p:cNvPr id="40" name="Shape 38"/>
+          <p:cNvSpPr/>
+          <p:nvPr/>
+        </p:nvSpPr>
+        <p:spPr>
+          <a:xfrm>
+            <a:off x="7184136" y="3364992"/>
+            <a:ext cx="1225296" cy="475488"/>
+          </a:xfrm>
+          <a:prstGeom prst="rect">
+            <a:avLst>
+              <a:gd name="adj" fmla="val 9615"/>
+            </a:avLst>
+          </a:prstGeom>
+          <a:solidFill>
+            <a:srgbClr val="FFFFFF"/>
+          </a:solidFill>
+          <a:ln w="12700">
+            <a:solidFill>
+              <a:srgbClr val="0D9488"/>
+            </a:solidFill>
+            <a:prstDash val="solid"/>
+          </a:ln>
+        </p:spPr>
+      </p:sp>
+      <p:sp>
+        <p:nvSpPr>
+          <p:cNvPr id="41" name="Text 39"/>
+          <p:cNvSpPr/>
+          <p:nvPr/>
+        </p:nvSpPr>
+        <p:spPr>
+          <a:xfrm>
+            <a:off x="7184136" y="3364992"/>
+            <a:ext cx="1225296" cy="475488"/>
+          </a:xfrm>
+          <a:prstGeom prst="rect">
+            <a:avLst/>
+          </a:prstGeom>
+          <a:noFill/>
+          <a:ln/>
+        </p:spPr>
+        <p:txBody>
+          <a:bodyPr wrap="square" lIns="0" tIns="0" rIns="0" bIns="0" rtlCol="0" anchor="ctr"/>
+          <a:lstStyle/>
+          <a:p>
+            <a:pPr algn="ctr" indent="0" marL="0">
+              <a:buNone/>
+            </a:pPr>
+            <a:r>
+              <a:rPr lang="en-US" sz="1400" b="1" dirty="0">
+                <a:solidFill>
+                  <a:srgbClr val="0D9488"/>
+                </a:solidFill>
+                <a:latin typeface="Trebuchet MS" pitchFamily="34" charset="0"/>
+                <a:ea typeface="Trebuchet MS" pitchFamily="34" charset="-122"/>
+                <a:cs typeface="Trebuchet MS" pitchFamily="34" charset="-120"/>
+              </a:rPr>
+              <a:t>mics</a:t>
+            </a:r>
+            <a:endParaRPr lang="en-US" sz="1400" dirty="0"/>
+          </a:p>
+        </p:txBody>
+      </p:sp>
+      <p:sp>
+        <p:nvSpPr>
+          <p:cNvPr id="42" name="Shape 40"/>
           <p:cNvSpPr/>
           <p:nvPr/>
         </p:nvSpPr>
@@ -27382,7 +27573,7 @@
       </p:sp>
       <p:sp>
         <p:nvSpPr>
-          <p:cNvPr id="34" name="Text 32"/>
+          <p:cNvPr id="43" name="Text 41"/>
           <p:cNvSpPr/>
           <p:nvPr/>
         </p:nvSpPr>
@@ -27421,7 +27612,7 @@
       </p:sp>
       <p:sp>
         <p:nvSpPr>
-          <p:cNvPr id="35" name="Shape 33"/>
+          <p:cNvPr id="44" name="Shape 42"/>
           <p:cNvSpPr/>
           <p:nvPr/>
         </p:nvSpPr>
@@ -27448,7 +27639,7 @@
       </p:sp>
       <p:sp>
         <p:nvSpPr>
-          <p:cNvPr id="36" name="Text 34"/>
+          <p:cNvPr id="45" name="Text 43"/>
           <p:cNvSpPr/>
           <p:nvPr/>
         </p:nvSpPr>
@@ -27771,7 +27962,7 @@
                 <a:ea typeface="Calibri" pitchFamily="34" charset="-122"/>
                 <a:cs typeface="Calibri" pitchFamily="34" charset="-120"/>
               </a:rPr>
-              <a:t>Word Labs  •  wordlabs.app  •  Root: 'thermo' = heat or temperature</a:t>
+              <a:t>Word Labs  •  wordlabs.app  •  Root: 'thermo' = heat, temperature</a:t>
             </a:r>
             <a:endParaRPr lang="en-US" sz="800" dirty="0"/>
           </a:p>
@@ -27910,7 +28101,7 @@
                 <a:ea typeface="Trebuchet MS" pitchFamily="34" charset="-122"/>
                 <a:cs typeface="Trebuchet MS" pitchFamily="34" charset="-120"/>
               </a:rPr>
-              <a:t>thermostat</a:t>
+              <a:t>thermodynamics</a:t>
             </a:r>
             <a:endParaRPr lang="en-US" sz="2800" dirty="0"/>
           </a:p>
@@ -27990,7 +28181,7 @@
         </p:nvSpPr>
         <p:spPr>
           <a:xfrm>
-            <a:off x="2938272" y="2258568"/>
+            <a:off x="2221992" y="2258568"/>
             <a:ext cx="1828800" cy="292608"/>
           </a:xfrm>
           <a:prstGeom prst="rect">
@@ -28024,7 +28215,7 @@
         </p:nvSpPr>
         <p:spPr>
           <a:xfrm>
-            <a:off x="2938272" y="2258568"/>
+            <a:off x="2221992" y="2258568"/>
             <a:ext cx="1828800" cy="292608"/>
           </a:xfrm>
           <a:prstGeom prst="rect">
@@ -28063,7 +28254,7 @@
         </p:nvSpPr>
         <p:spPr>
           <a:xfrm>
-            <a:off x="2938272" y="2569464"/>
+            <a:off x="2221992" y="2569464"/>
             <a:ext cx="1828800" cy="201168"/>
           </a:xfrm>
           <a:prstGeom prst="rect">
@@ -28102,7 +28293,7 @@
         </p:nvSpPr>
         <p:spPr>
           <a:xfrm>
-            <a:off x="5803392" y="2258568"/>
+            <a:off x="4370832" y="2258568"/>
             <a:ext cx="1828800" cy="292608"/>
           </a:xfrm>
           <a:prstGeom prst="rect">
@@ -28136,7 +28327,7 @@
         </p:nvSpPr>
         <p:spPr>
           <a:xfrm>
-            <a:off x="5803392" y="2258568"/>
+            <a:off x="4370832" y="2258568"/>
             <a:ext cx="1828800" cy="292608"/>
           </a:xfrm>
           <a:prstGeom prst="rect">
@@ -28161,7 +28352,7 @@
                 <a:ea typeface="Trebuchet MS" pitchFamily="34" charset="-122"/>
                 <a:cs typeface="Trebuchet MS" pitchFamily="34" charset="-120"/>
               </a:rPr>
-              <a:t>stat</a:t>
+              <a:t>dynamic</a:t>
             </a:r>
             <a:endParaRPr lang="en-US" sz="1300" dirty="0"/>
           </a:p>
@@ -28175,7 +28366,7 @@
         </p:nvSpPr>
         <p:spPr>
           <a:xfrm>
-            <a:off x="5803392" y="2569464"/>
+            <a:off x="4370832" y="2569464"/>
             <a:ext cx="1828800" cy="201168"/>
           </a:xfrm>
           <a:prstGeom prst="rect">
@@ -28200,7 +28391,7 @@
                 <a:ea typeface="Calibri" pitchFamily="34" charset="-122"/>
                 <a:cs typeface="Calibri" pitchFamily="34" charset="-120"/>
               </a:rPr>
-              <a:t>keeping steady or still</a:t>
+              <a:t>relating to force and motion</a:t>
             </a:r>
             <a:endParaRPr lang="en-US" sz="850" dirty="0"/>
           </a:p>
@@ -28209,6 +28400,118 @@
       <p:sp>
         <p:nvSpPr>
           <p:cNvPr id="22" name="Shape 20"/>
+          <p:cNvSpPr/>
+          <p:nvPr/>
+        </p:nvSpPr>
+        <p:spPr>
+          <a:xfrm>
+            <a:off x="6519672" y="2258568"/>
+            <a:ext cx="1828800" cy="292608"/>
+          </a:xfrm>
+          <a:prstGeom prst="rect">
+            <a:avLst>
+              <a:gd name="adj" fmla="val 25000"/>
+            </a:avLst>
+          </a:prstGeom>
+          <a:solidFill>
+            <a:srgbClr val="FCE7F3"/>
+          </a:solidFill>
+          <a:ln w="19050">
+            <a:solidFill>
+              <a:srgbClr val="DB2777"/>
+            </a:solidFill>
+            <a:prstDash val="solid"/>
+          </a:ln>
+          <a:effectLst>
+            <a:outerShdw sx="100000" sy="100000" kx="0" ky="0" algn="bl" rotWithShape="0" blurRad="101600" dist="38100" dir="8100000">
+              <a:srgbClr val="000000">
+                <a:alpha val="12000"/>
+              </a:srgbClr>
+            </a:outerShdw>
+          </a:effectLst>
+        </p:spPr>
+      </p:sp>
+      <p:sp>
+        <p:nvSpPr>
+          <p:cNvPr id="23" name="Text 21"/>
+          <p:cNvSpPr/>
+          <p:nvPr/>
+        </p:nvSpPr>
+        <p:spPr>
+          <a:xfrm>
+            <a:off x="6519672" y="2258568"/>
+            <a:ext cx="1828800" cy="292608"/>
+          </a:xfrm>
+          <a:prstGeom prst="rect">
+            <a:avLst/>
+          </a:prstGeom>
+          <a:noFill/>
+          <a:ln/>
+        </p:spPr>
+        <p:txBody>
+          <a:bodyPr wrap="square" lIns="0" tIns="0" rIns="0" bIns="0" rtlCol="0" anchor="ctr"/>
+          <a:lstStyle/>
+          <a:p>
+            <a:pPr algn="ctr" indent="0" marL="0">
+              <a:buNone/>
+            </a:pPr>
+            <a:r>
+              <a:rPr lang="en-US" sz="1300" b="1" dirty="0">
+                <a:solidFill>
+                  <a:srgbClr val="9D174D"/>
+                </a:solidFill>
+                <a:latin typeface="Trebuchet MS" pitchFamily="34" charset="0"/>
+                <a:ea typeface="Trebuchet MS" pitchFamily="34" charset="-122"/>
+                <a:cs typeface="Trebuchet MS" pitchFamily="34" charset="-120"/>
+              </a:rPr>
+              <a:t>s</a:t>
+            </a:r>
+            <a:endParaRPr lang="en-US" sz="1300" dirty="0"/>
+          </a:p>
+        </p:txBody>
+      </p:sp>
+      <p:sp>
+        <p:nvSpPr>
+          <p:cNvPr id="24" name="Text 22"/>
+          <p:cNvSpPr/>
+          <p:nvPr/>
+        </p:nvSpPr>
+        <p:spPr>
+          <a:xfrm>
+            <a:off x="6519672" y="2569464"/>
+            <a:ext cx="1828800" cy="201168"/>
+          </a:xfrm>
+          <a:prstGeom prst="rect">
+            <a:avLst/>
+          </a:prstGeom>
+          <a:noFill/>
+          <a:ln/>
+        </p:spPr>
+        <p:txBody>
+          <a:bodyPr wrap="square" lIns="0" tIns="0" rIns="0" bIns="0" rtlCol="0" anchor="t"/>
+          <a:lstStyle/>
+          <a:p>
+            <a:pPr algn="ctr" indent="0" marL="0">
+              <a:buNone/>
+            </a:pPr>
+            <a:r>
+              <a:rPr lang="en-US" sz="850" dirty="0">
+                <a:solidFill>
+                  <a:srgbClr val="475569"/>
+                </a:solidFill>
+                <a:latin typeface="Calibri" pitchFamily="34" charset="0"/>
+                <a:ea typeface="Calibri" pitchFamily="34" charset="-122"/>
+                <a:cs typeface="Calibri" pitchFamily="34" charset="-120"/>
+              </a:rPr>
+              <a:t>forming a field of study</a:t>
+            </a:r>
+            <a:endParaRPr lang="en-US" sz="850" dirty="0"/>
+          </a:p>
+        </p:txBody>
+      </p:sp>
+      <p:sp>
+        <p:nvSpPr>
+          <p:cNvPr id="25" name="Shape 23"/>
           <p:cNvSpPr/>
           <p:nvPr/>
         </p:nvSpPr>
@@ -28235,7 +28538,7 @@
       </p:sp>
       <p:sp>
         <p:nvSpPr>
-          <p:cNvPr id="23" name="Text 21"/>
+          <p:cNvPr id="26" name="Text 24"/>
           <p:cNvSpPr/>
           <p:nvPr/>
         </p:nvSpPr>
@@ -28274,7 +28577,7 @@
       </p:sp>
       <p:sp>
         <p:nvSpPr>
-          <p:cNvPr id="24" name="Shape 22"/>
+          <p:cNvPr id="27" name="Shape 25"/>
           <p:cNvSpPr/>
           <p:nvPr/>
         </p:nvSpPr>
@@ -28301,14 +28604,14 @@
       </p:sp>
       <p:sp>
         <p:nvSpPr>
-          <p:cNvPr id="25" name="Shape 23"/>
-          <p:cNvSpPr/>
-          <p:nvPr/>
-        </p:nvSpPr>
-        <p:spPr>
-          <a:xfrm>
-            <a:off x="2313432" y="3364992"/>
-            <a:ext cx="1645920" cy="475488"/>
+          <p:cNvPr id="28" name="Shape 26"/>
+          <p:cNvSpPr/>
+          <p:nvPr/>
+        </p:nvSpPr>
+        <p:spPr>
+          <a:xfrm>
+            <a:off x="1978152" y="3364992"/>
+            <a:ext cx="1225296" cy="475488"/>
           </a:xfrm>
           <a:prstGeom prst="rect">
             <a:avLst>
@@ -28328,14 +28631,14 @@
       </p:sp>
       <p:sp>
         <p:nvSpPr>
-          <p:cNvPr id="26" name="Text 24"/>
-          <p:cNvSpPr/>
-          <p:nvPr/>
-        </p:nvSpPr>
-        <p:spPr>
-          <a:xfrm>
-            <a:off x="2313432" y="3364992"/>
-            <a:ext cx="1645920" cy="475488"/>
+          <p:cNvPr id="29" name="Text 27"/>
+          <p:cNvSpPr/>
+          <p:nvPr/>
+        </p:nvSpPr>
+        <p:spPr>
+          <a:xfrm>
+            <a:off x="1978152" y="3364992"/>
+            <a:ext cx="1225296" cy="475488"/>
           </a:xfrm>
           <a:prstGeom prst="rect">
             <a:avLst/>
@@ -28367,14 +28670,14 @@
       </p:sp>
       <p:sp>
         <p:nvSpPr>
-          <p:cNvPr id="27" name="Text 25"/>
-          <p:cNvSpPr/>
-          <p:nvPr/>
-        </p:nvSpPr>
-        <p:spPr>
-          <a:xfrm>
-            <a:off x="3959352" y="3364992"/>
-            <a:ext cx="411480" cy="475488"/>
+          <p:cNvPr id="30" name="Text 28"/>
+          <p:cNvSpPr/>
+          <p:nvPr/>
+        </p:nvSpPr>
+        <p:spPr>
+          <a:xfrm>
+            <a:off x="3203448" y="3364992"/>
+            <a:ext cx="76200" cy="475488"/>
           </a:xfrm>
           <a:prstGeom prst="rect">
             <a:avLst/>
@@ -28406,14 +28709,14 @@
       </p:sp>
       <p:sp>
         <p:nvSpPr>
-          <p:cNvPr id="28" name="Shape 26"/>
-          <p:cNvSpPr/>
-          <p:nvPr/>
-        </p:nvSpPr>
-        <p:spPr>
-          <a:xfrm>
-            <a:off x="4370832" y="3364992"/>
-            <a:ext cx="1645920" cy="475488"/>
+          <p:cNvPr id="31" name="Shape 29"/>
+          <p:cNvSpPr/>
+          <p:nvPr/>
+        </p:nvSpPr>
+        <p:spPr>
+          <a:xfrm>
+            <a:off x="3279648" y="3364992"/>
+            <a:ext cx="1225296" cy="475488"/>
           </a:xfrm>
           <a:prstGeom prst="rect">
             <a:avLst>
@@ -28433,14 +28736,14 @@
       </p:sp>
       <p:sp>
         <p:nvSpPr>
-          <p:cNvPr id="29" name="Text 27"/>
-          <p:cNvSpPr/>
-          <p:nvPr/>
-        </p:nvSpPr>
-        <p:spPr>
-          <a:xfrm>
-            <a:off x="4370832" y="3364992"/>
-            <a:ext cx="1645920" cy="475488"/>
+          <p:cNvPr id="32" name="Text 30"/>
+          <p:cNvSpPr/>
+          <p:nvPr/>
+        </p:nvSpPr>
+        <p:spPr>
+          <a:xfrm>
+            <a:off x="3279648" y="3364992"/>
+            <a:ext cx="1225296" cy="475488"/>
           </a:xfrm>
           <a:prstGeom prst="rect">
             <a:avLst/>
@@ -28472,14 +28775,14 @@
       </p:sp>
       <p:sp>
         <p:nvSpPr>
-          <p:cNvPr id="30" name="Text 28"/>
-          <p:cNvSpPr/>
-          <p:nvPr/>
-        </p:nvSpPr>
-        <p:spPr>
-          <a:xfrm>
-            <a:off x="6016752" y="3364992"/>
-            <a:ext cx="411480" cy="475488"/>
+          <p:cNvPr id="33" name="Text 31"/>
+          <p:cNvSpPr/>
+          <p:nvPr/>
+        </p:nvSpPr>
+        <p:spPr>
+          <a:xfrm>
+            <a:off x="4504944" y="3364992"/>
+            <a:ext cx="76200" cy="475488"/>
           </a:xfrm>
           <a:prstGeom prst="rect">
             <a:avLst/>
@@ -28511,14 +28814,14 @@
       </p:sp>
       <p:sp>
         <p:nvSpPr>
-          <p:cNvPr id="31" name="Shape 29"/>
-          <p:cNvSpPr/>
-          <p:nvPr/>
-        </p:nvSpPr>
-        <p:spPr>
-          <a:xfrm>
-            <a:off x="6428232" y="3364992"/>
-            <a:ext cx="1645920" cy="475488"/>
+          <p:cNvPr id="34" name="Shape 32"/>
+          <p:cNvSpPr/>
+          <p:nvPr/>
+        </p:nvSpPr>
+        <p:spPr>
+          <a:xfrm>
+            <a:off x="4581144" y="3364992"/>
+            <a:ext cx="1225296" cy="475488"/>
           </a:xfrm>
           <a:prstGeom prst="rect">
             <a:avLst>
@@ -28538,14 +28841,14 @@
       </p:sp>
       <p:sp>
         <p:nvSpPr>
-          <p:cNvPr id="32" name="Text 30"/>
-          <p:cNvSpPr/>
-          <p:nvPr/>
-        </p:nvSpPr>
-        <p:spPr>
-          <a:xfrm>
-            <a:off x="6428232" y="3364992"/>
-            <a:ext cx="1645920" cy="475488"/>
+          <p:cNvPr id="35" name="Text 33"/>
+          <p:cNvSpPr/>
+          <p:nvPr/>
+        </p:nvSpPr>
+        <p:spPr>
+          <a:xfrm>
+            <a:off x="4581144" y="3364992"/>
+            <a:ext cx="1225296" cy="475488"/>
           </a:xfrm>
           <a:prstGeom prst="rect">
             <a:avLst/>
@@ -28569,7 +28872,7 @@
                 <a:ea typeface="Trebuchet MS" pitchFamily="34" charset="-122"/>
                 <a:cs typeface="Trebuchet MS" pitchFamily="34" charset="-120"/>
               </a:rPr>
-              <a:t>stat</a:t>
+              <a:t>dy</a:t>
             </a:r>
             <a:endParaRPr lang="en-US" sz="1400" dirty="0"/>
           </a:p>
@@ -28577,7 +28880,217 @@
       </p:sp>
       <p:sp>
         <p:nvSpPr>
-          <p:cNvPr id="33" name="Shape 31"/>
+          <p:cNvPr id="36" name="Text 34"/>
+          <p:cNvSpPr/>
+          <p:nvPr/>
+        </p:nvSpPr>
+        <p:spPr>
+          <a:xfrm>
+            <a:off x="5806440" y="3364992"/>
+            <a:ext cx="76200" cy="475488"/>
+          </a:xfrm>
+          <a:prstGeom prst="rect">
+            <a:avLst/>
+          </a:prstGeom>
+          <a:noFill/>
+          <a:ln/>
+        </p:spPr>
+        <p:txBody>
+          <a:bodyPr wrap="square" lIns="0" tIns="0" rIns="0" bIns="0" rtlCol="0" anchor="ctr"/>
+          <a:lstStyle/>
+          <a:p>
+            <a:pPr algn="ctr" indent="0" marL="0">
+              <a:buNone/>
+            </a:pPr>
+            <a:r>
+              <a:rPr lang="en-US" sz="1600" b="1" dirty="0">
+                <a:solidFill>
+                  <a:srgbClr val="0D9488"/>
+                </a:solidFill>
+                <a:latin typeface="Trebuchet MS" pitchFamily="34" charset="0"/>
+                <a:ea typeface="Trebuchet MS" pitchFamily="34" charset="-122"/>
+                <a:cs typeface="Trebuchet MS" pitchFamily="34" charset="-120"/>
+              </a:rPr>
+              <a:t>·</a:t>
+            </a:r>
+            <a:endParaRPr lang="en-US" sz="1600" dirty="0"/>
+          </a:p>
+        </p:txBody>
+      </p:sp>
+      <p:sp>
+        <p:nvSpPr>
+          <p:cNvPr id="37" name="Shape 35"/>
+          <p:cNvSpPr/>
+          <p:nvPr/>
+        </p:nvSpPr>
+        <p:spPr>
+          <a:xfrm>
+            <a:off x="5882640" y="3364992"/>
+            <a:ext cx="1225296" cy="475488"/>
+          </a:xfrm>
+          <a:prstGeom prst="rect">
+            <a:avLst>
+              <a:gd name="adj" fmla="val 9615"/>
+            </a:avLst>
+          </a:prstGeom>
+          <a:solidFill>
+            <a:srgbClr val="FFFFFF"/>
+          </a:solidFill>
+          <a:ln w="12700">
+            <a:solidFill>
+              <a:srgbClr val="0D9488"/>
+            </a:solidFill>
+            <a:prstDash val="solid"/>
+          </a:ln>
+        </p:spPr>
+      </p:sp>
+      <p:sp>
+        <p:nvSpPr>
+          <p:cNvPr id="38" name="Text 36"/>
+          <p:cNvSpPr/>
+          <p:nvPr/>
+        </p:nvSpPr>
+        <p:spPr>
+          <a:xfrm>
+            <a:off x="5882640" y="3364992"/>
+            <a:ext cx="1225296" cy="475488"/>
+          </a:xfrm>
+          <a:prstGeom prst="rect">
+            <a:avLst/>
+          </a:prstGeom>
+          <a:noFill/>
+          <a:ln/>
+        </p:spPr>
+        <p:txBody>
+          <a:bodyPr wrap="square" lIns="0" tIns="0" rIns="0" bIns="0" rtlCol="0" anchor="ctr"/>
+          <a:lstStyle/>
+          <a:p>
+            <a:pPr algn="ctr" indent="0" marL="0">
+              <a:buNone/>
+            </a:pPr>
+            <a:r>
+              <a:rPr lang="en-US" sz="1400" b="1" dirty="0">
+                <a:solidFill>
+                  <a:srgbClr val="0D9488"/>
+                </a:solidFill>
+                <a:latin typeface="Trebuchet MS" pitchFamily="34" charset="0"/>
+                <a:ea typeface="Trebuchet MS" pitchFamily="34" charset="-122"/>
+                <a:cs typeface="Trebuchet MS" pitchFamily="34" charset="-120"/>
+              </a:rPr>
+              <a:t>na</a:t>
+            </a:r>
+            <a:endParaRPr lang="en-US" sz="1400" dirty="0"/>
+          </a:p>
+        </p:txBody>
+      </p:sp>
+      <p:sp>
+        <p:nvSpPr>
+          <p:cNvPr id="39" name="Text 37"/>
+          <p:cNvSpPr/>
+          <p:nvPr/>
+        </p:nvSpPr>
+        <p:spPr>
+          <a:xfrm>
+            <a:off x="7107936" y="3364992"/>
+            <a:ext cx="76200" cy="475488"/>
+          </a:xfrm>
+          <a:prstGeom prst="rect">
+            <a:avLst/>
+          </a:prstGeom>
+          <a:noFill/>
+          <a:ln/>
+        </p:spPr>
+        <p:txBody>
+          <a:bodyPr wrap="square" lIns="0" tIns="0" rIns="0" bIns="0" rtlCol="0" anchor="ctr"/>
+          <a:lstStyle/>
+          <a:p>
+            <a:pPr algn="ctr" indent="0" marL="0">
+              <a:buNone/>
+            </a:pPr>
+            <a:r>
+              <a:rPr lang="en-US" sz="1600" b="1" dirty="0">
+                <a:solidFill>
+                  <a:srgbClr val="0D9488"/>
+                </a:solidFill>
+                <a:latin typeface="Trebuchet MS" pitchFamily="34" charset="0"/>
+                <a:ea typeface="Trebuchet MS" pitchFamily="34" charset="-122"/>
+                <a:cs typeface="Trebuchet MS" pitchFamily="34" charset="-120"/>
+              </a:rPr>
+              <a:t>·</a:t>
+            </a:r>
+            <a:endParaRPr lang="en-US" sz="1600" dirty="0"/>
+          </a:p>
+        </p:txBody>
+      </p:sp>
+      <p:sp>
+        <p:nvSpPr>
+          <p:cNvPr id="40" name="Shape 38"/>
+          <p:cNvSpPr/>
+          <p:nvPr/>
+        </p:nvSpPr>
+        <p:spPr>
+          <a:xfrm>
+            <a:off x="7184136" y="3364992"/>
+            <a:ext cx="1225296" cy="475488"/>
+          </a:xfrm>
+          <a:prstGeom prst="rect">
+            <a:avLst>
+              <a:gd name="adj" fmla="val 9615"/>
+            </a:avLst>
+          </a:prstGeom>
+          <a:solidFill>
+            <a:srgbClr val="FFFFFF"/>
+          </a:solidFill>
+          <a:ln w="12700">
+            <a:solidFill>
+              <a:srgbClr val="0D9488"/>
+            </a:solidFill>
+            <a:prstDash val="solid"/>
+          </a:ln>
+        </p:spPr>
+      </p:sp>
+      <p:sp>
+        <p:nvSpPr>
+          <p:cNvPr id="41" name="Text 39"/>
+          <p:cNvSpPr/>
+          <p:nvPr/>
+        </p:nvSpPr>
+        <p:spPr>
+          <a:xfrm>
+            <a:off x="7184136" y="3364992"/>
+            <a:ext cx="1225296" cy="475488"/>
+          </a:xfrm>
+          <a:prstGeom prst="rect">
+            <a:avLst/>
+          </a:prstGeom>
+          <a:noFill/>
+          <a:ln/>
+        </p:spPr>
+        <p:txBody>
+          <a:bodyPr wrap="square" lIns="0" tIns="0" rIns="0" bIns="0" rtlCol="0" anchor="ctr"/>
+          <a:lstStyle/>
+          <a:p>
+            <a:pPr algn="ctr" indent="0" marL="0">
+              <a:buNone/>
+            </a:pPr>
+            <a:r>
+              <a:rPr lang="en-US" sz="1400" b="1" dirty="0">
+                <a:solidFill>
+                  <a:srgbClr val="0D9488"/>
+                </a:solidFill>
+                <a:latin typeface="Trebuchet MS" pitchFamily="34" charset="0"/>
+                <a:ea typeface="Trebuchet MS" pitchFamily="34" charset="-122"/>
+                <a:cs typeface="Trebuchet MS" pitchFamily="34" charset="-120"/>
+              </a:rPr>
+              <a:t>mics</a:t>
+            </a:r>
+            <a:endParaRPr lang="en-US" sz="1400" dirty="0"/>
+          </a:p>
+        </p:txBody>
+      </p:sp>
+      <p:sp>
+        <p:nvSpPr>
+          <p:cNvPr id="42" name="Shape 40"/>
           <p:cNvSpPr/>
           <p:nvPr/>
         </p:nvSpPr>
@@ -28604,7 +29117,7 @@
       </p:sp>
       <p:sp>
         <p:nvSpPr>
-          <p:cNvPr id="34" name="Text 32"/>
+          <p:cNvPr id="43" name="Text 41"/>
           <p:cNvSpPr/>
           <p:nvPr/>
         </p:nvSpPr>
@@ -28643,18 +29156,18 @@
       </p:sp>
       <p:sp>
         <p:nvSpPr>
-          <p:cNvPr id="35" name="Shape 33"/>
+          <p:cNvPr id="44" name="Shape 42"/>
           <p:cNvSpPr/>
           <p:nvPr/>
         </p:nvSpPr>
         <p:spPr>
           <a:xfrm>
             <a:off x="1874520" y="4096512"/>
-            <a:ext cx="6903720" cy="658368"/>
+            <a:ext cx="6903720" cy="804672"/>
           </a:xfrm>
           <a:prstGeom prst="rect">
             <a:avLst>
-              <a:gd name="adj" fmla="val 8333"/>
+              <a:gd name="adj" fmla="val 6818"/>
             </a:avLst>
           </a:prstGeom>
           <a:solidFill>
@@ -28670,18 +29183,18 @@
       </p:sp>
       <p:sp>
         <p:nvSpPr>
-          <p:cNvPr id="36" name="Shape 34"/>
-          <p:cNvSpPr/>
-          <p:nvPr/>
-        </p:nvSpPr>
-        <p:spPr>
-          <a:xfrm>
-            <a:off x="2023872" y="4169664"/>
-            <a:ext cx="685800" cy="475488"/>
+          <p:cNvPr id="45" name="Shape 43"/>
+          <p:cNvSpPr/>
+          <p:nvPr/>
+        </p:nvSpPr>
+        <p:spPr>
+          <a:xfrm>
+            <a:off x="1952596" y="4169664"/>
+            <a:ext cx="493776" cy="384048"/>
           </a:xfrm>
           <a:prstGeom prst="rect">
             <a:avLst>
-              <a:gd name="adj" fmla="val 7692"/>
+              <a:gd name="adj" fmla="val 9524"/>
             </a:avLst>
           </a:prstGeom>
           <a:solidFill>
@@ -28697,14 +29210,14 @@
       </p:sp>
       <p:sp>
         <p:nvSpPr>
-          <p:cNvPr id="37" name="Text 35"/>
-          <p:cNvSpPr/>
-          <p:nvPr/>
-        </p:nvSpPr>
-        <p:spPr>
-          <a:xfrm>
-            <a:off x="2023872" y="4169664"/>
-            <a:ext cx="685800" cy="475488"/>
+          <p:cNvPr id="46" name="Text 44"/>
+          <p:cNvSpPr/>
+          <p:nvPr/>
+        </p:nvSpPr>
+        <p:spPr>
+          <a:xfrm>
+            <a:off x="1952596" y="4169664"/>
+            <a:ext cx="493776" cy="384048"/>
           </a:xfrm>
           <a:prstGeom prst="rect">
             <a:avLst/>
@@ -28736,18 +29249,18 @@
       </p:sp>
       <p:sp>
         <p:nvSpPr>
-          <p:cNvPr id="38" name="Shape 36"/>
-          <p:cNvSpPr/>
-          <p:nvPr/>
-        </p:nvSpPr>
-        <p:spPr>
-          <a:xfrm>
-            <a:off x="2831592" y="4169664"/>
-            <a:ext cx="685800" cy="475488"/>
+          <p:cNvPr id="47" name="Shape 45"/>
+          <p:cNvSpPr/>
+          <p:nvPr/>
+        </p:nvSpPr>
+        <p:spPr>
+          <a:xfrm>
+            <a:off x="2497015" y="4169664"/>
+            <a:ext cx="493776" cy="384048"/>
           </a:xfrm>
           <a:prstGeom prst="rect">
             <a:avLst>
-              <a:gd name="adj" fmla="val 7692"/>
+              <a:gd name="adj" fmla="val 9524"/>
             </a:avLst>
           </a:prstGeom>
           <a:solidFill>
@@ -28763,14 +29276,14 @@
       </p:sp>
       <p:sp>
         <p:nvSpPr>
-          <p:cNvPr id="39" name="Text 37"/>
-          <p:cNvSpPr/>
-          <p:nvPr/>
-        </p:nvSpPr>
-        <p:spPr>
-          <a:xfrm>
-            <a:off x="2831592" y="4169664"/>
-            <a:ext cx="685800" cy="475488"/>
+          <p:cNvPr id="48" name="Text 46"/>
+          <p:cNvSpPr/>
+          <p:nvPr/>
+        </p:nvSpPr>
+        <p:spPr>
+          <a:xfrm>
+            <a:off x="2497015" y="4169664"/>
+            <a:ext cx="493776" cy="384048"/>
           </a:xfrm>
           <a:prstGeom prst="rect">
             <a:avLst/>
@@ -28802,18 +29315,18 @@
       </p:sp>
       <p:sp>
         <p:nvSpPr>
-          <p:cNvPr id="40" name="Shape 38"/>
-          <p:cNvSpPr/>
-          <p:nvPr/>
-        </p:nvSpPr>
-        <p:spPr>
-          <a:xfrm>
-            <a:off x="3639312" y="4169664"/>
-            <a:ext cx="685800" cy="475488"/>
+          <p:cNvPr id="49" name="Shape 47"/>
+          <p:cNvSpPr/>
+          <p:nvPr/>
+        </p:nvSpPr>
+        <p:spPr>
+          <a:xfrm>
+            <a:off x="3041435" y="4169664"/>
+            <a:ext cx="493776" cy="384048"/>
           </a:xfrm>
           <a:prstGeom prst="rect">
             <a:avLst>
-              <a:gd name="adj" fmla="val 7692"/>
+              <a:gd name="adj" fmla="val 9524"/>
             </a:avLst>
           </a:prstGeom>
           <a:solidFill>
@@ -28829,14 +29342,14 @@
       </p:sp>
       <p:sp>
         <p:nvSpPr>
-          <p:cNvPr id="41" name="Text 39"/>
-          <p:cNvSpPr/>
-          <p:nvPr/>
-        </p:nvSpPr>
-        <p:spPr>
-          <a:xfrm>
-            <a:off x="3639312" y="4169664"/>
-            <a:ext cx="685800" cy="475488"/>
+          <p:cNvPr id="50" name="Text 48"/>
+          <p:cNvSpPr/>
+          <p:nvPr/>
+        </p:nvSpPr>
+        <p:spPr>
+          <a:xfrm>
+            <a:off x="3041435" y="4169664"/>
+            <a:ext cx="493776" cy="384048"/>
           </a:xfrm>
           <a:prstGeom prst="rect">
             <a:avLst/>
@@ -28868,18 +29381,18 @@
       </p:sp>
       <p:sp>
         <p:nvSpPr>
-          <p:cNvPr id="42" name="Shape 40"/>
-          <p:cNvSpPr/>
-          <p:nvPr/>
-        </p:nvSpPr>
-        <p:spPr>
-          <a:xfrm>
-            <a:off x="4447032" y="4169664"/>
-            <a:ext cx="685800" cy="475488"/>
+          <p:cNvPr id="51" name="Shape 49"/>
+          <p:cNvSpPr/>
+          <p:nvPr/>
+        </p:nvSpPr>
+        <p:spPr>
+          <a:xfrm>
+            <a:off x="3585855" y="4169664"/>
+            <a:ext cx="493776" cy="384048"/>
           </a:xfrm>
           <a:prstGeom prst="rect">
             <a:avLst>
-              <a:gd name="adj" fmla="val 7692"/>
+              <a:gd name="adj" fmla="val 9524"/>
             </a:avLst>
           </a:prstGeom>
           <a:solidFill>
@@ -28895,14 +29408,14 @@
       </p:sp>
       <p:sp>
         <p:nvSpPr>
-          <p:cNvPr id="43" name="Text 41"/>
-          <p:cNvSpPr/>
-          <p:nvPr/>
-        </p:nvSpPr>
-        <p:spPr>
-          <a:xfrm>
-            <a:off x="4447032" y="4169664"/>
-            <a:ext cx="685800" cy="475488"/>
+          <p:cNvPr id="52" name="Text 50"/>
+          <p:cNvSpPr/>
+          <p:nvPr/>
+        </p:nvSpPr>
+        <p:spPr>
+          <a:xfrm>
+            <a:off x="3585855" y="4169664"/>
+            <a:ext cx="493776" cy="384048"/>
           </a:xfrm>
           <a:prstGeom prst="rect">
             <a:avLst/>
@@ -28934,18 +29447,18 @@
       </p:sp>
       <p:sp>
         <p:nvSpPr>
-          <p:cNvPr id="44" name="Shape 42"/>
-          <p:cNvSpPr/>
-          <p:nvPr/>
-        </p:nvSpPr>
-        <p:spPr>
-          <a:xfrm>
-            <a:off x="5254752" y="4169664"/>
-            <a:ext cx="685800" cy="475488"/>
+          <p:cNvPr id="53" name="Shape 51"/>
+          <p:cNvSpPr/>
+          <p:nvPr/>
+        </p:nvSpPr>
+        <p:spPr>
+          <a:xfrm>
+            <a:off x="4130274" y="4169664"/>
+            <a:ext cx="493776" cy="384048"/>
           </a:xfrm>
           <a:prstGeom prst="rect">
             <a:avLst>
-              <a:gd name="adj" fmla="val 7692"/>
+              <a:gd name="adj" fmla="val 9524"/>
             </a:avLst>
           </a:prstGeom>
           <a:solidFill>
@@ -28961,14 +29474,14 @@
       </p:sp>
       <p:sp>
         <p:nvSpPr>
-          <p:cNvPr id="45" name="Text 43"/>
-          <p:cNvSpPr/>
-          <p:nvPr/>
-        </p:nvSpPr>
-        <p:spPr>
-          <a:xfrm>
-            <a:off x="5254752" y="4169664"/>
-            <a:ext cx="685800" cy="475488"/>
+          <p:cNvPr id="54" name="Text 52"/>
+          <p:cNvSpPr/>
+          <p:nvPr/>
+        </p:nvSpPr>
+        <p:spPr>
+          <a:xfrm>
+            <a:off x="4130274" y="4169664"/>
+            <a:ext cx="493776" cy="384048"/>
           </a:xfrm>
           <a:prstGeom prst="rect">
             <a:avLst/>
@@ -28992,7 +29505,7 @@
                 <a:ea typeface="Trebuchet MS" pitchFamily="34" charset="-122"/>
                 <a:cs typeface="Trebuchet MS" pitchFamily="34" charset="-120"/>
               </a:rPr>
-              <a:t>s</a:t>
+              <a:t>d</a:t>
             </a:r>
             <a:endParaRPr lang="en-US" sz="900" dirty="0"/>
           </a:p>
@@ -29000,18 +29513,18 @@
       </p:sp>
       <p:sp>
         <p:nvSpPr>
-          <p:cNvPr id="46" name="Shape 44"/>
-          <p:cNvSpPr/>
-          <p:nvPr/>
-        </p:nvSpPr>
-        <p:spPr>
-          <a:xfrm>
-            <a:off x="6062472" y="4169664"/>
-            <a:ext cx="685800" cy="475488"/>
+          <p:cNvPr id="55" name="Shape 53"/>
+          <p:cNvSpPr/>
+          <p:nvPr/>
+        </p:nvSpPr>
+        <p:spPr>
+          <a:xfrm>
+            <a:off x="4674694" y="4169664"/>
+            <a:ext cx="493776" cy="384048"/>
           </a:xfrm>
           <a:prstGeom prst="rect">
             <a:avLst>
-              <a:gd name="adj" fmla="val 7692"/>
+              <a:gd name="adj" fmla="val 9524"/>
             </a:avLst>
           </a:prstGeom>
           <a:solidFill>
@@ -29027,14 +29540,14 @@
       </p:sp>
       <p:sp>
         <p:nvSpPr>
-          <p:cNvPr id="47" name="Text 45"/>
-          <p:cNvSpPr/>
-          <p:nvPr/>
-        </p:nvSpPr>
-        <p:spPr>
-          <a:xfrm>
-            <a:off x="6062472" y="4169664"/>
-            <a:ext cx="685800" cy="475488"/>
+          <p:cNvPr id="56" name="Text 54"/>
+          <p:cNvSpPr/>
+          <p:nvPr/>
+        </p:nvSpPr>
+        <p:spPr>
+          <a:xfrm>
+            <a:off x="4674694" y="4169664"/>
+            <a:ext cx="493776" cy="384048"/>
           </a:xfrm>
           <a:prstGeom prst="rect">
             <a:avLst/>
@@ -29058,7 +29571,7 @@
                 <a:ea typeface="Trebuchet MS" pitchFamily="34" charset="-122"/>
                 <a:cs typeface="Trebuchet MS" pitchFamily="34" charset="-120"/>
               </a:rPr>
-              <a:t>t</a:t>
+              <a:t>y</a:t>
             </a:r>
             <a:endParaRPr lang="en-US" sz="900" dirty="0"/>
           </a:p>
@@ -29066,18 +29579,18 @@
       </p:sp>
       <p:sp>
         <p:nvSpPr>
-          <p:cNvPr id="48" name="Shape 46"/>
-          <p:cNvSpPr/>
-          <p:nvPr/>
-        </p:nvSpPr>
-        <p:spPr>
-          <a:xfrm>
-            <a:off x="6870192" y="4169664"/>
-            <a:ext cx="685800" cy="475488"/>
+          <p:cNvPr id="57" name="Shape 55"/>
+          <p:cNvSpPr/>
+          <p:nvPr/>
+        </p:nvSpPr>
+        <p:spPr>
+          <a:xfrm>
+            <a:off x="5219114" y="4169664"/>
+            <a:ext cx="493776" cy="384048"/>
           </a:xfrm>
           <a:prstGeom prst="rect">
             <a:avLst>
-              <a:gd name="adj" fmla="val 7692"/>
+              <a:gd name="adj" fmla="val 9524"/>
             </a:avLst>
           </a:prstGeom>
           <a:solidFill>
@@ -29093,14 +29606,14 @@
       </p:sp>
       <p:sp>
         <p:nvSpPr>
-          <p:cNvPr id="49" name="Text 47"/>
-          <p:cNvSpPr/>
-          <p:nvPr/>
-        </p:nvSpPr>
-        <p:spPr>
-          <a:xfrm>
-            <a:off x="6870192" y="4169664"/>
-            <a:ext cx="685800" cy="475488"/>
+          <p:cNvPr id="58" name="Text 56"/>
+          <p:cNvSpPr/>
+          <p:nvPr/>
+        </p:nvSpPr>
+        <p:spPr>
+          <a:xfrm>
+            <a:off x="5219114" y="4169664"/>
+            <a:ext cx="493776" cy="384048"/>
           </a:xfrm>
           <a:prstGeom prst="rect">
             <a:avLst/>
@@ -29124,7 +29637,7 @@
                 <a:ea typeface="Trebuchet MS" pitchFamily="34" charset="-122"/>
                 <a:cs typeface="Trebuchet MS" pitchFamily="34" charset="-120"/>
               </a:rPr>
-              <a:t>a</a:t>
+              <a:t>n</a:t>
             </a:r>
             <a:endParaRPr lang="en-US" sz="900" dirty="0"/>
           </a:p>
@@ -29132,18 +29645,18 @@
       </p:sp>
       <p:sp>
         <p:nvSpPr>
-          <p:cNvPr id="50" name="Shape 48"/>
-          <p:cNvSpPr/>
-          <p:nvPr/>
-        </p:nvSpPr>
-        <p:spPr>
-          <a:xfrm>
-            <a:off x="7677912" y="4169664"/>
-            <a:ext cx="685800" cy="475488"/>
+          <p:cNvPr id="59" name="Shape 57"/>
+          <p:cNvSpPr/>
+          <p:nvPr/>
+        </p:nvSpPr>
+        <p:spPr>
+          <a:xfrm>
+            <a:off x="5763534" y="4169664"/>
+            <a:ext cx="493776" cy="384048"/>
           </a:xfrm>
           <a:prstGeom prst="rect">
             <a:avLst>
-              <a:gd name="adj" fmla="val 7692"/>
+              <a:gd name="adj" fmla="val 9524"/>
             </a:avLst>
           </a:prstGeom>
           <a:solidFill>
@@ -29159,14 +29672,14 @@
       </p:sp>
       <p:sp>
         <p:nvSpPr>
-          <p:cNvPr id="51" name="Text 49"/>
-          <p:cNvSpPr/>
-          <p:nvPr/>
-        </p:nvSpPr>
-        <p:spPr>
-          <a:xfrm>
-            <a:off x="7677912" y="4169664"/>
-            <a:ext cx="685800" cy="475488"/>
+          <p:cNvPr id="60" name="Text 58"/>
+          <p:cNvSpPr/>
+          <p:nvPr/>
+        </p:nvSpPr>
+        <p:spPr>
+          <a:xfrm>
+            <a:off x="5763534" y="4169664"/>
+            <a:ext cx="493776" cy="384048"/>
           </a:xfrm>
           <a:prstGeom prst="rect">
             <a:avLst/>
@@ -29190,7 +29703,310 @@
                 <a:ea typeface="Trebuchet MS" pitchFamily="34" charset="-122"/>
                 <a:cs typeface="Trebuchet MS" pitchFamily="34" charset="-120"/>
               </a:rPr>
-              <a:t>t</a:t>
+              <a:t>a</a:t>
+            </a:r>
+            <a:endParaRPr lang="en-US" sz="900" dirty="0"/>
+          </a:p>
+        </p:txBody>
+      </p:sp>
+      <p:sp>
+        <p:nvSpPr>
+          <p:cNvPr id="61" name="Shape 59"/>
+          <p:cNvSpPr/>
+          <p:nvPr/>
+        </p:nvSpPr>
+        <p:spPr>
+          <a:xfrm>
+            <a:off x="6307953" y="4169664"/>
+            <a:ext cx="493776" cy="384048"/>
+          </a:xfrm>
+          <a:prstGeom prst="rect">
+            <a:avLst>
+              <a:gd name="adj" fmla="val 9524"/>
+            </a:avLst>
+          </a:prstGeom>
+          <a:solidFill>
+            <a:srgbClr val="FFFFFF"/>
+          </a:solidFill>
+          <a:ln w="12700">
+            <a:solidFill>
+              <a:srgbClr val="DB2777"/>
+            </a:solidFill>
+            <a:prstDash val="solid"/>
+          </a:ln>
+        </p:spPr>
+      </p:sp>
+      <p:sp>
+        <p:nvSpPr>
+          <p:cNvPr id="62" name="Text 60"/>
+          <p:cNvSpPr/>
+          <p:nvPr/>
+        </p:nvSpPr>
+        <p:spPr>
+          <a:xfrm>
+            <a:off x="6307953" y="4169664"/>
+            <a:ext cx="493776" cy="384048"/>
+          </a:xfrm>
+          <a:prstGeom prst="rect">
+            <a:avLst/>
+          </a:prstGeom>
+          <a:noFill/>
+          <a:ln/>
+        </p:spPr>
+        <p:txBody>
+          <a:bodyPr wrap="square" lIns="0" tIns="0" rIns="0" bIns="0" rtlCol="0" anchor="ctr"/>
+          <a:lstStyle/>
+          <a:p>
+            <a:pPr algn="ctr" indent="0" marL="0">
+              <a:buNone/>
+            </a:pPr>
+            <a:r>
+              <a:rPr lang="en-US" sz="900" b="1" dirty="0">
+                <a:solidFill>
+                  <a:srgbClr val="9D174D"/>
+                </a:solidFill>
+                <a:latin typeface="Trebuchet MS" pitchFamily="34" charset="0"/>
+                <a:ea typeface="Trebuchet MS" pitchFamily="34" charset="-122"/>
+                <a:cs typeface="Trebuchet MS" pitchFamily="34" charset="-120"/>
+              </a:rPr>
+              <a:t>m</a:t>
+            </a:r>
+            <a:endParaRPr lang="en-US" sz="900" dirty="0"/>
+          </a:p>
+        </p:txBody>
+      </p:sp>
+      <p:sp>
+        <p:nvSpPr>
+          <p:cNvPr id="63" name="Shape 61"/>
+          <p:cNvSpPr/>
+          <p:nvPr/>
+        </p:nvSpPr>
+        <p:spPr>
+          <a:xfrm>
+            <a:off x="6852373" y="4169664"/>
+            <a:ext cx="493776" cy="384048"/>
+          </a:xfrm>
+          <a:prstGeom prst="rect">
+            <a:avLst>
+              <a:gd name="adj" fmla="val 9524"/>
+            </a:avLst>
+          </a:prstGeom>
+          <a:solidFill>
+            <a:srgbClr val="FFFFFF"/>
+          </a:solidFill>
+          <a:ln w="12700">
+            <a:solidFill>
+              <a:srgbClr val="DB2777"/>
+            </a:solidFill>
+            <a:prstDash val="solid"/>
+          </a:ln>
+        </p:spPr>
+      </p:sp>
+      <p:sp>
+        <p:nvSpPr>
+          <p:cNvPr id="64" name="Text 62"/>
+          <p:cNvSpPr/>
+          <p:nvPr/>
+        </p:nvSpPr>
+        <p:spPr>
+          <a:xfrm>
+            <a:off x="6852373" y="4169664"/>
+            <a:ext cx="493776" cy="384048"/>
+          </a:xfrm>
+          <a:prstGeom prst="rect">
+            <a:avLst/>
+          </a:prstGeom>
+          <a:noFill/>
+          <a:ln/>
+        </p:spPr>
+        <p:txBody>
+          <a:bodyPr wrap="square" lIns="0" tIns="0" rIns="0" bIns="0" rtlCol="0" anchor="ctr"/>
+          <a:lstStyle/>
+          <a:p>
+            <a:pPr algn="ctr" indent="0" marL="0">
+              <a:buNone/>
+            </a:pPr>
+            <a:r>
+              <a:rPr lang="en-US" sz="900" b="1" dirty="0">
+                <a:solidFill>
+                  <a:srgbClr val="9D174D"/>
+                </a:solidFill>
+                <a:latin typeface="Trebuchet MS" pitchFamily="34" charset="0"/>
+                <a:ea typeface="Trebuchet MS" pitchFamily="34" charset="-122"/>
+                <a:cs typeface="Trebuchet MS" pitchFamily="34" charset="-120"/>
+              </a:rPr>
+              <a:t>i</a:t>
+            </a:r>
+            <a:endParaRPr lang="en-US" sz="900" dirty="0"/>
+          </a:p>
+        </p:txBody>
+      </p:sp>
+      <p:sp>
+        <p:nvSpPr>
+          <p:cNvPr id="65" name="Shape 63"/>
+          <p:cNvSpPr/>
+          <p:nvPr/>
+        </p:nvSpPr>
+        <p:spPr>
+          <a:xfrm>
+            <a:off x="7396793" y="4169664"/>
+            <a:ext cx="493776" cy="384048"/>
+          </a:xfrm>
+          <a:prstGeom prst="rect">
+            <a:avLst>
+              <a:gd name="adj" fmla="val 9524"/>
+            </a:avLst>
+          </a:prstGeom>
+          <a:solidFill>
+            <a:srgbClr val="FFFFFF"/>
+          </a:solidFill>
+          <a:ln w="12700">
+            <a:solidFill>
+              <a:srgbClr val="DB2777"/>
+            </a:solidFill>
+            <a:prstDash val="solid"/>
+          </a:ln>
+        </p:spPr>
+      </p:sp>
+      <p:sp>
+        <p:nvSpPr>
+          <p:cNvPr id="66" name="Text 64"/>
+          <p:cNvSpPr/>
+          <p:nvPr/>
+        </p:nvSpPr>
+        <p:spPr>
+          <a:xfrm>
+            <a:off x="7396793" y="4169664"/>
+            <a:ext cx="493776" cy="384048"/>
+          </a:xfrm>
+          <a:prstGeom prst="rect">
+            <a:avLst/>
+          </a:prstGeom>
+          <a:noFill/>
+          <a:ln/>
+        </p:spPr>
+        <p:txBody>
+          <a:bodyPr wrap="square" lIns="0" tIns="0" rIns="0" bIns="0" rtlCol="0" anchor="ctr"/>
+          <a:lstStyle/>
+          <a:p>
+            <a:pPr algn="ctr" indent="0" marL="0">
+              <a:buNone/>
+            </a:pPr>
+            <a:r>
+              <a:rPr lang="en-US" sz="900" b="1" dirty="0">
+                <a:solidFill>
+                  <a:srgbClr val="9D174D"/>
+                </a:solidFill>
+                <a:latin typeface="Trebuchet MS" pitchFamily="34" charset="0"/>
+                <a:ea typeface="Trebuchet MS" pitchFamily="34" charset="-122"/>
+                <a:cs typeface="Trebuchet MS" pitchFamily="34" charset="-120"/>
+              </a:rPr>
+              <a:t>c</a:t>
+            </a:r>
+            <a:endParaRPr lang="en-US" sz="900" dirty="0"/>
+          </a:p>
+        </p:txBody>
+      </p:sp>
+      <p:sp>
+        <p:nvSpPr>
+          <p:cNvPr id="67" name="Text 65"/>
+          <p:cNvSpPr/>
+          <p:nvPr/>
+        </p:nvSpPr>
+        <p:spPr>
+          <a:xfrm>
+            <a:off x="7396793" y="4572000"/>
+            <a:ext cx="493776" cy="219456"/>
+          </a:xfrm>
+          <a:prstGeom prst="rect">
+            <a:avLst/>
+          </a:prstGeom>
+          <a:noFill/>
+          <a:ln/>
+        </p:spPr>
+        <p:txBody>
+          <a:bodyPr wrap="square" lIns="0" tIns="0" rIns="0" bIns="0" rtlCol="0" anchor="t"/>
+          <a:lstStyle/>
+          <a:p>
+            <a:pPr algn="ctr" indent="0" marL="0">
+              <a:buNone/>
+            </a:pPr>
+            <a:r>
+              <a:rPr lang="en-US" sz="750" i="1" dirty="0">
+                <a:solidFill>
+                  <a:srgbClr val="94A3B8"/>
+                </a:solidFill>
+                <a:latin typeface="Calibri" pitchFamily="34" charset="0"/>
+                <a:ea typeface="Calibri" pitchFamily="34" charset="-122"/>
+                <a:cs typeface="Calibri" pitchFamily="34" charset="-120"/>
+              </a:rPr>
+              <a:t>/k/</a:t>
+            </a:r>
+            <a:endParaRPr lang="en-US" sz="750" dirty="0"/>
+          </a:p>
+        </p:txBody>
+      </p:sp>
+      <p:sp>
+        <p:nvSpPr>
+          <p:cNvPr id="68" name="Shape 66"/>
+          <p:cNvSpPr/>
+          <p:nvPr/>
+        </p:nvSpPr>
+        <p:spPr>
+          <a:xfrm>
+            <a:off x="7941212" y="4169664"/>
+            <a:ext cx="493776" cy="384048"/>
+          </a:xfrm>
+          <a:prstGeom prst="rect">
+            <a:avLst>
+              <a:gd name="adj" fmla="val 9524"/>
+            </a:avLst>
+          </a:prstGeom>
+          <a:solidFill>
+            <a:srgbClr val="FFFFFF"/>
+          </a:solidFill>
+          <a:ln w="12700">
+            <a:solidFill>
+              <a:srgbClr val="DB2777"/>
+            </a:solidFill>
+            <a:prstDash val="solid"/>
+          </a:ln>
+        </p:spPr>
+      </p:sp>
+      <p:sp>
+        <p:nvSpPr>
+          <p:cNvPr id="69" name="Text 67"/>
+          <p:cNvSpPr/>
+          <p:nvPr/>
+        </p:nvSpPr>
+        <p:spPr>
+          <a:xfrm>
+            <a:off x="7941212" y="4169664"/>
+            <a:ext cx="493776" cy="384048"/>
+          </a:xfrm>
+          <a:prstGeom prst="rect">
+            <a:avLst/>
+          </a:prstGeom>
+          <a:noFill/>
+          <a:ln/>
+        </p:spPr>
+        <p:txBody>
+          <a:bodyPr wrap="square" lIns="0" tIns="0" rIns="0" bIns="0" rtlCol="0" anchor="ctr"/>
+          <a:lstStyle/>
+          <a:p>
+            <a:pPr algn="ctr" indent="0" marL="0">
+              <a:buNone/>
+            </a:pPr>
+            <a:r>
+              <a:rPr lang="en-US" sz="900" b="1" dirty="0">
+                <a:solidFill>
+                  <a:srgbClr val="9D174D"/>
+                </a:solidFill>
+                <a:latin typeface="Trebuchet MS" pitchFamily="34" charset="0"/>
+                <a:ea typeface="Trebuchet MS" pitchFamily="34" charset="-122"/>
+                <a:cs typeface="Trebuchet MS" pitchFamily="34" charset="-120"/>
+              </a:rPr>
+              <a:t>s</a:t>
             </a:r>
             <a:endParaRPr lang="en-US" sz="900" dirty="0"/>
           </a:p>
@@ -29482,7 +30298,7 @@
                 <a:ea typeface="Calibri" pitchFamily="34" charset="-122"/>
                 <a:cs typeface="Calibri" pitchFamily="34" charset="-120"/>
               </a:rPr>
-              <a:t>Word Labs  •  wordlabs.app  •  Root: 'thermo' = heat or temperature</a:t>
+              <a:t>Word Labs  •  wordlabs.app  •  Root: 'thermo' = heat, temperature</a:t>
             </a:r>
             <a:endParaRPr lang="en-US" sz="800" dirty="0"/>
           </a:p>
@@ -29621,7 +30437,7 @@
                 <a:ea typeface="Trebuchet MS" pitchFamily="34" charset="-122"/>
                 <a:cs typeface="Trebuchet MS" pitchFamily="34" charset="-120"/>
               </a:rPr>
-              <a:t>geothermal</a:t>
+              <a:t>hypothermia</a:t>
             </a:r>
             <a:endParaRPr lang="en-US" sz="2800" dirty="0"/>
           </a:p>
@@ -30309,7 +31125,7 @@
                 <a:ea typeface="Calibri" pitchFamily="34" charset="-122"/>
                 <a:cs typeface="Calibri" pitchFamily="34" charset="-120"/>
               </a:rPr>
-              <a:t>Word Labs  •  wordlabs.app  •  Root: 'thermo' = heat or temperature</a:t>
+              <a:t>Word Labs  •  wordlabs.app  •  Root: 'thermo' = heat, temperature</a:t>
             </a:r>
             <a:endParaRPr lang="en-US" sz="800" dirty="0"/>
           </a:p>
@@ -30448,7 +31264,7 @@
                 <a:ea typeface="Trebuchet MS" pitchFamily="34" charset="-122"/>
                 <a:cs typeface="Trebuchet MS" pitchFamily="34" charset="-120"/>
               </a:rPr>
-              <a:t>geothermal</a:t>
+              <a:t>hypothermia</a:t>
             </a:r>
             <a:endParaRPr lang="en-US" sz="2800" dirty="0"/>
           </a:p>
@@ -30587,7 +31403,7 @@
                 <a:ea typeface="Trebuchet MS" pitchFamily="34" charset="-122"/>
                 <a:cs typeface="Trebuchet MS" pitchFamily="34" charset="-120"/>
               </a:rPr>
-              <a:t>geo</a:t>
+              <a:t>hypo</a:t>
             </a:r>
             <a:endParaRPr lang="en-US" sz="1300" dirty="0"/>
           </a:p>
@@ -30626,7 +31442,7 @@
                 <a:ea typeface="Calibri" pitchFamily="34" charset="-122"/>
                 <a:cs typeface="Calibri" pitchFamily="34" charset="-120"/>
               </a:rPr>
-              <a:t>earth</a:t>
+              <a:t>under, below normal</a:t>
             </a:r>
             <a:endParaRPr lang="en-US" sz="850" dirty="0"/>
           </a:p>
@@ -30649,11 +31465,11 @@
             </a:avLst>
           </a:prstGeom>
           <a:solidFill>
-            <a:srgbClr val="CCFBF1"/>
+            <a:srgbClr val="FCE7F3"/>
           </a:solidFill>
           <a:ln w="19050">
             <a:solidFill>
-              <a:srgbClr val="0D9488"/>
+              <a:srgbClr val="DB2777"/>
             </a:solidFill>
             <a:prstDash val="solid"/>
           </a:ln>
@@ -30693,13 +31509,13 @@
             <a:r>
               <a:rPr lang="en-US" sz="1300" b="1" dirty="0">
                 <a:solidFill>
-                  <a:srgbClr val="0F766E"/>
+                  <a:srgbClr val="9D174D"/>
                 </a:solidFill>
                 <a:latin typeface="Trebuchet MS" pitchFamily="34" charset="0"/>
                 <a:ea typeface="Trebuchet MS" pitchFamily="34" charset="-122"/>
                 <a:cs typeface="Trebuchet MS" pitchFamily="34" charset="-120"/>
               </a:rPr>
-              <a:t>thermo</a:t>
+              <a:t>therm</a:t>
             </a:r>
             <a:endParaRPr lang="en-US" sz="1300" dirty="0"/>
           </a:p>
@@ -30811,7 +31627,7 @@
                 <a:ea typeface="Trebuchet MS" pitchFamily="34" charset="-122"/>
                 <a:cs typeface="Trebuchet MS" pitchFamily="34" charset="-120"/>
               </a:rPr>
-              <a:t>al</a:t>
+              <a:t>ia</a:t>
             </a:r>
             <a:endParaRPr lang="en-US" sz="1300" dirty="0"/>
           </a:p>
@@ -30850,7 +31666,7 @@
                 <a:ea typeface="Calibri" pitchFamily="34" charset="-122"/>
                 <a:cs typeface="Calibri" pitchFamily="34" charset="-120"/>
               </a:rPr>
-              <a:t>relating to</a:t>
+              <a:t>condition or state</a:t>
             </a:r>
             <a:endParaRPr lang="en-US" sz="850" dirty="0"/>
           </a:p>
@@ -31406,7 +32222,7 @@
                 <a:ea typeface="Calibri" pitchFamily="34" charset="-122"/>
                 <a:cs typeface="Calibri" pitchFamily="34" charset="-120"/>
               </a:rPr>
-              <a:t>Word Labs  •  wordlabs.app  •  Root: 'thermo' = heat or temperature</a:t>
+              <a:t>Word Labs  •  wordlabs.app  •  Root: 'thermo' = heat, temperature</a:t>
             </a:r>
             <a:endParaRPr lang="en-US" sz="800" dirty="0"/>
           </a:p>
@@ -31545,7 +32361,7 @@
                 <a:ea typeface="Trebuchet MS" pitchFamily="34" charset="-122"/>
                 <a:cs typeface="Trebuchet MS" pitchFamily="34" charset="-120"/>
               </a:rPr>
-              <a:t>geothermal</a:t>
+              <a:t>hypothermia</a:t>
             </a:r>
             <a:endParaRPr lang="en-US" sz="2800" dirty="0"/>
           </a:p>
@@ -31684,7 +32500,7 @@
                 <a:ea typeface="Trebuchet MS" pitchFamily="34" charset="-122"/>
                 <a:cs typeface="Trebuchet MS" pitchFamily="34" charset="-120"/>
               </a:rPr>
-              <a:t>geo</a:t>
+              <a:t>hypo</a:t>
             </a:r>
             <a:endParaRPr lang="en-US" sz="1300" dirty="0"/>
           </a:p>
@@ -31723,7 +32539,7 @@
                 <a:ea typeface="Calibri" pitchFamily="34" charset="-122"/>
                 <a:cs typeface="Calibri" pitchFamily="34" charset="-120"/>
               </a:rPr>
-              <a:t>earth</a:t>
+              <a:t>under, below normal</a:t>
             </a:r>
             <a:endParaRPr lang="en-US" sz="850" dirty="0"/>
           </a:p>
@@ -31746,11 +32562,11 @@
             </a:avLst>
           </a:prstGeom>
           <a:solidFill>
-            <a:srgbClr val="CCFBF1"/>
+            <a:srgbClr val="FCE7F3"/>
           </a:solidFill>
           <a:ln w="19050">
             <a:solidFill>
-              <a:srgbClr val="0D9488"/>
+              <a:srgbClr val="DB2777"/>
             </a:solidFill>
             <a:prstDash val="solid"/>
           </a:ln>
@@ -31790,13 +32606,13 @@
             <a:r>
               <a:rPr lang="en-US" sz="1300" b="1" dirty="0">
                 <a:solidFill>
-                  <a:srgbClr val="0F766E"/>
+                  <a:srgbClr val="9D174D"/>
                 </a:solidFill>
                 <a:latin typeface="Trebuchet MS" pitchFamily="34" charset="0"/>
                 <a:ea typeface="Trebuchet MS" pitchFamily="34" charset="-122"/>
                 <a:cs typeface="Trebuchet MS" pitchFamily="34" charset="-120"/>
               </a:rPr>
-              <a:t>thermo</a:t>
+              <a:t>therm</a:t>
             </a:r>
             <a:endParaRPr lang="en-US" sz="1300" dirty="0"/>
           </a:p>
@@ -31908,7 +32724,7 @@
                 <a:ea typeface="Trebuchet MS" pitchFamily="34" charset="-122"/>
                 <a:cs typeface="Trebuchet MS" pitchFamily="34" charset="-120"/>
               </a:rPr>
-              <a:t>al</a:t>
+              <a:t>ia</a:t>
             </a:r>
             <a:endParaRPr lang="en-US" sz="1300" dirty="0"/>
           </a:p>
@@ -31947,7 +32763,7 @@
                 <a:ea typeface="Calibri" pitchFamily="34" charset="-122"/>
                 <a:cs typeface="Calibri" pitchFamily="34" charset="-120"/>
               </a:rPr>
-              <a:t>relating to</a:t>
+              <a:t>condition or state</a:t>
             </a:r>
             <a:endParaRPr lang="en-US" sz="850" dirty="0"/>
           </a:p>
@@ -32054,8 +32870,8 @@
         </p:nvSpPr>
         <p:spPr>
           <a:xfrm>
-            <a:off x="1975104" y="3364992"/>
-            <a:ext cx="1554480" cy="475488"/>
+            <a:off x="1978152" y="3364992"/>
+            <a:ext cx="1225296" cy="475488"/>
           </a:xfrm>
           <a:prstGeom prst="rect">
             <a:avLst>
@@ -32081,8 +32897,8 @@
         </p:nvSpPr>
         <p:spPr>
           <a:xfrm>
-            <a:off x="1975104" y="3364992"/>
-            <a:ext cx="1554480" cy="475488"/>
+            <a:off x="1978152" y="3364992"/>
+            <a:ext cx="1225296" cy="475488"/>
           </a:xfrm>
           <a:prstGeom prst="rect">
             <a:avLst/>
@@ -32106,7 +32922,7 @@
                 <a:ea typeface="Trebuchet MS" pitchFamily="34" charset="-122"/>
                 <a:cs typeface="Trebuchet MS" pitchFamily="34" charset="-120"/>
               </a:rPr>
-              <a:t>ge</a:t>
+              <a:t>hy</a:t>
             </a:r>
             <a:endParaRPr lang="en-US" sz="1400" dirty="0"/>
           </a:p>
@@ -32120,8 +32936,8 @@
         </p:nvSpPr>
         <p:spPr>
           <a:xfrm>
-            <a:off x="3529584" y="3364992"/>
-            <a:ext cx="73152" cy="475488"/>
+            <a:off x="3203448" y="3364992"/>
+            <a:ext cx="76200" cy="475488"/>
           </a:xfrm>
           <a:prstGeom prst="rect">
             <a:avLst/>
@@ -32159,8 +32975,8 @@
         </p:nvSpPr>
         <p:spPr>
           <a:xfrm>
-            <a:off x="3602736" y="3364992"/>
-            <a:ext cx="1554480" cy="475488"/>
+            <a:off x="3279648" y="3364992"/>
+            <a:ext cx="1225296" cy="475488"/>
           </a:xfrm>
           <a:prstGeom prst="rect">
             <a:avLst>
@@ -32186,8 +33002,8 @@
         </p:nvSpPr>
         <p:spPr>
           <a:xfrm>
-            <a:off x="3602736" y="3364992"/>
-            <a:ext cx="1554480" cy="475488"/>
+            <a:off x="3279648" y="3364992"/>
+            <a:ext cx="1225296" cy="475488"/>
           </a:xfrm>
           <a:prstGeom prst="rect">
             <a:avLst/>
@@ -32211,7 +33027,7 @@
                 <a:ea typeface="Trebuchet MS" pitchFamily="34" charset="-122"/>
                 <a:cs typeface="Trebuchet MS" pitchFamily="34" charset="-120"/>
               </a:rPr>
-              <a:t>o</a:t>
+              <a:t>po</a:t>
             </a:r>
             <a:endParaRPr lang="en-US" sz="1400" dirty="0"/>
           </a:p>
@@ -32225,8 +33041,8 @@
         </p:nvSpPr>
         <p:spPr>
           <a:xfrm>
-            <a:off x="5157216" y="3364992"/>
-            <a:ext cx="73152" cy="475488"/>
+            <a:off x="4504944" y="3364992"/>
+            <a:ext cx="76200" cy="475488"/>
           </a:xfrm>
           <a:prstGeom prst="rect">
             <a:avLst/>
@@ -32264,8 +33080,8 @@
         </p:nvSpPr>
         <p:spPr>
           <a:xfrm>
-            <a:off x="5230368" y="3364992"/>
-            <a:ext cx="1554480" cy="475488"/>
+            <a:off x="4581144" y="3364992"/>
+            <a:ext cx="1225296" cy="475488"/>
           </a:xfrm>
           <a:prstGeom prst="rect">
             <a:avLst>
@@ -32291,8 +33107,8 @@
         </p:nvSpPr>
         <p:spPr>
           <a:xfrm>
-            <a:off x="5230368" y="3364992"/>
-            <a:ext cx="1554480" cy="475488"/>
+            <a:off x="4581144" y="3364992"/>
+            <a:ext cx="1225296" cy="475488"/>
           </a:xfrm>
           <a:prstGeom prst="rect">
             <a:avLst/>
@@ -32330,8 +33146,8 @@
         </p:nvSpPr>
         <p:spPr>
           <a:xfrm>
-            <a:off x="6784848" y="3364992"/>
-            <a:ext cx="73152" cy="475488"/>
+            <a:off x="5806440" y="3364992"/>
+            <a:ext cx="76200" cy="475488"/>
           </a:xfrm>
           <a:prstGeom prst="rect">
             <a:avLst/>
@@ -32369,8 +33185,8 @@
         </p:nvSpPr>
         <p:spPr>
           <a:xfrm>
-            <a:off x="6858000" y="3364992"/>
-            <a:ext cx="1554480" cy="475488"/>
+            <a:off x="5882640" y="3364992"/>
+            <a:ext cx="1225296" cy="475488"/>
           </a:xfrm>
           <a:prstGeom prst="rect">
             <a:avLst>
@@ -32396,8 +33212,8 @@
         </p:nvSpPr>
         <p:spPr>
           <a:xfrm>
-            <a:off x="6858000" y="3364992"/>
-            <a:ext cx="1554480" cy="475488"/>
+            <a:off x="5882640" y="3364992"/>
+            <a:ext cx="1225296" cy="475488"/>
           </a:xfrm>
           <a:prstGeom prst="rect">
             <a:avLst/>
@@ -32421,7 +33237,7 @@
                 <a:ea typeface="Trebuchet MS" pitchFamily="34" charset="-122"/>
                 <a:cs typeface="Trebuchet MS" pitchFamily="34" charset="-120"/>
               </a:rPr>
-              <a:t>mal</a:t>
+              <a:t>mi</a:t>
             </a:r>
             <a:endParaRPr lang="en-US" sz="1400" dirty="0"/>
           </a:p>
@@ -32429,7 +33245,112 @@
       </p:sp>
       <p:sp>
         <p:nvSpPr>
-          <p:cNvPr id="39" name="Shape 37"/>
+          <p:cNvPr id="39" name="Text 37"/>
+          <p:cNvSpPr/>
+          <p:nvPr/>
+        </p:nvSpPr>
+        <p:spPr>
+          <a:xfrm>
+            <a:off x="7107936" y="3364992"/>
+            <a:ext cx="76200" cy="475488"/>
+          </a:xfrm>
+          <a:prstGeom prst="rect">
+            <a:avLst/>
+          </a:prstGeom>
+          <a:noFill/>
+          <a:ln/>
+        </p:spPr>
+        <p:txBody>
+          <a:bodyPr wrap="square" lIns="0" tIns="0" rIns="0" bIns="0" rtlCol="0" anchor="ctr"/>
+          <a:lstStyle/>
+          <a:p>
+            <a:pPr algn="ctr" indent="0" marL="0">
+              <a:buNone/>
+            </a:pPr>
+            <a:r>
+              <a:rPr lang="en-US" sz="1600" b="1" dirty="0">
+                <a:solidFill>
+                  <a:srgbClr val="0D9488"/>
+                </a:solidFill>
+                <a:latin typeface="Trebuchet MS" pitchFamily="34" charset="0"/>
+                <a:ea typeface="Trebuchet MS" pitchFamily="34" charset="-122"/>
+                <a:cs typeface="Trebuchet MS" pitchFamily="34" charset="-120"/>
+              </a:rPr>
+              <a:t>·</a:t>
+            </a:r>
+            <a:endParaRPr lang="en-US" sz="1600" dirty="0"/>
+          </a:p>
+        </p:txBody>
+      </p:sp>
+      <p:sp>
+        <p:nvSpPr>
+          <p:cNvPr id="40" name="Shape 38"/>
+          <p:cNvSpPr/>
+          <p:nvPr/>
+        </p:nvSpPr>
+        <p:spPr>
+          <a:xfrm>
+            <a:off x="7184136" y="3364992"/>
+            <a:ext cx="1225296" cy="475488"/>
+          </a:xfrm>
+          <a:prstGeom prst="rect">
+            <a:avLst>
+              <a:gd name="adj" fmla="val 9615"/>
+            </a:avLst>
+          </a:prstGeom>
+          <a:solidFill>
+            <a:srgbClr val="FFFFFF"/>
+          </a:solidFill>
+          <a:ln w="12700">
+            <a:solidFill>
+              <a:srgbClr val="0D9488"/>
+            </a:solidFill>
+            <a:prstDash val="solid"/>
+          </a:ln>
+        </p:spPr>
+      </p:sp>
+      <p:sp>
+        <p:nvSpPr>
+          <p:cNvPr id="41" name="Text 39"/>
+          <p:cNvSpPr/>
+          <p:nvPr/>
+        </p:nvSpPr>
+        <p:spPr>
+          <a:xfrm>
+            <a:off x="7184136" y="3364992"/>
+            <a:ext cx="1225296" cy="475488"/>
+          </a:xfrm>
+          <a:prstGeom prst="rect">
+            <a:avLst/>
+          </a:prstGeom>
+          <a:noFill/>
+          <a:ln/>
+        </p:spPr>
+        <p:txBody>
+          <a:bodyPr wrap="square" lIns="0" tIns="0" rIns="0" bIns="0" rtlCol="0" anchor="ctr"/>
+          <a:lstStyle/>
+          <a:p>
+            <a:pPr algn="ctr" indent="0" marL="0">
+              <a:buNone/>
+            </a:pPr>
+            <a:r>
+              <a:rPr lang="en-US" sz="1400" b="1" dirty="0">
+                <a:solidFill>
+                  <a:srgbClr val="0D9488"/>
+                </a:solidFill>
+                <a:latin typeface="Trebuchet MS" pitchFamily="34" charset="0"/>
+                <a:ea typeface="Trebuchet MS" pitchFamily="34" charset="-122"/>
+                <a:cs typeface="Trebuchet MS" pitchFamily="34" charset="-120"/>
+              </a:rPr>
+              <a:t>a</a:t>
+            </a:r>
+            <a:endParaRPr lang="en-US" sz="1400" dirty="0"/>
+          </a:p>
+        </p:txBody>
+      </p:sp>
+      <p:sp>
+        <p:nvSpPr>
+          <p:cNvPr id="42" name="Shape 40"/>
           <p:cNvSpPr/>
           <p:nvPr/>
         </p:nvSpPr>
@@ -32456,7 +33377,7 @@
       </p:sp>
       <p:sp>
         <p:nvSpPr>
-          <p:cNvPr id="40" name="Text 38"/>
+          <p:cNvPr id="43" name="Text 41"/>
           <p:cNvSpPr/>
           <p:nvPr/>
         </p:nvSpPr>
@@ -32495,7 +33416,7 @@
       </p:sp>
       <p:sp>
         <p:nvSpPr>
-          <p:cNvPr id="41" name="Shape 39"/>
+          <p:cNvPr id="44" name="Shape 42"/>
           <p:cNvSpPr/>
           <p:nvPr/>
         </p:nvSpPr>
@@ -32522,7 +33443,7 @@
       </p:sp>
       <p:sp>
         <p:nvSpPr>
-          <p:cNvPr id="42" name="Text 40"/>
+          <p:cNvPr id="45" name="Text 43"/>
           <p:cNvSpPr/>
           <p:nvPr/>
         </p:nvSpPr>
@@ -32845,7 +33766,7 @@
                 <a:ea typeface="Calibri" pitchFamily="34" charset="-122"/>
                 <a:cs typeface="Calibri" pitchFamily="34" charset="-120"/>
               </a:rPr>
-              <a:t>Word Labs  •  wordlabs.app  •  Root: 'thermo' = heat or temperature</a:t>
+              <a:t>Word Labs  •  wordlabs.app  •  Root: 'thermo' = heat, temperature</a:t>
             </a:r>
             <a:endParaRPr lang="en-US" sz="800" dirty="0"/>
           </a:p>
@@ -32984,7 +33905,7 @@
                 <a:ea typeface="Trebuchet MS" pitchFamily="34" charset="-122"/>
                 <a:cs typeface="Trebuchet MS" pitchFamily="34" charset="-120"/>
               </a:rPr>
-              <a:t>geothermal</a:t>
+              <a:t>hypothermia</a:t>
             </a:r>
             <a:endParaRPr lang="en-US" sz="2800" dirty="0"/>
           </a:p>
@@ -33123,7 +34044,7 @@
                 <a:ea typeface="Trebuchet MS" pitchFamily="34" charset="-122"/>
                 <a:cs typeface="Trebuchet MS" pitchFamily="34" charset="-120"/>
               </a:rPr>
-              <a:t>geo</a:t>
+              <a:t>hypo</a:t>
             </a:r>
             <a:endParaRPr lang="en-US" sz="1300" dirty="0"/>
           </a:p>
@@ -33162,7 +34083,7 @@
                 <a:ea typeface="Calibri" pitchFamily="34" charset="-122"/>
                 <a:cs typeface="Calibri" pitchFamily="34" charset="-120"/>
               </a:rPr>
-              <a:t>earth</a:t>
+              <a:t>under, below normal</a:t>
             </a:r>
             <a:endParaRPr lang="en-US" sz="850" dirty="0"/>
           </a:p>
@@ -33185,11 +34106,11 @@
             </a:avLst>
           </a:prstGeom>
           <a:solidFill>
-            <a:srgbClr val="CCFBF1"/>
+            <a:srgbClr val="FCE7F3"/>
           </a:solidFill>
           <a:ln w="19050">
             <a:solidFill>
-              <a:srgbClr val="0D9488"/>
+              <a:srgbClr val="DB2777"/>
             </a:solidFill>
             <a:prstDash val="solid"/>
           </a:ln>
@@ -33229,13 +34150,13 @@
             <a:r>
               <a:rPr lang="en-US" sz="1300" b="1" dirty="0">
                 <a:solidFill>
-                  <a:srgbClr val="0F766E"/>
+                  <a:srgbClr val="9D174D"/>
                 </a:solidFill>
                 <a:latin typeface="Trebuchet MS" pitchFamily="34" charset="0"/>
                 <a:ea typeface="Trebuchet MS" pitchFamily="34" charset="-122"/>
                 <a:cs typeface="Trebuchet MS" pitchFamily="34" charset="-120"/>
               </a:rPr>
-              <a:t>thermo</a:t>
+              <a:t>therm</a:t>
             </a:r>
             <a:endParaRPr lang="en-US" sz="1300" dirty="0"/>
           </a:p>
@@ -33347,7 +34268,7 @@
                 <a:ea typeface="Trebuchet MS" pitchFamily="34" charset="-122"/>
                 <a:cs typeface="Trebuchet MS" pitchFamily="34" charset="-120"/>
               </a:rPr>
-              <a:t>al</a:t>
+              <a:t>ia</a:t>
             </a:r>
             <a:endParaRPr lang="en-US" sz="1300" dirty="0"/>
           </a:p>
@@ -33386,7 +34307,7 @@
                 <a:ea typeface="Calibri" pitchFamily="34" charset="-122"/>
                 <a:cs typeface="Calibri" pitchFamily="34" charset="-120"/>
               </a:rPr>
-              <a:t>relating to</a:t>
+              <a:t>condition or state</a:t>
             </a:r>
             <a:endParaRPr lang="en-US" sz="850" dirty="0"/>
           </a:p>
@@ -33493,8 +34414,8 @@
         </p:nvSpPr>
         <p:spPr>
           <a:xfrm>
-            <a:off x="1975104" y="3364992"/>
-            <a:ext cx="1554480" cy="475488"/>
+            <a:off x="1978152" y="3364992"/>
+            <a:ext cx="1225296" cy="475488"/>
           </a:xfrm>
           <a:prstGeom prst="rect">
             <a:avLst>
@@ -33520,8 +34441,8 @@
         </p:nvSpPr>
         <p:spPr>
           <a:xfrm>
-            <a:off x="1975104" y="3364992"/>
-            <a:ext cx="1554480" cy="475488"/>
+            <a:off x="1978152" y="3364992"/>
+            <a:ext cx="1225296" cy="475488"/>
           </a:xfrm>
           <a:prstGeom prst="rect">
             <a:avLst/>
@@ -33545,7 +34466,7 @@
                 <a:ea typeface="Trebuchet MS" pitchFamily="34" charset="-122"/>
                 <a:cs typeface="Trebuchet MS" pitchFamily="34" charset="-120"/>
               </a:rPr>
-              <a:t>ge</a:t>
+              <a:t>hy</a:t>
             </a:r>
             <a:endParaRPr lang="en-US" sz="1400" dirty="0"/>
           </a:p>
@@ -33559,8 +34480,8 @@
         </p:nvSpPr>
         <p:spPr>
           <a:xfrm>
-            <a:off x="3529584" y="3364992"/>
-            <a:ext cx="73152" cy="475488"/>
+            <a:off x="3203448" y="3364992"/>
+            <a:ext cx="76200" cy="475488"/>
           </a:xfrm>
           <a:prstGeom prst="rect">
             <a:avLst/>
@@ -33598,8 +34519,8 @@
         </p:nvSpPr>
         <p:spPr>
           <a:xfrm>
-            <a:off x="3602736" y="3364992"/>
-            <a:ext cx="1554480" cy="475488"/>
+            <a:off x="3279648" y="3364992"/>
+            <a:ext cx="1225296" cy="475488"/>
           </a:xfrm>
           <a:prstGeom prst="rect">
             <a:avLst>
@@ -33625,8 +34546,8 @@
         </p:nvSpPr>
         <p:spPr>
           <a:xfrm>
-            <a:off x="3602736" y="3364992"/>
-            <a:ext cx="1554480" cy="475488"/>
+            <a:off x="3279648" y="3364992"/>
+            <a:ext cx="1225296" cy="475488"/>
           </a:xfrm>
           <a:prstGeom prst="rect">
             <a:avLst/>
@@ -33650,7 +34571,7 @@
                 <a:ea typeface="Trebuchet MS" pitchFamily="34" charset="-122"/>
                 <a:cs typeface="Trebuchet MS" pitchFamily="34" charset="-120"/>
               </a:rPr>
-              <a:t>o</a:t>
+              <a:t>po</a:t>
             </a:r>
             <a:endParaRPr lang="en-US" sz="1400" dirty="0"/>
           </a:p>
@@ -33664,8 +34585,8 @@
         </p:nvSpPr>
         <p:spPr>
           <a:xfrm>
-            <a:off x="5157216" y="3364992"/>
-            <a:ext cx="73152" cy="475488"/>
+            <a:off x="4504944" y="3364992"/>
+            <a:ext cx="76200" cy="475488"/>
           </a:xfrm>
           <a:prstGeom prst="rect">
             <a:avLst/>
@@ -33703,8 +34624,8 @@
         </p:nvSpPr>
         <p:spPr>
           <a:xfrm>
-            <a:off x="5230368" y="3364992"/>
-            <a:ext cx="1554480" cy="475488"/>
+            <a:off x="4581144" y="3364992"/>
+            <a:ext cx="1225296" cy="475488"/>
           </a:xfrm>
           <a:prstGeom prst="rect">
             <a:avLst>
@@ -33730,8 +34651,8 @@
         </p:nvSpPr>
         <p:spPr>
           <a:xfrm>
-            <a:off x="5230368" y="3364992"/>
-            <a:ext cx="1554480" cy="475488"/>
+            <a:off x="4581144" y="3364992"/>
+            <a:ext cx="1225296" cy="475488"/>
           </a:xfrm>
           <a:prstGeom prst="rect">
             <a:avLst/>
@@ -33769,8 +34690,8 @@
         </p:nvSpPr>
         <p:spPr>
           <a:xfrm>
-            <a:off x="6784848" y="3364992"/>
-            <a:ext cx="73152" cy="475488"/>
+            <a:off x="5806440" y="3364992"/>
+            <a:ext cx="76200" cy="475488"/>
           </a:xfrm>
           <a:prstGeom prst="rect">
             <a:avLst/>
@@ -33808,8 +34729,8 @@
         </p:nvSpPr>
         <p:spPr>
           <a:xfrm>
-            <a:off x="6858000" y="3364992"/>
-            <a:ext cx="1554480" cy="475488"/>
+            <a:off x="5882640" y="3364992"/>
+            <a:ext cx="1225296" cy="475488"/>
           </a:xfrm>
           <a:prstGeom prst="rect">
             <a:avLst>
@@ -33835,8 +34756,8 @@
         </p:nvSpPr>
         <p:spPr>
           <a:xfrm>
-            <a:off x="6858000" y="3364992"/>
-            <a:ext cx="1554480" cy="475488"/>
+            <a:off x="5882640" y="3364992"/>
+            <a:ext cx="1225296" cy="475488"/>
           </a:xfrm>
           <a:prstGeom prst="rect">
             <a:avLst/>
@@ -33860,7 +34781,7 @@
                 <a:ea typeface="Trebuchet MS" pitchFamily="34" charset="-122"/>
                 <a:cs typeface="Trebuchet MS" pitchFamily="34" charset="-120"/>
               </a:rPr>
-              <a:t>mal</a:t>
+              <a:t>mi</a:t>
             </a:r>
             <a:endParaRPr lang="en-US" sz="1400" dirty="0"/>
           </a:p>
@@ -33868,7 +34789,112 @@
       </p:sp>
       <p:sp>
         <p:nvSpPr>
-          <p:cNvPr id="39" name="Shape 37"/>
+          <p:cNvPr id="39" name="Text 37"/>
+          <p:cNvSpPr/>
+          <p:nvPr/>
+        </p:nvSpPr>
+        <p:spPr>
+          <a:xfrm>
+            <a:off x="7107936" y="3364992"/>
+            <a:ext cx="76200" cy="475488"/>
+          </a:xfrm>
+          <a:prstGeom prst="rect">
+            <a:avLst/>
+          </a:prstGeom>
+          <a:noFill/>
+          <a:ln/>
+        </p:spPr>
+        <p:txBody>
+          <a:bodyPr wrap="square" lIns="0" tIns="0" rIns="0" bIns="0" rtlCol="0" anchor="ctr"/>
+          <a:lstStyle/>
+          <a:p>
+            <a:pPr algn="ctr" indent="0" marL="0">
+              <a:buNone/>
+            </a:pPr>
+            <a:r>
+              <a:rPr lang="en-US" sz="1600" b="1" dirty="0">
+                <a:solidFill>
+                  <a:srgbClr val="0D9488"/>
+                </a:solidFill>
+                <a:latin typeface="Trebuchet MS" pitchFamily="34" charset="0"/>
+                <a:ea typeface="Trebuchet MS" pitchFamily="34" charset="-122"/>
+                <a:cs typeface="Trebuchet MS" pitchFamily="34" charset="-120"/>
+              </a:rPr>
+              <a:t>·</a:t>
+            </a:r>
+            <a:endParaRPr lang="en-US" sz="1600" dirty="0"/>
+          </a:p>
+        </p:txBody>
+      </p:sp>
+      <p:sp>
+        <p:nvSpPr>
+          <p:cNvPr id="40" name="Shape 38"/>
+          <p:cNvSpPr/>
+          <p:nvPr/>
+        </p:nvSpPr>
+        <p:spPr>
+          <a:xfrm>
+            <a:off x="7184136" y="3364992"/>
+            <a:ext cx="1225296" cy="475488"/>
+          </a:xfrm>
+          <a:prstGeom prst="rect">
+            <a:avLst>
+              <a:gd name="adj" fmla="val 9615"/>
+            </a:avLst>
+          </a:prstGeom>
+          <a:solidFill>
+            <a:srgbClr val="FFFFFF"/>
+          </a:solidFill>
+          <a:ln w="12700">
+            <a:solidFill>
+              <a:srgbClr val="0D9488"/>
+            </a:solidFill>
+            <a:prstDash val="solid"/>
+          </a:ln>
+        </p:spPr>
+      </p:sp>
+      <p:sp>
+        <p:nvSpPr>
+          <p:cNvPr id="41" name="Text 39"/>
+          <p:cNvSpPr/>
+          <p:nvPr/>
+        </p:nvSpPr>
+        <p:spPr>
+          <a:xfrm>
+            <a:off x="7184136" y="3364992"/>
+            <a:ext cx="1225296" cy="475488"/>
+          </a:xfrm>
+          <a:prstGeom prst="rect">
+            <a:avLst/>
+          </a:prstGeom>
+          <a:noFill/>
+          <a:ln/>
+        </p:spPr>
+        <p:txBody>
+          <a:bodyPr wrap="square" lIns="0" tIns="0" rIns="0" bIns="0" rtlCol="0" anchor="ctr"/>
+          <a:lstStyle/>
+          <a:p>
+            <a:pPr algn="ctr" indent="0" marL="0">
+              <a:buNone/>
+            </a:pPr>
+            <a:r>
+              <a:rPr lang="en-US" sz="1400" b="1" dirty="0">
+                <a:solidFill>
+                  <a:srgbClr val="0D9488"/>
+                </a:solidFill>
+                <a:latin typeface="Trebuchet MS" pitchFamily="34" charset="0"/>
+                <a:ea typeface="Trebuchet MS" pitchFamily="34" charset="-122"/>
+                <a:cs typeface="Trebuchet MS" pitchFamily="34" charset="-120"/>
+              </a:rPr>
+              <a:t>a</a:t>
+            </a:r>
+            <a:endParaRPr lang="en-US" sz="1400" dirty="0"/>
+          </a:p>
+        </p:txBody>
+      </p:sp>
+      <p:sp>
+        <p:nvSpPr>
+          <p:cNvPr id="42" name="Shape 40"/>
           <p:cNvSpPr/>
           <p:nvPr/>
         </p:nvSpPr>
@@ -33895,7 +34921,7 @@
       </p:sp>
       <p:sp>
         <p:nvSpPr>
-          <p:cNvPr id="40" name="Text 38"/>
+          <p:cNvPr id="43" name="Text 41"/>
           <p:cNvSpPr/>
           <p:nvPr/>
         </p:nvSpPr>
@@ -33934,7 +34960,7 @@
       </p:sp>
       <p:sp>
         <p:nvSpPr>
-          <p:cNvPr id="41" name="Shape 39"/>
+          <p:cNvPr id="44" name="Shape 42"/>
           <p:cNvSpPr/>
           <p:nvPr/>
         </p:nvSpPr>
@@ -33961,14 +34987,14 @@
       </p:sp>
       <p:sp>
         <p:nvSpPr>
-          <p:cNvPr id="42" name="Shape 40"/>
-          <p:cNvSpPr/>
-          <p:nvPr/>
-        </p:nvSpPr>
-        <p:spPr>
-          <a:xfrm>
-            <a:off x="2023872" y="4169664"/>
-            <a:ext cx="685800" cy="475488"/>
+          <p:cNvPr id="45" name="Shape 43"/>
+          <p:cNvSpPr/>
+          <p:nvPr/>
+        </p:nvSpPr>
+        <p:spPr>
+          <a:xfrm>
+            <a:off x="1951330" y="4169664"/>
+            <a:ext cx="676656" cy="475488"/>
           </a:xfrm>
           <a:prstGeom prst="rect">
             <a:avLst>
@@ -33988,14 +35014,14 @@
       </p:sp>
       <p:sp>
         <p:nvSpPr>
-          <p:cNvPr id="43" name="Text 41"/>
-          <p:cNvSpPr/>
-          <p:nvPr/>
-        </p:nvSpPr>
-        <p:spPr>
-          <a:xfrm>
-            <a:off x="2023872" y="4169664"/>
-            <a:ext cx="685800" cy="475488"/>
+          <p:cNvPr id="46" name="Text 44"/>
+          <p:cNvSpPr/>
+          <p:nvPr/>
+        </p:nvSpPr>
+        <p:spPr>
+          <a:xfrm>
+            <a:off x="1951330" y="4169664"/>
+            <a:ext cx="676656" cy="475488"/>
           </a:xfrm>
           <a:prstGeom prst="rect">
             <a:avLst/>
@@ -34019,7 +35045,7 @@
                 <a:ea typeface="Trebuchet MS" pitchFamily="34" charset="-122"/>
                 <a:cs typeface="Trebuchet MS" pitchFamily="34" charset="-120"/>
               </a:rPr>
-              <a:t>g</a:t>
+              <a:t>h</a:t>
             </a:r>
             <a:endParaRPr lang="en-US" sz="900" dirty="0"/>
           </a:p>
@@ -34027,14 +35053,14 @@
       </p:sp>
       <p:sp>
         <p:nvSpPr>
-          <p:cNvPr id="44" name="Shape 42"/>
-          <p:cNvSpPr/>
-          <p:nvPr/>
-        </p:nvSpPr>
-        <p:spPr>
-          <a:xfrm>
-            <a:off x="2831592" y="4169664"/>
-            <a:ext cx="685800" cy="475488"/>
+          <p:cNvPr id="47" name="Shape 45"/>
+          <p:cNvSpPr/>
+          <p:nvPr/>
+        </p:nvSpPr>
+        <p:spPr>
+          <a:xfrm>
+            <a:off x="2677363" y="4169664"/>
+            <a:ext cx="676656" cy="475488"/>
           </a:xfrm>
           <a:prstGeom prst="rect">
             <a:avLst>
@@ -34054,14 +35080,14 @@
       </p:sp>
       <p:sp>
         <p:nvSpPr>
-          <p:cNvPr id="45" name="Text 43"/>
-          <p:cNvSpPr/>
-          <p:nvPr/>
-        </p:nvSpPr>
-        <p:spPr>
-          <a:xfrm>
-            <a:off x="2831592" y="4169664"/>
-            <a:ext cx="685800" cy="475488"/>
+          <p:cNvPr id="48" name="Text 46"/>
+          <p:cNvSpPr/>
+          <p:nvPr/>
+        </p:nvSpPr>
+        <p:spPr>
+          <a:xfrm>
+            <a:off x="2677363" y="4169664"/>
+            <a:ext cx="676656" cy="475488"/>
           </a:xfrm>
           <a:prstGeom prst="rect">
             <a:avLst/>
@@ -34085,7 +35111,7 @@
                 <a:ea typeface="Trebuchet MS" pitchFamily="34" charset="-122"/>
                 <a:cs typeface="Trebuchet MS" pitchFamily="34" charset="-120"/>
               </a:rPr>
-              <a:t>e</a:t>
+              <a:t>y</a:t>
             </a:r>
             <a:endParaRPr lang="en-US" sz="900" dirty="0"/>
           </a:p>
@@ -34093,14 +35119,14 @@
       </p:sp>
       <p:sp>
         <p:nvSpPr>
-          <p:cNvPr id="46" name="Shape 44"/>
-          <p:cNvSpPr/>
-          <p:nvPr/>
-        </p:nvSpPr>
-        <p:spPr>
-          <a:xfrm>
-            <a:off x="3639312" y="4169664"/>
-            <a:ext cx="685800" cy="475488"/>
+          <p:cNvPr id="49" name="Shape 47"/>
+          <p:cNvSpPr/>
+          <p:nvPr/>
+        </p:nvSpPr>
+        <p:spPr>
+          <a:xfrm>
+            <a:off x="3403397" y="4169664"/>
+            <a:ext cx="676656" cy="475488"/>
           </a:xfrm>
           <a:prstGeom prst="rect">
             <a:avLst>
@@ -34120,14 +35146,14 @@
       </p:sp>
       <p:sp>
         <p:nvSpPr>
-          <p:cNvPr id="47" name="Text 45"/>
-          <p:cNvSpPr/>
-          <p:nvPr/>
-        </p:nvSpPr>
-        <p:spPr>
-          <a:xfrm>
-            <a:off x="3639312" y="4169664"/>
-            <a:ext cx="685800" cy="475488"/>
+          <p:cNvPr id="50" name="Text 48"/>
+          <p:cNvSpPr/>
+          <p:nvPr/>
+        </p:nvSpPr>
+        <p:spPr>
+          <a:xfrm>
+            <a:off x="3403397" y="4169664"/>
+            <a:ext cx="676656" cy="475488"/>
           </a:xfrm>
           <a:prstGeom prst="rect">
             <a:avLst/>
@@ -34151,7 +35177,7 @@
                 <a:ea typeface="Trebuchet MS" pitchFamily="34" charset="-122"/>
                 <a:cs typeface="Trebuchet MS" pitchFamily="34" charset="-120"/>
               </a:rPr>
-              <a:t>o</a:t>
+              <a:t>p</a:t>
             </a:r>
             <a:endParaRPr lang="en-US" sz="900" dirty="0"/>
           </a:p>
@@ -34159,14 +35185,14 @@
       </p:sp>
       <p:sp>
         <p:nvSpPr>
-          <p:cNvPr id="48" name="Shape 46"/>
-          <p:cNvSpPr/>
-          <p:nvPr/>
-        </p:nvSpPr>
-        <p:spPr>
-          <a:xfrm>
-            <a:off x="4447032" y="4169664"/>
-            <a:ext cx="685800" cy="475488"/>
+          <p:cNvPr id="51" name="Shape 49"/>
+          <p:cNvSpPr/>
+          <p:nvPr/>
+        </p:nvSpPr>
+        <p:spPr>
+          <a:xfrm>
+            <a:off x="4129430" y="4169664"/>
+            <a:ext cx="676656" cy="475488"/>
           </a:xfrm>
           <a:prstGeom prst="rect">
             <a:avLst>
@@ -34186,14 +35212,14 @@
       </p:sp>
       <p:sp>
         <p:nvSpPr>
-          <p:cNvPr id="49" name="Text 47"/>
-          <p:cNvSpPr/>
-          <p:nvPr/>
-        </p:nvSpPr>
-        <p:spPr>
-          <a:xfrm>
-            <a:off x="4447032" y="4169664"/>
-            <a:ext cx="685800" cy="475488"/>
+          <p:cNvPr id="52" name="Text 50"/>
+          <p:cNvSpPr/>
+          <p:nvPr/>
+        </p:nvSpPr>
+        <p:spPr>
+          <a:xfrm>
+            <a:off x="4129430" y="4169664"/>
+            <a:ext cx="676656" cy="475488"/>
           </a:xfrm>
           <a:prstGeom prst="rect">
             <a:avLst/>
@@ -34217,7 +35243,7 @@
                 <a:ea typeface="Trebuchet MS" pitchFamily="34" charset="-122"/>
                 <a:cs typeface="Trebuchet MS" pitchFamily="34" charset="-120"/>
               </a:rPr>
-              <a:t>th</a:t>
+              <a:t>o</a:t>
             </a:r>
             <a:endParaRPr lang="en-US" sz="900" dirty="0"/>
           </a:p>
@@ -34225,14 +35251,14 @@
       </p:sp>
       <p:sp>
         <p:nvSpPr>
-          <p:cNvPr id="50" name="Shape 48"/>
-          <p:cNvSpPr/>
-          <p:nvPr/>
-        </p:nvSpPr>
-        <p:spPr>
-          <a:xfrm>
-            <a:off x="5254752" y="4169664"/>
-            <a:ext cx="685800" cy="475488"/>
+          <p:cNvPr id="53" name="Shape 51"/>
+          <p:cNvSpPr/>
+          <p:nvPr/>
+        </p:nvSpPr>
+        <p:spPr>
+          <a:xfrm>
+            <a:off x="4855464" y="4169664"/>
+            <a:ext cx="676656" cy="475488"/>
           </a:xfrm>
           <a:prstGeom prst="rect">
             <a:avLst>
@@ -34252,14 +35278,14 @@
       </p:sp>
       <p:sp>
         <p:nvSpPr>
-          <p:cNvPr id="51" name="Text 49"/>
-          <p:cNvSpPr/>
-          <p:nvPr/>
-        </p:nvSpPr>
-        <p:spPr>
-          <a:xfrm>
-            <a:off x="5254752" y="4169664"/>
-            <a:ext cx="685800" cy="475488"/>
+          <p:cNvPr id="54" name="Text 52"/>
+          <p:cNvSpPr/>
+          <p:nvPr/>
+        </p:nvSpPr>
+        <p:spPr>
+          <a:xfrm>
+            <a:off x="4855464" y="4169664"/>
+            <a:ext cx="676656" cy="475488"/>
           </a:xfrm>
           <a:prstGeom prst="rect">
             <a:avLst/>
@@ -34283,7 +35309,7 @@
                 <a:ea typeface="Trebuchet MS" pitchFamily="34" charset="-122"/>
                 <a:cs typeface="Trebuchet MS" pitchFamily="34" charset="-120"/>
               </a:rPr>
-              <a:t>er</a:t>
+              <a:t>th</a:t>
             </a:r>
             <a:endParaRPr lang="en-US" sz="900" dirty="0"/>
           </a:p>
@@ -34291,14 +35317,14 @@
       </p:sp>
       <p:sp>
         <p:nvSpPr>
-          <p:cNvPr id="52" name="Shape 50"/>
-          <p:cNvSpPr/>
-          <p:nvPr/>
-        </p:nvSpPr>
-        <p:spPr>
-          <a:xfrm>
-            <a:off x="6062472" y="4169664"/>
-            <a:ext cx="685800" cy="475488"/>
+          <p:cNvPr id="55" name="Shape 53"/>
+          <p:cNvSpPr/>
+          <p:nvPr/>
+        </p:nvSpPr>
+        <p:spPr>
+          <a:xfrm>
+            <a:off x="5581498" y="4169664"/>
+            <a:ext cx="676656" cy="475488"/>
           </a:xfrm>
           <a:prstGeom prst="rect">
             <a:avLst>
@@ -34318,14 +35344,14 @@
       </p:sp>
       <p:sp>
         <p:nvSpPr>
-          <p:cNvPr id="53" name="Text 51"/>
-          <p:cNvSpPr/>
-          <p:nvPr/>
-        </p:nvSpPr>
-        <p:spPr>
-          <a:xfrm>
-            <a:off x="6062472" y="4169664"/>
-            <a:ext cx="685800" cy="475488"/>
+          <p:cNvPr id="56" name="Text 54"/>
+          <p:cNvSpPr/>
+          <p:nvPr/>
+        </p:nvSpPr>
+        <p:spPr>
+          <a:xfrm>
+            <a:off x="5581498" y="4169664"/>
+            <a:ext cx="676656" cy="475488"/>
           </a:xfrm>
           <a:prstGeom prst="rect">
             <a:avLst/>
@@ -34349,7 +35375,7 @@
                 <a:ea typeface="Trebuchet MS" pitchFamily="34" charset="-122"/>
                 <a:cs typeface="Trebuchet MS" pitchFamily="34" charset="-120"/>
               </a:rPr>
-              <a:t>m</a:t>
+              <a:t>er</a:t>
             </a:r>
             <a:endParaRPr lang="en-US" sz="900" dirty="0"/>
           </a:p>
@@ -34357,14 +35383,14 @@
       </p:sp>
       <p:sp>
         <p:nvSpPr>
-          <p:cNvPr id="54" name="Shape 52"/>
-          <p:cNvSpPr/>
-          <p:nvPr/>
-        </p:nvSpPr>
-        <p:spPr>
-          <a:xfrm>
-            <a:off x="6870192" y="4169664"/>
-            <a:ext cx="685800" cy="475488"/>
+          <p:cNvPr id="57" name="Shape 55"/>
+          <p:cNvSpPr/>
+          <p:nvPr/>
+        </p:nvSpPr>
+        <p:spPr>
+          <a:xfrm>
+            <a:off x="6307531" y="4169664"/>
+            <a:ext cx="676656" cy="475488"/>
           </a:xfrm>
           <a:prstGeom prst="rect">
             <a:avLst>
@@ -34384,14 +35410,14 @@
       </p:sp>
       <p:sp>
         <p:nvSpPr>
-          <p:cNvPr id="55" name="Text 53"/>
-          <p:cNvSpPr/>
-          <p:nvPr/>
-        </p:nvSpPr>
-        <p:spPr>
-          <a:xfrm>
-            <a:off x="6870192" y="4169664"/>
-            <a:ext cx="685800" cy="475488"/>
+          <p:cNvPr id="58" name="Text 56"/>
+          <p:cNvSpPr/>
+          <p:nvPr/>
+        </p:nvSpPr>
+        <p:spPr>
+          <a:xfrm>
+            <a:off x="6307531" y="4169664"/>
+            <a:ext cx="676656" cy="475488"/>
           </a:xfrm>
           <a:prstGeom prst="rect">
             <a:avLst/>
@@ -34415,7 +35441,7 @@
                 <a:ea typeface="Trebuchet MS" pitchFamily="34" charset="-122"/>
                 <a:cs typeface="Trebuchet MS" pitchFamily="34" charset="-120"/>
               </a:rPr>
-              <a:t>a</a:t>
+              <a:t>m</a:t>
             </a:r>
             <a:endParaRPr lang="en-US" sz="900" dirty="0"/>
           </a:p>
@@ -34423,14 +35449,14 @@
       </p:sp>
       <p:sp>
         <p:nvSpPr>
-          <p:cNvPr id="56" name="Shape 54"/>
-          <p:cNvSpPr/>
-          <p:nvPr/>
-        </p:nvSpPr>
-        <p:spPr>
-          <a:xfrm>
-            <a:off x="7677912" y="4169664"/>
-            <a:ext cx="685800" cy="475488"/>
+          <p:cNvPr id="59" name="Shape 57"/>
+          <p:cNvSpPr/>
+          <p:nvPr/>
+        </p:nvSpPr>
+        <p:spPr>
+          <a:xfrm>
+            <a:off x="7033565" y="4169664"/>
+            <a:ext cx="676656" cy="475488"/>
           </a:xfrm>
           <a:prstGeom prst="rect">
             <a:avLst>
@@ -34450,14 +35476,14 @@
       </p:sp>
       <p:sp>
         <p:nvSpPr>
-          <p:cNvPr id="57" name="Text 55"/>
-          <p:cNvSpPr/>
-          <p:nvPr/>
-        </p:nvSpPr>
-        <p:spPr>
-          <a:xfrm>
-            <a:off x="7677912" y="4169664"/>
-            <a:ext cx="685800" cy="475488"/>
+          <p:cNvPr id="60" name="Text 58"/>
+          <p:cNvSpPr/>
+          <p:nvPr/>
+        </p:nvSpPr>
+        <p:spPr>
+          <a:xfrm>
+            <a:off x="7033565" y="4169664"/>
+            <a:ext cx="676656" cy="475488"/>
           </a:xfrm>
           <a:prstGeom prst="rect">
             <a:avLst/>
@@ -34481,7 +35507,73 @@
                 <a:ea typeface="Trebuchet MS" pitchFamily="34" charset="-122"/>
                 <a:cs typeface="Trebuchet MS" pitchFamily="34" charset="-120"/>
               </a:rPr>
-              <a:t>l</a:t>
+              <a:t>i</a:t>
+            </a:r>
+            <a:endParaRPr lang="en-US" sz="900" dirty="0"/>
+          </a:p>
+        </p:txBody>
+      </p:sp>
+      <p:sp>
+        <p:nvSpPr>
+          <p:cNvPr id="61" name="Shape 59"/>
+          <p:cNvSpPr/>
+          <p:nvPr/>
+        </p:nvSpPr>
+        <p:spPr>
+          <a:xfrm>
+            <a:off x="7759598" y="4169664"/>
+            <a:ext cx="676656" cy="475488"/>
+          </a:xfrm>
+          <a:prstGeom prst="rect">
+            <a:avLst>
+              <a:gd name="adj" fmla="val 7692"/>
+            </a:avLst>
+          </a:prstGeom>
+          <a:solidFill>
+            <a:srgbClr val="FFFFFF"/>
+          </a:solidFill>
+          <a:ln w="12700">
+            <a:solidFill>
+              <a:srgbClr val="DB2777"/>
+            </a:solidFill>
+            <a:prstDash val="solid"/>
+          </a:ln>
+        </p:spPr>
+      </p:sp>
+      <p:sp>
+        <p:nvSpPr>
+          <p:cNvPr id="62" name="Text 60"/>
+          <p:cNvSpPr/>
+          <p:nvPr/>
+        </p:nvSpPr>
+        <p:spPr>
+          <a:xfrm>
+            <a:off x="7759598" y="4169664"/>
+            <a:ext cx="676656" cy="475488"/>
+          </a:xfrm>
+          <a:prstGeom prst="rect">
+            <a:avLst/>
+          </a:prstGeom>
+          <a:noFill/>
+          <a:ln/>
+        </p:spPr>
+        <p:txBody>
+          <a:bodyPr wrap="square" lIns="0" tIns="0" rIns="0" bIns="0" rtlCol="0" anchor="ctr"/>
+          <a:lstStyle/>
+          <a:p>
+            <a:pPr algn="ctr" indent="0" marL="0">
+              <a:buNone/>
+            </a:pPr>
+            <a:r>
+              <a:rPr lang="en-US" sz="900" b="1" dirty="0">
+                <a:solidFill>
+                  <a:srgbClr val="9D174D"/>
+                </a:solidFill>
+                <a:latin typeface="Trebuchet MS" pitchFamily="34" charset="0"/>
+                <a:ea typeface="Trebuchet MS" pitchFamily="34" charset="-122"/>
+                <a:cs typeface="Trebuchet MS" pitchFamily="34" charset="-120"/>
+              </a:rPr>
+              <a:t>a</a:t>
             </a:r>
             <a:endParaRPr lang="en-US" sz="900" dirty="0"/>
           </a:p>
@@ -34773,7 +35865,7 @@
                 <a:ea typeface="Calibri" pitchFamily="34" charset="-122"/>
                 <a:cs typeface="Calibri" pitchFamily="34" charset="-120"/>
               </a:rPr>
-              <a:t>Word Labs  •  wordlabs.app  •  Root: 'thermo' = heat or temperature</a:t>
+              <a:t>Word Labs  •  wordlabs.app  •  Root: 'thermo' = heat, temperature</a:t>
             </a:r>
             <a:endParaRPr lang="en-US" sz="800" dirty="0"/>
           </a:p>
@@ -35942,7 +37034,7 @@
                 <a:ea typeface="Calibri" pitchFamily="34" charset="-122"/>
                 <a:cs typeface="Calibri" pitchFamily="34" charset="-120"/>
               </a:rPr>
-              <a:t>Word Labs  •  wordlabs.app  •  Root: 'thermo' = heat or temperature</a:t>
+              <a:t>Word Labs  •  wordlabs.app  •  Root: 'thermo' = heat, temperature</a:t>
             </a:r>
             <a:endParaRPr lang="en-US" sz="800" dirty="0"/>
           </a:p>
@@ -36435,7 +37527,7 @@
                 <a:ea typeface="Trebuchet MS" pitchFamily="34" charset="-122"/>
                 <a:cs typeface="Trebuchet MS" pitchFamily="34" charset="-120"/>
               </a:rPr>
-              <a:t>iso-</a:t>
+              <a:t>hydro-</a:t>
             </a:r>
             <a:endParaRPr lang="en-US" sz="1300" dirty="0"/>
           </a:p>
@@ -36588,7 +37680,7 @@
                 <a:ea typeface="Trebuchet MS" pitchFamily="34" charset="-122"/>
                 <a:cs typeface="Trebuchet MS" pitchFamily="34" charset="-120"/>
               </a:rPr>
-              <a:t>hydro-</a:t>
+              <a:t>electro-</a:t>
             </a:r>
             <a:endParaRPr lang="en-US" sz="1300" dirty="0"/>
           </a:p>
@@ -36677,7 +37769,7 @@
                 <a:ea typeface="Trebuchet MS" pitchFamily="34" charset="-122"/>
                 <a:cs typeface="Trebuchet MS" pitchFamily="34" charset="-120"/>
               </a:rPr>
-              <a:t>-dynamics</a:t>
+              <a:t>-dynamic</a:t>
             </a:r>
             <a:endParaRPr lang="en-US" sz="1300" dirty="0"/>
           </a:p>
@@ -36741,7 +37833,7 @@
                 <a:ea typeface="Trebuchet MS" pitchFamily="34" charset="-122"/>
                 <a:cs typeface="Trebuchet MS" pitchFamily="34" charset="-120"/>
               </a:rPr>
-              <a:t>electro-</a:t>
+              <a:t>poly-</a:t>
             </a:r>
             <a:endParaRPr lang="en-US" sz="1300" dirty="0"/>
           </a:p>
@@ -36894,7 +37986,7 @@
                 <a:ea typeface="Trebuchet MS" pitchFamily="34" charset="-122"/>
                 <a:cs typeface="Trebuchet MS" pitchFamily="34" charset="-120"/>
               </a:rPr>
-              <a:t>exo-</a:t>
+              <a:t>iso-</a:t>
             </a:r>
             <a:endParaRPr lang="en-US" sz="1300" dirty="0"/>
           </a:p>
@@ -36983,7 +38075,7 @@
                 <a:ea typeface="Trebuchet MS" pitchFamily="34" charset="-122"/>
                 <a:cs typeface="Trebuchet MS" pitchFamily="34" charset="-120"/>
               </a:rPr>
-              <a:t>-sphere</a:t>
+              <a:t>-graph</a:t>
             </a:r>
             <a:endParaRPr lang="en-US" sz="1300" dirty="0"/>
           </a:p>
@@ -37418,7 +38510,7 @@
                 <a:ea typeface="Trebuchet MS" pitchFamily="34" charset="-122"/>
                 <a:cs typeface="Trebuchet MS" pitchFamily="34" charset="-120"/>
               </a:rPr>
-              <a:t>isothermal</a:t>
+              <a:t>hypothermia</a:t>
             </a:r>
             <a:endParaRPr lang="en-US" sz="1200" dirty="0"/>
           </a:p>
@@ -37484,7 +38576,7 @@
                 <a:ea typeface="Trebuchet MS" pitchFamily="34" charset="-122"/>
                 <a:cs typeface="Trebuchet MS" pitchFamily="34" charset="-120"/>
               </a:rPr>
-              <a:t>thermosphere</a:t>
+              <a:t>thermal</a:t>
             </a:r>
             <a:endParaRPr lang="en-US" sz="1200" dirty="0"/>
           </a:p>
@@ -37550,7 +38642,7 @@
                 <a:ea typeface="Trebuchet MS" pitchFamily="34" charset="-122"/>
                 <a:cs typeface="Trebuchet MS" pitchFamily="34" charset="-120"/>
               </a:rPr>
-              <a:t>exothermic</a:t>
+              <a:t>thermonuclear</a:t>
             </a:r>
             <a:endParaRPr lang="en-US" sz="1200" dirty="0"/>
           </a:p>
@@ -37842,7 +38934,7 @@
                 <a:ea typeface="Calibri" pitchFamily="34" charset="-122"/>
                 <a:cs typeface="Calibri" pitchFamily="34" charset="-120"/>
               </a:rPr>
-              <a:t>Word Labs  •  wordlabs.app  •  Root: 'thermo' = heat or temperature</a:t>
+              <a:t>Word Labs  •  wordlabs.app  •  Root: 'thermo' = heat, temperature</a:t>
             </a:r>
             <a:endParaRPr lang="en-US" sz="800" dirty="0"/>
           </a:p>
@@ -38006,7 +39098,7 @@
                 <a:ea typeface="Calibri" pitchFamily="34" charset="-122"/>
                 <a:cs typeface="Calibri" pitchFamily="34" charset="-120"/>
               </a:rPr>
-              <a:t>The core part of a word carrying its basic meaning. For example, 'thermo' means 'heat or temperature'.</a:t>
+              <a:t>The core part of a word carrying its basic meaning. For example, 'thermo' means 'heat, temperature'.</a:t>
             </a:r>
             <a:endParaRPr lang="en-US" sz="1350" dirty="0"/>
           </a:p>
@@ -38626,7 +39718,7 @@
                 <a:ea typeface="Calibri" pitchFamily="34" charset="-122"/>
                 <a:cs typeface="Calibri" pitchFamily="34" charset="-120"/>
               </a:rPr>
-              <a:t>Word Labs  •  wordlabs.app  •  Root: 'thermo' = heat or temperature</a:t>
+              <a:t>Word Labs  •  wordlabs.app  •  Root: 'thermo' = heat, temperature</a:t>
             </a:r>
             <a:endParaRPr lang="en-US" sz="800" dirty="0"/>
           </a:p>
@@ -38738,7 +39830,7 @@
                 <a:ea typeface="Calibri" pitchFamily="34" charset="-122"/>
                 <a:cs typeface="Calibri" pitchFamily="34" charset="-120"/>
               </a:rPr>
-              <a:t>1.  The root 'thermo' comes from Greek and means heat.</a:t>
+              <a:t>1.  The morpheme 'thermo' comes from a Greek word meaning heat.</a:t>
             </a:r>
             <a:endParaRPr lang="en-US" sz="1300" dirty="0"/>
           </a:p>
@@ -38877,7 +39969,7 @@
                 <a:ea typeface="Calibri" pitchFamily="34" charset="-122"/>
                 <a:cs typeface="Calibri" pitchFamily="34" charset="-120"/>
               </a:rPr>
-              <a:t>2.  A thermometer is used to measure wind speed.</a:t>
+              <a:t>2.  A thermometer is used to measure how loud a sound is.</a:t>
             </a:r>
             <a:endParaRPr lang="en-US" sz="1300" dirty="0"/>
           </a:p>
@@ -39016,7 +40108,7 @@
                 <a:ea typeface="Calibri" pitchFamily="34" charset="-122"/>
                 <a:cs typeface="Calibri" pitchFamily="34" charset="-120"/>
               </a:rPr>
-              <a:t>3.  The thermosphere is a layer of Earth's atmosphere.</a:t>
+              <a:t>3.  Hypothermia happens when your body gets dangerously cold.</a:t>
             </a:r>
             <a:endParaRPr lang="en-US" sz="1300" dirty="0"/>
           </a:p>
@@ -39294,7 +40386,7 @@
                 <a:ea typeface="Calibri" pitchFamily="34" charset="-122"/>
                 <a:cs typeface="Calibri" pitchFamily="34" charset="-120"/>
               </a:rPr>
-              <a:t>5.  An exothermic reaction absorbs heat from its surroundings.</a:t>
+              <a:t>5.  The morpheme 'thermo' means water.</a:t>
             </a:r>
             <a:endParaRPr lang="en-US" sz="1300" dirty="0"/>
           </a:p>
@@ -39652,7 +40744,7 @@
                 <a:ea typeface="Calibri" pitchFamily="34" charset="-122"/>
                 <a:cs typeface="Calibri" pitchFamily="34" charset="-120"/>
               </a:rPr>
-              <a:t>Word Labs  •  wordlabs.app  •  Root: 'thermo' = heat or temperature</a:t>
+              <a:t>Word Labs  •  wordlabs.app  •  Root: 'thermo' = heat, temperature</a:t>
             </a:r>
             <a:endParaRPr lang="en-US" sz="800" dirty="0"/>
           </a:p>
@@ -39789,7 +40881,7 @@
                 <a:ea typeface="Trebuchet MS" pitchFamily="34" charset="-122"/>
                 <a:cs typeface="Trebuchet MS" pitchFamily="34" charset="-120"/>
               </a:rPr>
-              <a:t>heat or temperature</a:t>
+              <a:t>heat, temperature</a:t>
             </a:r>
             <a:endParaRPr lang="en-US" sz="2000" dirty="0"/>
           </a:p>
@@ -40263,7 +41355,7 @@
                 <a:ea typeface="Trebuchet MS" pitchFamily="34" charset="-122"/>
                 <a:cs typeface="Trebuchet MS" pitchFamily="34" charset="-120"/>
               </a:rPr>
-              <a:t>isothermal</a:t>
+              <a:t>hypothermia</a:t>
             </a:r>
             <a:endParaRPr lang="en-US" sz="1300" dirty="0"/>
           </a:p>
@@ -40329,7 +41421,7 @@
                 <a:ea typeface="Trebuchet MS" pitchFamily="34" charset="-122"/>
                 <a:cs typeface="Trebuchet MS" pitchFamily="34" charset="-120"/>
               </a:rPr>
-              <a:t>thermosphere</a:t>
+              <a:t>thermal</a:t>
             </a:r>
             <a:endParaRPr lang="en-US" sz="1300" dirty="0"/>
           </a:p>
@@ -40621,7 +41713,7 @@
                 <a:ea typeface="Calibri" pitchFamily="34" charset="-122"/>
                 <a:cs typeface="Calibri" pitchFamily="34" charset="-120"/>
               </a:rPr>
-              <a:t>Word Labs  •  wordlabs.app  •  Root: 'thermo' = heat or temperature</a:t>
+              <a:t>Word Labs  •  wordlabs.app  •  Root: 'thermo' = heat, temperature</a:t>
             </a:r>
             <a:endParaRPr lang="en-US" sz="800" dirty="0"/>
           </a:p>
@@ -41114,7 +42206,7 @@
                 <a:ea typeface="Trebuchet MS" pitchFamily="34" charset="-122"/>
                 <a:cs typeface="Trebuchet MS" pitchFamily="34" charset="-120"/>
               </a:rPr>
-              <a:t>iso-</a:t>
+              <a:t>hydro-</a:t>
             </a:r>
             <a:endParaRPr lang="en-US" sz="1300" dirty="0"/>
           </a:p>
@@ -41267,7 +42359,7 @@
                 <a:ea typeface="Trebuchet MS" pitchFamily="34" charset="-122"/>
                 <a:cs typeface="Trebuchet MS" pitchFamily="34" charset="-120"/>
               </a:rPr>
-              <a:t>hydro-</a:t>
+              <a:t>electro-</a:t>
             </a:r>
             <a:endParaRPr lang="en-US" sz="1300" dirty="0"/>
           </a:p>
@@ -41356,7 +42448,7 @@
                 <a:ea typeface="Trebuchet MS" pitchFamily="34" charset="-122"/>
                 <a:cs typeface="Trebuchet MS" pitchFamily="34" charset="-120"/>
               </a:rPr>
-              <a:t>-dynamics</a:t>
+              <a:t>-dynamic</a:t>
             </a:r>
             <a:endParaRPr lang="en-US" sz="1300" dirty="0"/>
           </a:p>
@@ -41420,7 +42512,7 @@
                 <a:ea typeface="Trebuchet MS" pitchFamily="34" charset="-122"/>
                 <a:cs typeface="Trebuchet MS" pitchFamily="34" charset="-120"/>
               </a:rPr>
-              <a:t>electro-</a:t>
+              <a:t>poly-</a:t>
             </a:r>
             <a:endParaRPr lang="en-US" sz="1300" dirty="0"/>
           </a:p>
@@ -41573,7 +42665,7 @@
                 <a:ea typeface="Trebuchet MS" pitchFamily="34" charset="-122"/>
                 <a:cs typeface="Trebuchet MS" pitchFamily="34" charset="-120"/>
               </a:rPr>
-              <a:t>exo-</a:t>
+              <a:t>iso-</a:t>
             </a:r>
             <a:endParaRPr lang="en-US" sz="1300" dirty="0"/>
           </a:p>
@@ -41662,7 +42754,7 @@
                 <a:ea typeface="Trebuchet MS" pitchFamily="34" charset="-122"/>
                 <a:cs typeface="Trebuchet MS" pitchFamily="34" charset="-120"/>
               </a:rPr>
-              <a:t>-sphere</a:t>
+              <a:t>-graph</a:t>
             </a:r>
             <a:endParaRPr lang="en-US" sz="1300" dirty="0"/>
           </a:p>
@@ -42395,7 +43487,7 @@
                 <a:ea typeface="Calibri" pitchFamily="34" charset="-122"/>
                 <a:cs typeface="Calibri" pitchFamily="34" charset="-120"/>
               </a:rPr>
-              <a:t>Word Labs  •  wordlabs.app  •  Root: 'thermo' = heat or temperature</a:t>
+              <a:t>Word Labs  •  wordlabs.app  •  Root: 'thermo' = heat, temperature</a:t>
             </a:r>
             <a:endParaRPr lang="en-US" sz="800" dirty="0"/>
           </a:p>
@@ -42573,7 +43665,7 @@
                 <a:ea typeface="Calibri" pitchFamily="34" charset="-122"/>
                 <a:cs typeface="Calibri" pitchFamily="34" charset="-120"/>
               </a:rPr>
-              <a:t>A tool used to measure how hot or cold something is, like checking your body temperature when you are sick.</a:t>
+              <a:t>A tool used to measure how hot or cold something is, like when you check if you have a fever.</a:t>
             </a:r>
             <a:endParaRPr lang="en-US" sz="1200" dirty="0"/>
           </a:p>
@@ -42712,7 +43804,7 @@
                 <a:ea typeface="Calibri" pitchFamily="34" charset="-122"/>
                 <a:cs typeface="Calibri" pitchFamily="34" charset="-120"/>
               </a:rPr>
-              <a:t>A special container that keeps drinks hot or cold for a long time, like a flask you take on a picnic.</a:t>
+              <a:t>A special bottle that keeps drinks hot or cold for a long time by stopping heat from escaping.</a:t>
             </a:r>
             <a:endParaRPr lang="en-US" sz="1200" dirty="0"/>
           </a:p>
@@ -42851,7 +43943,7 @@
                 <a:ea typeface="Calibri" pitchFamily="34" charset="-122"/>
                 <a:cs typeface="Calibri" pitchFamily="34" charset="-120"/>
               </a:rPr>
-              <a:t>Describing a process or place that stays at the same temperature throughout.</a:t>
+              <a:t>A dangerous condition where your body temperature drops too low, often from being in cold water or freezing weather.</a:t>
             </a:r>
             <a:endParaRPr lang="en-US" sz="1200" dirty="0"/>
           </a:p>
@@ -42990,7 +44082,7 @@
                 <a:ea typeface="Calibri" pitchFamily="34" charset="-122"/>
                 <a:cs typeface="Calibri" pitchFamily="34" charset="-120"/>
               </a:rPr>
-              <a:t>The branch of science that studies how heat and energy move and change between objects.</a:t>
+              <a:t>The branch of science that studies how heat moves and changes into other forms of energy.</a:t>
             </a:r>
             <a:endParaRPr lang="en-US" sz="1200" dirty="0"/>
           </a:p>
@@ -43129,7 +44221,7 @@
                 <a:ea typeface="Calibri" pitchFamily="34" charset="-122"/>
                 <a:cs typeface="Calibri" pitchFamily="34" charset="-120"/>
               </a:rPr>
-              <a:t>Relating to heat that comes from deep inside the Earth, sometimes used to make electricity or heat buildings.</a:t>
+              <a:t>Relating to the natural heat found deep inside the Earth, which can be used to make electricity.</a:t>
             </a:r>
             <a:endParaRPr lang="en-US" sz="1200" dirty="0"/>
           </a:p>
@@ -43202,7 +44294,7 @@
                 <a:ea typeface="Trebuchet MS" pitchFamily="34" charset="-122"/>
                 <a:cs typeface="Trebuchet MS" pitchFamily="34" charset="-120"/>
               </a:rPr>
-              <a:t>isothermal</a:t>
+              <a:t>hypothermia</a:t>
             </a:r>
             <a:endParaRPr lang="en-US" sz="1200" dirty="0"/>
           </a:p>
@@ -43268,7 +44360,7 @@
                 <a:ea typeface="Calibri" pitchFamily="34" charset="-122"/>
                 <a:cs typeface="Calibri" pitchFamily="34" charset="-120"/>
               </a:rPr>
-              <a:t>A very high layer of Earth's atmosphere where temperatures can get extremely hot because of energy from the Sun.</a:t>
+              <a:t>Relating to heat, or clothing designed to keep your body warm in cold conditions.</a:t>
             </a:r>
             <a:endParaRPr lang="en-US" sz="1200" dirty="0"/>
           </a:p>
@@ -43341,7 +44433,7 @@
                 <a:ea typeface="Trebuchet MS" pitchFamily="34" charset="-122"/>
                 <a:cs typeface="Trebuchet MS" pitchFamily="34" charset="-120"/>
               </a:rPr>
-              <a:t>thermosphere</a:t>
+              <a:t>thermal</a:t>
             </a:r>
             <a:endParaRPr lang="en-US" sz="1200" dirty="0"/>
           </a:p>
@@ -43407,7 +44499,7 @@
                 <a:ea typeface="Calibri" pitchFamily="34" charset="-122"/>
                 <a:cs typeface="Calibri" pitchFamily="34" charset="-120"/>
               </a:rPr>
-              <a:t>A device that controls the temperature in a room or building by turning heating or cooling on and off automatically.</a:t>
+              <a:t>A device that controls the temperature in a room or building, turning heating or cooling on and off automatically.</a:t>
             </a:r>
             <a:endParaRPr lang="en-US" sz="1200" dirty="0"/>
           </a:p>
@@ -43699,7 +44791,7 @@
                 <a:ea typeface="Calibri" pitchFamily="34" charset="-122"/>
                 <a:cs typeface="Calibri" pitchFamily="34" charset="-120"/>
               </a:rPr>
-              <a:t>Word Labs  •  wordlabs.app  •  Root: 'thermo' = heat or temperature</a:t>
+              <a:t>Word Labs  •  wordlabs.app  •  Root: 'thermo' = heat, temperature</a:t>
             </a:r>
             <a:endParaRPr lang="en-US" sz="800" dirty="0"/>
           </a:p>
@@ -44230,7 +45322,7 @@
                 <a:ea typeface="Calibri" pitchFamily="34" charset="-122"/>
                 <a:cs typeface="Calibri" pitchFamily="34" charset="-120"/>
               </a:rPr>
-              <a:t>Scientists study geothermal energy as a way to produce electricity without burning fossil fuels.</a:t>
+              <a:t>Dad filled the thermos with hot chocolate so we could enjoy a warm drink at the football match.</a:t>
             </a:r>
             <a:endParaRPr lang="en-US" sz="1500" dirty="0"/>
           </a:p>
